--- a/Lectures/Lecture 02.2 - R.pptx
+++ b/Lectures/Lecture 02.2 - R.pptx
@@ -7,11 +7,11 @@
   <p:sldIdLst>
     <p:sldId id="256" r:id="rId2"/>
     <p:sldId id="259" r:id="rId3"/>
-    <p:sldId id="279" r:id="rId4"/>
-    <p:sldId id="280" r:id="rId5"/>
-    <p:sldId id="281" r:id="rId6"/>
-    <p:sldId id="282" r:id="rId7"/>
-    <p:sldId id="261" r:id="rId8"/>
+    <p:sldId id="280" r:id="rId4"/>
+    <p:sldId id="281" r:id="rId5"/>
+    <p:sldId id="282" r:id="rId6"/>
+    <p:sldId id="261" r:id="rId7"/>
+    <p:sldId id="297" r:id="rId8"/>
     <p:sldId id="283" r:id="rId9"/>
     <p:sldId id="284" r:id="rId10"/>
     <p:sldId id="285" r:id="rId11"/>
@@ -23,20 +23,19 @@
     <p:sldId id="290" r:id="rId17"/>
     <p:sldId id="291" r:id="rId18"/>
     <p:sldId id="272" r:id="rId19"/>
-    <p:sldId id="273" r:id="rId20"/>
-    <p:sldId id="292" r:id="rId21"/>
-    <p:sldId id="274" r:id="rId22"/>
-    <p:sldId id="275" r:id="rId23"/>
-    <p:sldId id="293" r:id="rId24"/>
-    <p:sldId id="294" r:id="rId25"/>
-    <p:sldId id="260" r:id="rId26"/>
-    <p:sldId id="295" r:id="rId27"/>
-    <p:sldId id="262" r:id="rId28"/>
-    <p:sldId id="263" r:id="rId29"/>
-    <p:sldId id="264" r:id="rId30"/>
-    <p:sldId id="265" r:id="rId31"/>
-    <p:sldId id="266" r:id="rId32"/>
-    <p:sldId id="277" r:id="rId33"/>
+    <p:sldId id="292" r:id="rId20"/>
+    <p:sldId id="275" r:id="rId21"/>
+    <p:sldId id="296" r:id="rId22"/>
+    <p:sldId id="293" r:id="rId23"/>
+    <p:sldId id="294" r:id="rId24"/>
+    <p:sldId id="260" r:id="rId25"/>
+    <p:sldId id="295" r:id="rId26"/>
+    <p:sldId id="262" r:id="rId27"/>
+    <p:sldId id="263" r:id="rId28"/>
+    <p:sldId id="264" r:id="rId29"/>
+    <p:sldId id="265" r:id="rId30"/>
+    <p:sldId id="266" r:id="rId31"/>
+    <p:sldId id="277" r:id="rId32"/>
   </p:sldIdLst>
   <p:sldSz cx="12192000" cy="6858000"/>
   <p:notesSz cx="6858000" cy="9144000"/>
@@ -484,7 +483,7 @@
           <a:p>
             <a:fld id="{494CC62B-EE64-493C-ACFA-F64AA6808250}" type="datetimeFigureOut">
               <a:rPr lang="en-GB" smtClean="0"/>
-              <a:t>18/08/2024</a:t>
+              <a:t>04/09/2024</a:t>
             </a:fld>
             <a:endParaRPr lang="en-GB"/>
           </a:p>
@@ -694,7 +693,7 @@
           <a:p>
             <a:fld id="{494CC62B-EE64-493C-ACFA-F64AA6808250}" type="datetimeFigureOut">
               <a:rPr lang="en-GB" smtClean="0"/>
-              <a:t>18/08/2024</a:t>
+              <a:t>04/09/2024</a:t>
             </a:fld>
             <a:endParaRPr lang="en-GB"/>
           </a:p>
@@ -916,7 +915,7 @@
           <a:p>
             <a:fld id="{494CC62B-EE64-493C-ACFA-F64AA6808250}" type="datetimeFigureOut">
               <a:rPr lang="en-GB" smtClean="0"/>
-              <a:t>18/08/2024</a:t>
+              <a:t>04/09/2024</a:t>
             </a:fld>
             <a:endParaRPr lang="en-GB"/>
           </a:p>
@@ -1116,7 +1115,7 @@
           <a:p>
             <a:fld id="{6AF2DC2B-FEE6-469D-B9B0-5A8256869BC2}" type="datetimeFigureOut">
               <a:rPr lang="en-GB" smtClean="0"/>
-              <a:t>18/08/2024</a:t>
+              <a:t>04/09/2024</a:t>
             </a:fld>
             <a:endParaRPr lang="en-GB"/>
           </a:p>
@@ -2055,7 +2054,7 @@
           <a:p>
             <a:fld id="{494CC62B-EE64-493C-ACFA-F64AA6808250}" type="datetimeFigureOut">
               <a:rPr lang="en-GB" smtClean="0"/>
-              <a:t>18/08/2024</a:t>
+              <a:t>04/09/2024</a:t>
             </a:fld>
             <a:endParaRPr lang="en-GB"/>
           </a:p>
@@ -2197,7 +2196,7 @@
           <a:p>
             <a:fld id="{494CC62B-EE64-493C-ACFA-F64AA6808250}" type="datetimeFigureOut">
               <a:rPr lang="en-GB" smtClean="0"/>
-              <a:t>18/08/2024</a:t>
+              <a:t>04/09/2024</a:t>
             </a:fld>
             <a:endParaRPr lang="en-GB"/>
           </a:p>
@@ -2310,7 +2309,7 @@
           <a:p>
             <a:fld id="{494CC62B-EE64-493C-ACFA-F64AA6808250}" type="datetimeFigureOut">
               <a:rPr lang="en-GB" smtClean="0"/>
-              <a:t>18/08/2024</a:t>
+              <a:t>04/09/2024</a:t>
             </a:fld>
             <a:endParaRPr lang="en-GB"/>
           </a:p>
@@ -2623,7 +2622,7 @@
           <a:p>
             <a:fld id="{494CC62B-EE64-493C-ACFA-F64AA6808250}" type="datetimeFigureOut">
               <a:rPr lang="en-GB" smtClean="0"/>
-              <a:t>18/08/2024</a:t>
+              <a:t>04/09/2024</a:t>
             </a:fld>
             <a:endParaRPr lang="en-GB"/>
           </a:p>
@@ -2916,7 +2915,7 @@
           <a:p>
             <a:fld id="{494CC62B-EE64-493C-ACFA-F64AA6808250}" type="datetimeFigureOut">
               <a:rPr lang="en-GB" smtClean="0"/>
-              <a:t>18/08/2024</a:t>
+              <a:t>04/09/2024</a:t>
             </a:fld>
             <a:endParaRPr lang="en-GB"/>
           </a:p>
@@ -3159,7 +3158,7 @@
           <a:p>
             <a:fld id="{494CC62B-EE64-493C-ACFA-F64AA6808250}" type="datetimeFigureOut">
               <a:rPr lang="en-GB" smtClean="0"/>
-              <a:t>18/08/2024</a:t>
+              <a:t>04/09/2024</a:t>
             </a:fld>
             <a:endParaRPr lang="en-GB"/>
           </a:p>
@@ -3716,13 +3715,13 @@
           <a:p>
             <a:r>
               <a:rPr lang="en-GB" dirty="0"/>
-              <a:t>Assume</a:t>
+              <a:t>Newts!</a:t>
             </a:r>
           </a:p>
         </p:txBody>
       </p:sp>
-      <mc:AlternateContent xmlns:mc="http://schemas.openxmlformats.org/markup-compatibility/2006" xmlns:a14="http://schemas.microsoft.com/office/drawing/2010/main">
-        <mc:Choice Requires="a14">
+      <mc:AlternateContent xmlns:mc="http://schemas.openxmlformats.org/markup-compatibility/2006">
+        <mc:Choice xmlns:a14="http://schemas.microsoft.com/office/drawing/2010/main" Requires="a14">
           <p:sp>
             <p:nvSpPr>
               <p:cNvPr id="3" name="Content Placeholder 2">
@@ -3742,7 +3741,7 @@
             <p:spPr>
               <a:xfrm>
                 <a:off x="0" y="1426613"/>
-                <a:ext cx="6462346" cy="5240194"/>
+                <a:ext cx="6462346" cy="4719210"/>
               </a:xfrm>
             </p:spPr>
             <p:txBody>
@@ -3751,59 +3750,21 @@
               <a:p>
                 <a:r>
                   <a:rPr lang="en-GB" dirty="0"/>
-                  <a:t>On day 1 we catch and mark 20 crested newts</a:t>
+                  <a:t>On day 1 we catch and mark 20 crested newts (</a:t>
                 </a:r>
-              </a:p>
-              <a:p>
-                <a:r>
-                  <a:rPr lang="en-GB" dirty="0"/>
-                  <a:t>On day 2, we catch 30 crested newts</a:t>
-                </a:r>
-              </a:p>
-              <a:p>
-                <a:r>
-                  <a:rPr lang="en-GB" dirty="0"/>
-                  <a:t>Of which 10 have marks we put on yesterday</a:t>
-                </a:r>
-              </a:p>
-              <a:p>
-                <a:r>
-                  <a:rPr lang="en-GB" dirty="0"/>
-                  <a:t>Where:</a:t>
-                </a:r>
-              </a:p>
-              <a:p>
-                <a:pPr lvl="1"/>
-                <a14:m>
-                  <m:oMath xmlns:m="http://schemas.openxmlformats.org/officeDocument/2006/math">
-                    <m:r>
-                      <a:rPr lang="en-GB" sz="2200" i="1">
-                        <a:latin typeface="Cambria Math" panose="02040503050406030204" pitchFamily="18" charset="0"/>
-                      </a:rPr>
-                      <m:t>𝑁</m:t>
-                    </m:r>
-                  </m:oMath>
-                </a14:m>
-                <a:r>
-                  <a:rPr lang="en-GB" sz="2200" dirty="0"/>
-                  <a:t> is the total number of animals</a:t>
-                </a:r>
-              </a:p>
-              <a:p>
-                <a:pPr lvl="1"/>
                 <a14:m>
                   <m:oMath xmlns:m="http://schemas.openxmlformats.org/officeDocument/2006/math">
                     <m:sSub>
                       <m:sSubPr>
                         <m:ctrlPr>
-                          <a:rPr lang="en-GB" sz="2200" i="1">
+                          <a:rPr lang="en-GB" b="0" i="1" smtClean="0">
                             <a:latin typeface="Cambria Math" panose="02040503050406030204" pitchFamily="18" charset="0"/>
                           </a:rPr>
                         </m:ctrlPr>
                       </m:sSubPr>
                       <m:e>
                         <m:r>
-                          <a:rPr lang="en-GB" sz="2200" i="1">
+                          <a:rPr lang="en-GB" b="0" i="1" smtClean="0">
                             <a:latin typeface="Cambria Math" panose="02040503050406030204" pitchFamily="18" charset="0"/>
                           </a:rPr>
                           <m:t>𝑛</m:t>
@@ -3811,35 +3772,44 @@
                       </m:e>
                       <m:sub>
                         <m:r>
-                          <a:rPr lang="en-GB" sz="2200" i="1">
+                          <a:rPr lang="en-GB" b="0" i="1" smtClean="0">
                             <a:latin typeface="Cambria Math" panose="02040503050406030204" pitchFamily="18" charset="0"/>
                           </a:rPr>
                           <m:t>1</m:t>
                         </m:r>
                       </m:sub>
                     </m:sSub>
+                    <m:r>
+                      <a:rPr lang="en-GB" b="0" i="1" smtClean="0">
+                        <a:latin typeface="Cambria Math" panose="02040503050406030204" pitchFamily="18" charset="0"/>
+                      </a:rPr>
+                      <m:t>=20</m:t>
+                    </m:r>
                   </m:oMath>
                 </a14:m>
                 <a:r>
-                  <a:rPr lang="en-GB" sz="2200" dirty="0"/>
-                  <a:t> is the number of animals caught on day 1</a:t>
+                  <a:rPr lang="en-GB" dirty="0"/>
+                  <a:t>)</a:t>
                 </a:r>
               </a:p>
               <a:p>
-                <a:pPr lvl="1"/>
+                <a:r>
+                  <a:rPr lang="en-GB" dirty="0"/>
+                  <a:t>On day 2, we catch 30 crested newts (</a:t>
+                </a:r>
                 <a14:m>
                   <m:oMath xmlns:m="http://schemas.openxmlformats.org/officeDocument/2006/math">
                     <m:sSub>
                       <m:sSubPr>
                         <m:ctrlPr>
-                          <a:rPr lang="en-GB" sz="2200" i="1">
+                          <a:rPr lang="en-GB" b="0" i="1" smtClean="0">
                             <a:latin typeface="Cambria Math" panose="02040503050406030204" pitchFamily="18" charset="0"/>
                           </a:rPr>
                         </m:ctrlPr>
                       </m:sSubPr>
                       <m:e>
                         <m:r>
-                          <a:rPr lang="en-GB" sz="2200" i="1">
+                          <a:rPr lang="en-GB" b="0" i="1" smtClean="0">
                             <a:latin typeface="Cambria Math" panose="02040503050406030204" pitchFamily="18" charset="0"/>
                           </a:rPr>
                           <m:t>𝑛</m:t>
@@ -3847,35 +3817,44 @@
                       </m:e>
                       <m:sub>
                         <m:r>
-                          <a:rPr lang="en-GB" sz="2200" i="1">
+                          <a:rPr lang="en-GB" b="0" i="1" smtClean="0">
                             <a:latin typeface="Cambria Math" panose="02040503050406030204" pitchFamily="18" charset="0"/>
                           </a:rPr>
                           <m:t>2</m:t>
                         </m:r>
                       </m:sub>
                     </m:sSub>
+                    <m:r>
+                      <a:rPr lang="en-GB" b="0" i="1" smtClean="0">
+                        <a:latin typeface="Cambria Math" panose="02040503050406030204" pitchFamily="18" charset="0"/>
+                      </a:rPr>
+                      <m:t>=30</m:t>
+                    </m:r>
                   </m:oMath>
                 </a14:m>
                 <a:r>
-                  <a:rPr lang="en-GB" sz="2200" dirty="0"/>
-                  <a:t> is the number of animals caught on day 2</a:t>
+                  <a:rPr lang="en-GB" dirty="0"/>
+                  <a:t>)</a:t>
                 </a:r>
               </a:p>
               <a:p>
-                <a:pPr lvl="1"/>
+                <a:r>
+                  <a:rPr lang="en-GB" dirty="0"/>
+                  <a:t>Of which 10 have marks we put on yesterday (</a:t>
+                </a:r>
                 <a14:m>
                   <m:oMath xmlns:m="http://schemas.openxmlformats.org/officeDocument/2006/math">
                     <m:sSub>
                       <m:sSubPr>
                         <m:ctrlPr>
-                          <a:rPr lang="en-GB" sz="2200" i="1">
+                          <a:rPr lang="en-GB" b="0" i="1" smtClean="0">
                             <a:latin typeface="Cambria Math" panose="02040503050406030204" pitchFamily="18" charset="0"/>
                           </a:rPr>
                         </m:ctrlPr>
                       </m:sSubPr>
                       <m:e>
                         <m:r>
-                          <a:rPr lang="en-GB" sz="2200" i="1">
+                          <a:rPr lang="en-GB" b="0" i="1" smtClean="0">
                             <a:latin typeface="Cambria Math" panose="02040503050406030204" pitchFamily="18" charset="0"/>
                           </a:rPr>
                           <m:t>𝑚</m:t>
@@ -3883,24 +3862,30 @@
                       </m:e>
                       <m:sub>
                         <m:r>
-                          <a:rPr lang="en-GB" sz="2200" i="1">
+                          <a:rPr lang="en-GB" b="0" i="1" smtClean="0">
                             <a:latin typeface="Cambria Math" panose="02040503050406030204" pitchFamily="18" charset="0"/>
                           </a:rPr>
                           <m:t>2</m:t>
                         </m:r>
                       </m:sub>
                     </m:sSub>
+                    <m:r>
+                      <a:rPr lang="en-GB" b="0" i="1" smtClean="0">
+                        <a:latin typeface="Cambria Math" panose="02040503050406030204" pitchFamily="18" charset="0"/>
+                      </a:rPr>
+                      <m:t>=10</m:t>
+                    </m:r>
                   </m:oMath>
                 </a14:m>
                 <a:r>
-                  <a:rPr lang="en-GB" sz="2200" dirty="0"/>
-                  <a:t> is the number of marked animals caught on day 2</a:t>
+                  <a:rPr lang="en-GB" dirty="0"/>
+                  <a:t>)</a:t>
                 </a:r>
               </a:p>
             </p:txBody>
           </p:sp>
         </mc:Choice>
-        <mc:Fallback xmlns="">
+        <mc:Fallback>
           <p:sp>
             <p:nvSpPr>
               <p:cNvPr id="3" name="Content Placeholder 2">
@@ -3920,12 +3905,12 @@
             <p:spPr>
               <a:xfrm>
                 <a:off x="0" y="1426613"/>
-                <a:ext cx="6462346" cy="5240194"/>
+                <a:ext cx="6462346" cy="4719210"/>
               </a:xfrm>
               <a:blipFill>
                 <a:blip r:embed="rId2"/>
                 <a:stretch>
-                  <a:fillRect l="-1698" r="-943"/>
+                  <a:fillRect l="-1698"/>
                 </a:stretch>
               </a:blipFill>
             </p:spPr>
@@ -4690,7 +4675,7 @@
                             </p:stCondLst>
                             <p:childTnLst>
                               <p:par>
-                                <p:cTn id="28" presetID="10" presetClass="entr" presetSubtype="0" fill="hold" grpId="0" nodeType="clickEffect">
+                                <p:cTn id="28" presetID="10" presetClass="entr" presetSubtype="0" fill="hold" nodeType="clickEffect">
                                   <p:stCondLst>
                                     <p:cond delay="0"/>
                                   </p:stCondLst>
@@ -4703,7 +4688,7 @@
                                           </p:stCondLst>
                                         </p:cTn>
                                         <p:tgtEl>
-                                          <p:spTgt spid="3">
+                                          <p:spTgt spid="5">
                                             <p:txEl>
                                               <p:pRg st="3" end="3"/>
                                             </p:txEl>
@@ -4721,181 +4706,9 @@
                                       <p:cBhvr>
                                         <p:cTn id="30" dur="500"/>
                                         <p:tgtEl>
-                                          <p:spTgt spid="3">
+                                          <p:spTgt spid="5">
                                             <p:txEl>
                                               <p:pRg st="3" end="3"/>
-                                            </p:txEl>
-                                          </p:spTgt>
-                                        </p:tgtEl>
-                                      </p:cBhvr>
-                                    </p:animEffect>
-                                  </p:childTnLst>
-                                </p:cTn>
-                              </p:par>
-                              <p:par>
-                                <p:cTn id="31" presetID="10" presetClass="entr" presetSubtype="0" fill="hold" grpId="0" nodeType="withEffect">
-                                  <p:stCondLst>
-                                    <p:cond delay="0"/>
-                                  </p:stCondLst>
-                                  <p:childTnLst>
-                                    <p:set>
-                                      <p:cBhvr>
-                                        <p:cTn id="32" dur="1" fill="hold">
-                                          <p:stCondLst>
-                                            <p:cond delay="0"/>
-                                          </p:stCondLst>
-                                        </p:cTn>
-                                        <p:tgtEl>
-                                          <p:spTgt spid="3">
-                                            <p:txEl>
-                                              <p:pRg st="4" end="4"/>
-                                            </p:txEl>
-                                          </p:spTgt>
-                                        </p:tgtEl>
-                                        <p:attrNameLst>
-                                          <p:attrName>style.visibility</p:attrName>
-                                        </p:attrNameLst>
-                                      </p:cBhvr>
-                                      <p:to>
-                                        <p:strVal val="visible"/>
-                                      </p:to>
-                                    </p:set>
-                                    <p:animEffect transition="in" filter="fade">
-                                      <p:cBhvr>
-                                        <p:cTn id="33" dur="500"/>
-                                        <p:tgtEl>
-                                          <p:spTgt spid="3">
-                                            <p:txEl>
-                                              <p:pRg st="4" end="4"/>
-                                            </p:txEl>
-                                          </p:spTgt>
-                                        </p:tgtEl>
-                                      </p:cBhvr>
-                                    </p:animEffect>
-                                  </p:childTnLst>
-                                </p:cTn>
-                              </p:par>
-                              <p:par>
-                                <p:cTn id="34" presetID="10" presetClass="entr" presetSubtype="0" fill="hold" grpId="0" nodeType="withEffect">
-                                  <p:stCondLst>
-                                    <p:cond delay="0"/>
-                                  </p:stCondLst>
-                                  <p:childTnLst>
-                                    <p:set>
-                                      <p:cBhvr>
-                                        <p:cTn id="35" dur="1" fill="hold">
-                                          <p:stCondLst>
-                                            <p:cond delay="0"/>
-                                          </p:stCondLst>
-                                        </p:cTn>
-                                        <p:tgtEl>
-                                          <p:spTgt spid="3">
-                                            <p:txEl>
-                                              <p:pRg st="5" end="5"/>
-                                            </p:txEl>
-                                          </p:spTgt>
-                                        </p:tgtEl>
-                                        <p:attrNameLst>
-                                          <p:attrName>style.visibility</p:attrName>
-                                        </p:attrNameLst>
-                                      </p:cBhvr>
-                                      <p:to>
-                                        <p:strVal val="visible"/>
-                                      </p:to>
-                                    </p:set>
-                                    <p:animEffect transition="in" filter="fade">
-                                      <p:cBhvr>
-                                        <p:cTn id="36" dur="500"/>
-                                        <p:tgtEl>
-                                          <p:spTgt spid="3">
-                                            <p:txEl>
-                                              <p:pRg st="5" end="5"/>
-                                            </p:txEl>
-                                          </p:spTgt>
-                                        </p:tgtEl>
-                                      </p:cBhvr>
-                                    </p:animEffect>
-                                  </p:childTnLst>
-                                </p:cTn>
-                              </p:par>
-                              <p:par>
-                                <p:cTn id="37" presetID="10" presetClass="entr" presetSubtype="0" fill="hold" grpId="0" nodeType="withEffect">
-                                  <p:stCondLst>
-                                    <p:cond delay="0"/>
-                                  </p:stCondLst>
-                                  <p:childTnLst>
-                                    <p:set>
-                                      <p:cBhvr>
-                                        <p:cTn id="38" dur="1" fill="hold">
-                                          <p:stCondLst>
-                                            <p:cond delay="0"/>
-                                          </p:stCondLst>
-                                        </p:cTn>
-                                        <p:tgtEl>
-                                          <p:spTgt spid="3">
-                                            <p:txEl>
-                                              <p:pRg st="6" end="6"/>
-                                            </p:txEl>
-                                          </p:spTgt>
-                                        </p:tgtEl>
-                                        <p:attrNameLst>
-                                          <p:attrName>style.visibility</p:attrName>
-                                        </p:attrNameLst>
-                                      </p:cBhvr>
-                                      <p:to>
-                                        <p:strVal val="visible"/>
-                                      </p:to>
-                                    </p:set>
-                                    <p:animEffect transition="in" filter="fade">
-                                      <p:cBhvr>
-                                        <p:cTn id="39" dur="500"/>
-                                        <p:tgtEl>
-                                          <p:spTgt spid="3">
-                                            <p:txEl>
-                                              <p:pRg st="6" end="6"/>
-                                            </p:txEl>
-                                          </p:spTgt>
-                                        </p:tgtEl>
-                                      </p:cBhvr>
-                                    </p:animEffect>
-                                  </p:childTnLst>
-                                </p:cTn>
-                              </p:par>
-                              <p:par>
-                                <p:cTn id="40" presetID="10" presetClass="entr" presetSubtype="0" fill="hold" grpId="0" nodeType="withEffect">
-                                  <p:stCondLst>
-                                    <p:cond delay="0"/>
-                                  </p:stCondLst>
-                                  <p:childTnLst>
-                                    <p:set>
-                                      <p:cBhvr>
-                                        <p:cTn id="41" dur="1" fill="hold">
-                                          <p:stCondLst>
-                                            <p:cond delay="0"/>
-                                          </p:stCondLst>
-                                        </p:cTn>
-                                        <p:tgtEl>
-                                          <p:spTgt spid="3">
-                                            <p:txEl>
-                                              <p:pRg st="7" end="7"/>
-                                            </p:txEl>
-                                          </p:spTgt>
-                                        </p:tgtEl>
-                                        <p:attrNameLst>
-                                          <p:attrName>style.visibility</p:attrName>
-                                        </p:attrNameLst>
-                                      </p:cBhvr>
-                                      <p:to>
-                                        <p:strVal val="visible"/>
-                                      </p:to>
-                                    </p:set>
-                                    <p:animEffect transition="in" filter="fade">
-                                      <p:cBhvr>
-                                        <p:cTn id="42" dur="500"/>
-                                        <p:tgtEl>
-                                          <p:spTgt spid="3">
-                                            <p:txEl>
-                                              <p:pRg st="7" end="7"/>
                                             </p:txEl>
                                           </p:spTgt>
                                         </p:tgtEl>
@@ -4911,26 +4724,26 @@
                     </p:cTn>
                   </p:par>
                   <p:par>
-                    <p:cTn id="43" fill="hold">
+                    <p:cTn id="31" fill="hold">
                       <p:stCondLst>
                         <p:cond delay="indefinite"/>
                       </p:stCondLst>
                       <p:childTnLst>
                         <p:par>
-                          <p:cTn id="44" fill="hold">
+                          <p:cTn id="32" fill="hold">
                             <p:stCondLst>
                               <p:cond delay="0"/>
                             </p:stCondLst>
                             <p:childTnLst>
                               <p:par>
-                                <p:cTn id="45" presetID="10" presetClass="entr" presetSubtype="0" fill="hold" nodeType="clickEffect">
+                                <p:cTn id="33" presetID="10" presetClass="entr" presetSubtype="0" fill="hold" nodeType="clickEffect">
                                   <p:stCondLst>
                                     <p:cond delay="0"/>
                                   </p:stCondLst>
                                   <p:childTnLst>
                                     <p:set>
                                       <p:cBhvr>
-                                        <p:cTn id="46" dur="1" fill="hold">
+                                        <p:cTn id="34" dur="1" fill="hold">
                                           <p:stCondLst>
                                             <p:cond delay="0"/>
                                           </p:stCondLst>
@@ -4938,7 +4751,7 @@
                                         <p:tgtEl>
                                           <p:spTgt spid="5">
                                             <p:txEl>
-                                              <p:pRg st="3" end="3"/>
+                                              <p:pRg st="4" end="4"/>
                                             </p:txEl>
                                           </p:spTgt>
                                         </p:tgtEl>
@@ -4952,11 +4765,11 @@
                                     </p:set>
                                     <p:animEffect transition="in" filter="fade">
                                       <p:cBhvr>
-                                        <p:cTn id="47" dur="500"/>
+                                        <p:cTn id="35" dur="500"/>
                                         <p:tgtEl>
                                           <p:spTgt spid="5">
                                             <p:txEl>
-                                              <p:pRg st="3" end="3"/>
+                                              <p:pRg st="4" end="4"/>
                                             </p:txEl>
                                           </p:spTgt>
                                         </p:tgtEl>
@@ -4972,26 +4785,26 @@
                     </p:cTn>
                   </p:par>
                   <p:par>
-                    <p:cTn id="48" fill="hold">
+                    <p:cTn id="36" fill="hold">
                       <p:stCondLst>
                         <p:cond delay="indefinite"/>
                       </p:stCondLst>
                       <p:childTnLst>
                         <p:par>
-                          <p:cTn id="49" fill="hold">
+                          <p:cTn id="37" fill="hold">
                             <p:stCondLst>
                               <p:cond delay="0"/>
                             </p:stCondLst>
                             <p:childTnLst>
                               <p:par>
-                                <p:cTn id="50" presetID="10" presetClass="entr" presetSubtype="0" fill="hold" nodeType="clickEffect">
+                                <p:cTn id="38" presetID="10" presetClass="entr" presetSubtype="0" fill="hold" nodeType="clickEffect">
                                   <p:stCondLst>
                                     <p:cond delay="0"/>
                                   </p:stCondLst>
                                   <p:childTnLst>
                                     <p:set>
                                       <p:cBhvr>
-                                        <p:cTn id="51" dur="1" fill="hold">
+                                        <p:cTn id="39" dur="1" fill="hold">
                                           <p:stCondLst>
                                             <p:cond delay="0"/>
                                           </p:stCondLst>
@@ -4999,7 +4812,7 @@
                                         <p:tgtEl>
                                           <p:spTgt spid="5">
                                             <p:txEl>
-                                              <p:pRg st="4" end="4"/>
+                                              <p:pRg st="5" end="5"/>
                                             </p:txEl>
                                           </p:spTgt>
                                         </p:tgtEl>
@@ -5013,68 +4826,7 @@
                                     </p:set>
                                     <p:animEffect transition="in" filter="fade">
                                       <p:cBhvr>
-                                        <p:cTn id="52" dur="500"/>
-                                        <p:tgtEl>
-                                          <p:spTgt spid="5">
-                                            <p:txEl>
-                                              <p:pRg st="4" end="4"/>
-                                            </p:txEl>
-                                          </p:spTgt>
-                                        </p:tgtEl>
-                                      </p:cBhvr>
-                                    </p:animEffect>
-                                  </p:childTnLst>
-                                </p:cTn>
-                              </p:par>
-                            </p:childTnLst>
-                          </p:cTn>
-                        </p:par>
-                      </p:childTnLst>
-                    </p:cTn>
-                  </p:par>
-                  <p:par>
-                    <p:cTn id="53" fill="hold">
-                      <p:stCondLst>
-                        <p:cond delay="indefinite"/>
-                      </p:stCondLst>
-                      <p:childTnLst>
-                        <p:par>
-                          <p:cTn id="54" fill="hold">
-                            <p:stCondLst>
-                              <p:cond delay="0"/>
-                            </p:stCondLst>
-                            <p:childTnLst>
-                              <p:par>
-                                <p:cTn id="55" presetID="10" presetClass="entr" presetSubtype="0" fill="hold" nodeType="clickEffect">
-                                  <p:stCondLst>
-                                    <p:cond delay="0"/>
-                                  </p:stCondLst>
-                                  <p:childTnLst>
-                                    <p:set>
-                                      <p:cBhvr>
-                                        <p:cTn id="56" dur="1" fill="hold">
-                                          <p:stCondLst>
-                                            <p:cond delay="0"/>
-                                          </p:stCondLst>
-                                        </p:cTn>
-                                        <p:tgtEl>
-                                          <p:spTgt spid="5">
-                                            <p:txEl>
-                                              <p:pRg st="5" end="5"/>
-                                            </p:txEl>
-                                          </p:spTgt>
-                                        </p:tgtEl>
-                                        <p:attrNameLst>
-                                          <p:attrName>style.visibility</p:attrName>
-                                        </p:attrNameLst>
-                                      </p:cBhvr>
-                                      <p:to>
-                                        <p:strVal val="visible"/>
-                                      </p:to>
-                                    </p:set>
-                                    <p:animEffect transition="in" filter="fade">
-                                      <p:cBhvr>
-                                        <p:cTn id="57" dur="500"/>
+                                        <p:cTn id="40" dur="500"/>
                                         <p:tgtEl>
                                           <p:spTgt spid="5">
                                             <p:txEl>
@@ -8596,6 +8348,60 @@
           </p:sp>
         </mc:Fallback>
       </mc:AlternateContent>
+      <p:sp>
+        <p:nvSpPr>
+          <p:cNvPr id="4" name="Rectangle 3">
+            <a:extLst>
+              <a:ext uri="{FF2B5EF4-FFF2-40B4-BE49-F238E27FC236}">
+                <a16:creationId xmlns:a16="http://schemas.microsoft.com/office/drawing/2014/main" id="{C4D7775C-1AF9-155D-D5DB-63D3048C12DD}"/>
+              </a:ext>
+            </a:extLst>
+          </p:cNvPr>
+          <p:cNvSpPr/>
+          <p:nvPr/>
+        </p:nvSpPr>
+        <p:spPr>
+          <a:xfrm>
+            <a:off x="6096000" y="4017958"/>
+            <a:ext cx="6096000" cy="782642"/>
+          </a:xfrm>
+          <a:prstGeom prst="rect">
+            <a:avLst/>
+          </a:prstGeom>
+          <a:solidFill>
+            <a:schemeClr val="bg1"/>
+          </a:solidFill>
+          <a:ln>
+            <a:solidFill>
+              <a:schemeClr val="bg1"/>
+            </a:solidFill>
+          </a:ln>
+        </p:spPr>
+        <p:style>
+          <a:lnRef idx="2">
+            <a:schemeClr val="accent1">
+              <a:shade val="15000"/>
+            </a:schemeClr>
+          </a:lnRef>
+          <a:fillRef idx="1">
+            <a:schemeClr val="accent1"/>
+          </a:fillRef>
+          <a:effectRef idx="0">
+            <a:schemeClr val="accent1"/>
+          </a:effectRef>
+          <a:fontRef idx="minor">
+            <a:schemeClr val="lt1"/>
+          </a:fontRef>
+        </p:style>
+        <p:txBody>
+          <a:bodyPr rtlCol="0" anchor="ctr"/>
+          <a:lstStyle/>
+          <a:p>
+            <a:pPr algn="ctr"/>
+            <a:endParaRPr lang="en-GB"/>
+          </a:p>
+        </p:txBody>
+      </p:sp>
     </p:spTree>
     <p:extLst>
       <p:ext uri="{BB962C8B-B14F-4D97-AF65-F5344CB8AC3E}">
@@ -8606,6 +8412,415 @@
   <p:clrMapOvr>
     <a:masterClrMapping/>
   </p:clrMapOvr>
+  <p:timing>
+    <p:tnLst>
+      <p:par>
+        <p:cTn id="1" dur="indefinite" restart="never" nodeType="tmRoot">
+          <p:childTnLst>
+            <p:seq concurrent="1" nextAc="seek">
+              <p:cTn id="2" dur="indefinite" nodeType="mainSeq">
+                <p:childTnLst>
+                  <p:par>
+                    <p:cTn id="3" fill="hold">
+                      <p:stCondLst>
+                        <p:cond delay="indefinite"/>
+                      </p:stCondLst>
+                      <p:childTnLst>
+                        <p:par>
+                          <p:cTn id="4" fill="hold">
+                            <p:stCondLst>
+                              <p:cond delay="0"/>
+                            </p:stCondLst>
+                            <p:childTnLst>
+                              <p:par>
+                                <p:cTn id="5" presetID="10" presetClass="entr" presetSubtype="0" fill="hold" grpId="0" nodeType="clickEffect">
+                                  <p:stCondLst>
+                                    <p:cond delay="0"/>
+                                  </p:stCondLst>
+                                  <p:childTnLst>
+                                    <p:set>
+                                      <p:cBhvr>
+                                        <p:cTn id="6" dur="1" fill="hold">
+                                          <p:stCondLst>
+                                            <p:cond delay="0"/>
+                                          </p:stCondLst>
+                                        </p:cTn>
+                                        <p:tgtEl>
+                                          <p:spTgt spid="3">
+                                            <p:txEl>
+                                              <p:pRg st="0" end="0"/>
+                                            </p:txEl>
+                                          </p:spTgt>
+                                        </p:tgtEl>
+                                        <p:attrNameLst>
+                                          <p:attrName>style.visibility</p:attrName>
+                                        </p:attrNameLst>
+                                      </p:cBhvr>
+                                      <p:to>
+                                        <p:strVal val="visible"/>
+                                      </p:to>
+                                    </p:set>
+                                    <p:animEffect transition="in" filter="fade">
+                                      <p:cBhvr>
+                                        <p:cTn id="7" dur="500"/>
+                                        <p:tgtEl>
+                                          <p:spTgt spid="3">
+                                            <p:txEl>
+                                              <p:pRg st="0" end="0"/>
+                                            </p:txEl>
+                                          </p:spTgt>
+                                        </p:tgtEl>
+                                      </p:cBhvr>
+                                    </p:animEffect>
+                                  </p:childTnLst>
+                                </p:cTn>
+                              </p:par>
+                              <p:par>
+                                <p:cTn id="8" presetID="10" presetClass="entr" presetSubtype="0" fill="hold" nodeType="withEffect">
+                                  <p:stCondLst>
+                                    <p:cond delay="0"/>
+                                  </p:stCondLst>
+                                  <p:childTnLst>
+                                    <p:set>
+                                      <p:cBhvr>
+                                        <p:cTn id="9" dur="1" fill="hold">
+                                          <p:stCondLst>
+                                            <p:cond delay="0"/>
+                                          </p:stCondLst>
+                                        </p:cTn>
+                                        <p:tgtEl>
+                                          <p:spTgt spid="10"/>
+                                        </p:tgtEl>
+                                        <p:attrNameLst>
+                                          <p:attrName>style.visibility</p:attrName>
+                                        </p:attrNameLst>
+                                      </p:cBhvr>
+                                      <p:to>
+                                        <p:strVal val="visible"/>
+                                      </p:to>
+                                    </p:set>
+                                    <p:animEffect transition="in" filter="fade">
+                                      <p:cBhvr>
+                                        <p:cTn id="10" dur="500"/>
+                                        <p:tgtEl>
+                                          <p:spTgt spid="10"/>
+                                        </p:tgtEl>
+                                      </p:cBhvr>
+                                    </p:animEffect>
+                                  </p:childTnLst>
+                                </p:cTn>
+                              </p:par>
+                            </p:childTnLst>
+                          </p:cTn>
+                        </p:par>
+                      </p:childTnLst>
+                    </p:cTn>
+                  </p:par>
+                  <p:par>
+                    <p:cTn id="11" fill="hold">
+                      <p:stCondLst>
+                        <p:cond delay="indefinite"/>
+                      </p:stCondLst>
+                      <p:childTnLst>
+                        <p:par>
+                          <p:cTn id="12" fill="hold">
+                            <p:stCondLst>
+                              <p:cond delay="0"/>
+                            </p:stCondLst>
+                            <p:childTnLst>
+                              <p:par>
+                                <p:cTn id="13" presetID="10" presetClass="entr" presetSubtype="0" fill="hold" grpId="0" nodeType="clickEffect">
+                                  <p:stCondLst>
+                                    <p:cond delay="0"/>
+                                  </p:stCondLst>
+                                  <p:childTnLst>
+                                    <p:set>
+                                      <p:cBhvr>
+                                        <p:cTn id="14" dur="1" fill="hold">
+                                          <p:stCondLst>
+                                            <p:cond delay="0"/>
+                                          </p:stCondLst>
+                                        </p:cTn>
+                                        <p:tgtEl>
+                                          <p:spTgt spid="3">
+                                            <p:txEl>
+                                              <p:pRg st="1" end="1"/>
+                                            </p:txEl>
+                                          </p:spTgt>
+                                        </p:tgtEl>
+                                        <p:attrNameLst>
+                                          <p:attrName>style.visibility</p:attrName>
+                                        </p:attrNameLst>
+                                      </p:cBhvr>
+                                      <p:to>
+                                        <p:strVal val="visible"/>
+                                      </p:to>
+                                    </p:set>
+                                    <p:animEffect transition="in" filter="fade">
+                                      <p:cBhvr>
+                                        <p:cTn id="15" dur="500"/>
+                                        <p:tgtEl>
+                                          <p:spTgt spid="3">
+                                            <p:txEl>
+                                              <p:pRg st="1" end="1"/>
+                                            </p:txEl>
+                                          </p:spTgt>
+                                        </p:tgtEl>
+                                      </p:cBhvr>
+                                    </p:animEffect>
+                                  </p:childTnLst>
+                                </p:cTn>
+                              </p:par>
+                            </p:childTnLst>
+                          </p:cTn>
+                        </p:par>
+                      </p:childTnLst>
+                    </p:cTn>
+                  </p:par>
+                  <p:par>
+                    <p:cTn id="16" fill="hold">
+                      <p:stCondLst>
+                        <p:cond delay="indefinite"/>
+                      </p:stCondLst>
+                      <p:childTnLst>
+                        <p:par>
+                          <p:cTn id="17" fill="hold">
+                            <p:stCondLst>
+                              <p:cond delay="0"/>
+                            </p:stCondLst>
+                            <p:childTnLst>
+                              <p:par>
+                                <p:cTn id="18" presetID="10" presetClass="entr" presetSubtype="0" fill="hold" grpId="0" nodeType="clickEffect">
+                                  <p:stCondLst>
+                                    <p:cond delay="0"/>
+                                  </p:stCondLst>
+                                  <p:childTnLst>
+                                    <p:set>
+                                      <p:cBhvr>
+                                        <p:cTn id="19" dur="1" fill="hold">
+                                          <p:stCondLst>
+                                            <p:cond delay="0"/>
+                                          </p:stCondLst>
+                                        </p:cTn>
+                                        <p:tgtEl>
+                                          <p:spTgt spid="3">
+                                            <p:txEl>
+                                              <p:pRg st="2" end="2"/>
+                                            </p:txEl>
+                                          </p:spTgt>
+                                        </p:tgtEl>
+                                        <p:attrNameLst>
+                                          <p:attrName>style.visibility</p:attrName>
+                                        </p:attrNameLst>
+                                      </p:cBhvr>
+                                      <p:to>
+                                        <p:strVal val="visible"/>
+                                      </p:to>
+                                    </p:set>
+                                    <p:animEffect transition="in" filter="fade">
+                                      <p:cBhvr>
+                                        <p:cTn id="20" dur="500"/>
+                                        <p:tgtEl>
+                                          <p:spTgt spid="3">
+                                            <p:txEl>
+                                              <p:pRg st="2" end="2"/>
+                                            </p:txEl>
+                                          </p:spTgt>
+                                        </p:tgtEl>
+                                      </p:cBhvr>
+                                    </p:animEffect>
+                                  </p:childTnLst>
+                                </p:cTn>
+                              </p:par>
+                            </p:childTnLst>
+                          </p:cTn>
+                        </p:par>
+                      </p:childTnLst>
+                    </p:cTn>
+                  </p:par>
+                  <p:par>
+                    <p:cTn id="21" fill="hold">
+                      <p:stCondLst>
+                        <p:cond delay="indefinite"/>
+                      </p:stCondLst>
+                      <p:childTnLst>
+                        <p:par>
+                          <p:cTn id="22" fill="hold">
+                            <p:stCondLst>
+                              <p:cond delay="0"/>
+                            </p:stCondLst>
+                            <p:childTnLst>
+                              <p:par>
+                                <p:cTn id="23" presetID="10" presetClass="entr" presetSubtype="0" fill="hold" grpId="0" nodeType="clickEffect">
+                                  <p:stCondLst>
+                                    <p:cond delay="0"/>
+                                  </p:stCondLst>
+                                  <p:childTnLst>
+                                    <p:set>
+                                      <p:cBhvr>
+                                        <p:cTn id="24" dur="1" fill="hold">
+                                          <p:stCondLst>
+                                            <p:cond delay="0"/>
+                                          </p:stCondLst>
+                                        </p:cTn>
+                                        <p:tgtEl>
+                                          <p:spTgt spid="3">
+                                            <p:txEl>
+                                              <p:pRg st="3" end="3"/>
+                                            </p:txEl>
+                                          </p:spTgt>
+                                        </p:tgtEl>
+                                        <p:attrNameLst>
+                                          <p:attrName>style.visibility</p:attrName>
+                                        </p:attrNameLst>
+                                      </p:cBhvr>
+                                      <p:to>
+                                        <p:strVal val="visible"/>
+                                      </p:to>
+                                    </p:set>
+                                    <p:animEffect transition="in" filter="fade">
+                                      <p:cBhvr>
+                                        <p:cTn id="25" dur="500"/>
+                                        <p:tgtEl>
+                                          <p:spTgt spid="3">
+                                            <p:txEl>
+                                              <p:pRg st="3" end="3"/>
+                                            </p:txEl>
+                                          </p:spTgt>
+                                        </p:tgtEl>
+                                      </p:cBhvr>
+                                    </p:animEffect>
+                                  </p:childTnLst>
+                                </p:cTn>
+                              </p:par>
+                              <p:par>
+                                <p:cTn id="26" presetID="10" presetClass="exit" presetSubtype="0" fill="hold" grpId="0" nodeType="withEffect">
+                                  <p:stCondLst>
+                                    <p:cond delay="0"/>
+                                  </p:stCondLst>
+                                  <p:childTnLst>
+                                    <p:animEffect transition="out" filter="fade">
+                                      <p:cBhvr>
+                                        <p:cTn id="27" dur="500"/>
+                                        <p:tgtEl>
+                                          <p:spTgt spid="4"/>
+                                        </p:tgtEl>
+                                      </p:cBhvr>
+                                    </p:animEffect>
+                                    <p:set>
+                                      <p:cBhvr>
+                                        <p:cTn id="28" dur="1" fill="hold">
+                                          <p:stCondLst>
+                                            <p:cond delay="499"/>
+                                          </p:stCondLst>
+                                        </p:cTn>
+                                        <p:tgtEl>
+                                          <p:spTgt spid="4"/>
+                                        </p:tgtEl>
+                                        <p:attrNameLst>
+                                          <p:attrName>style.visibility</p:attrName>
+                                        </p:attrNameLst>
+                                      </p:cBhvr>
+                                      <p:to>
+                                        <p:strVal val="hidden"/>
+                                      </p:to>
+                                    </p:set>
+                                  </p:childTnLst>
+                                </p:cTn>
+                              </p:par>
+                            </p:childTnLst>
+                          </p:cTn>
+                        </p:par>
+                      </p:childTnLst>
+                    </p:cTn>
+                  </p:par>
+                  <p:par>
+                    <p:cTn id="29" fill="hold">
+                      <p:stCondLst>
+                        <p:cond delay="indefinite"/>
+                      </p:stCondLst>
+                      <p:childTnLst>
+                        <p:par>
+                          <p:cTn id="30" fill="hold">
+                            <p:stCondLst>
+                              <p:cond delay="0"/>
+                            </p:stCondLst>
+                            <p:childTnLst>
+                              <p:par>
+                                <p:cTn id="31" presetID="10" presetClass="entr" presetSubtype="0" fill="hold" grpId="0" nodeType="clickEffect">
+                                  <p:stCondLst>
+                                    <p:cond delay="0"/>
+                                  </p:stCondLst>
+                                  <p:childTnLst>
+                                    <p:set>
+                                      <p:cBhvr>
+                                        <p:cTn id="32" dur="1" fill="hold">
+                                          <p:stCondLst>
+                                            <p:cond delay="0"/>
+                                          </p:stCondLst>
+                                        </p:cTn>
+                                        <p:tgtEl>
+                                          <p:spTgt spid="3">
+                                            <p:txEl>
+                                              <p:pRg st="4" end="4"/>
+                                            </p:txEl>
+                                          </p:spTgt>
+                                        </p:tgtEl>
+                                        <p:attrNameLst>
+                                          <p:attrName>style.visibility</p:attrName>
+                                        </p:attrNameLst>
+                                      </p:cBhvr>
+                                      <p:to>
+                                        <p:strVal val="visible"/>
+                                      </p:to>
+                                    </p:set>
+                                    <p:animEffect transition="in" filter="fade">
+                                      <p:cBhvr>
+                                        <p:cTn id="33" dur="500"/>
+                                        <p:tgtEl>
+                                          <p:spTgt spid="3">
+                                            <p:txEl>
+                                              <p:pRg st="4" end="4"/>
+                                            </p:txEl>
+                                          </p:spTgt>
+                                        </p:tgtEl>
+                                      </p:cBhvr>
+                                    </p:animEffect>
+                                  </p:childTnLst>
+                                </p:cTn>
+                              </p:par>
+                            </p:childTnLst>
+                          </p:cTn>
+                        </p:par>
+                      </p:childTnLst>
+                    </p:cTn>
+                  </p:par>
+                </p:childTnLst>
+              </p:cTn>
+              <p:prevCondLst>
+                <p:cond evt="onPrev" delay="0">
+                  <p:tgtEl>
+                    <p:sldTgt/>
+                  </p:tgtEl>
+                </p:cond>
+              </p:prevCondLst>
+              <p:nextCondLst>
+                <p:cond evt="onNext" delay="0">
+                  <p:tgtEl>
+                    <p:sldTgt/>
+                  </p:tgtEl>
+                </p:cond>
+              </p:nextCondLst>
+            </p:seq>
+          </p:childTnLst>
+        </p:cTn>
+      </p:par>
+    </p:tnLst>
+    <p:bldLst>
+      <p:bldP spid="3" grpId="0" uiExpand="1" build="p"/>
+      <p:bldP spid="4" grpId="0" animBg="1"/>
+    </p:bldLst>
+  </p:timing>
 </p:sld>
 </file>
 
@@ -10708,7 +10923,7 @@
           <p:cNvPr id="2" name="Title 1">
             <a:extLst>
               <a:ext uri="{FF2B5EF4-FFF2-40B4-BE49-F238E27FC236}">
-                <a16:creationId xmlns:a16="http://schemas.microsoft.com/office/drawing/2014/main" id="{08476362-B87B-4708-B6E4-06BCFA8849F5}"/>
+                <a16:creationId xmlns:a16="http://schemas.microsoft.com/office/drawing/2014/main" id="{69407FB2-B860-8514-6C52-C922A1C6D0B0}"/>
               </a:ext>
             </a:extLst>
           </p:cNvPr>
@@ -10719,17 +10934,11 @@
             <p:ph type="title"/>
           </p:nvPr>
         </p:nvSpPr>
-        <p:spPr>
-          <a:xfrm>
-            <a:off x="0" y="18255"/>
-            <a:ext cx="12192000" cy="1325563"/>
-          </a:xfrm>
-        </p:spPr>
+        <p:spPr/>
         <p:txBody>
           <a:bodyPr/>
           <a:lstStyle/>
           <a:p>
-            <a:pPr algn="ctr"/>
             <a:r>
               <a:rPr lang="en-GB" dirty="0"/>
               <a:t>Getting more functions into R</a:t>
@@ -10742,7 +10951,7 @@
           <p:cNvPr id="3" name="Content Placeholder 2">
             <a:extLst>
               <a:ext uri="{FF2B5EF4-FFF2-40B4-BE49-F238E27FC236}">
-                <a16:creationId xmlns:a16="http://schemas.microsoft.com/office/drawing/2014/main" id="{D57C57F8-F663-489A-B9F9-5B5ACC4981AB}"/>
+                <a16:creationId xmlns:a16="http://schemas.microsoft.com/office/drawing/2014/main" id="{E6D35D15-75CB-3CDD-5625-621C42F5521E}"/>
               </a:ext>
             </a:extLst>
           </p:cNvPr>
@@ -10753,12 +10962,7 @@
             <p:ph idx="1"/>
           </p:nvPr>
         </p:nvSpPr>
-        <p:spPr>
-          <a:xfrm>
-            <a:off x="838200" y="1463040"/>
-            <a:ext cx="5603240" cy="5008880"/>
-          </a:xfrm>
-        </p:spPr>
+        <p:spPr/>
         <p:txBody>
           <a:bodyPr>
             <a:normAutofit fontScale="92500" lnSpcReduction="20000"/>
@@ -10819,17 +11023,19 @@
       </p:sp>
       <p:pic>
         <p:nvPicPr>
-          <p:cNvPr id="5" name="Picture 4" descr="A group of cardboard boxes&#10;&#10;Description automatically generated with low confidence">
+          <p:cNvPr id="5" name="Picture Placeholder 4" descr="A group of cardboard boxes&#10;&#10;Description automatically generated with low confidence">
             <a:extLst>
               <a:ext uri="{FF2B5EF4-FFF2-40B4-BE49-F238E27FC236}">
-                <a16:creationId xmlns:a16="http://schemas.microsoft.com/office/drawing/2014/main" id="{96D268F5-2B57-4A9B-BFA2-21DB431099A2}"/>
+                <a16:creationId xmlns:a16="http://schemas.microsoft.com/office/drawing/2014/main" id="{E5D3055E-3031-D798-C56B-916C6F670F72}"/>
               </a:ext>
             </a:extLst>
           </p:cNvPr>
           <p:cNvPicPr>
-            <a:picLocks noChangeAspect="1"/>
+            <a:picLocks noGrp="1" noChangeAspect="1"/>
           </p:cNvPicPr>
-          <p:nvPr/>
+          <p:nvPr>
+            <p:ph type="pic" sz="quarter" idx="10"/>
+          </p:nvPr>
         </p:nvPicPr>
         <p:blipFill>
           <a:blip r:embed="rId2">
@@ -10839,86 +11045,25 @@
               </a:ext>
             </a:extLst>
           </a:blip>
+          <a:srcRect l="21651" r="21651"/>
           <a:stretch>
             <a:fillRect/>
           </a:stretch>
         </p:blipFill>
         <p:spPr>
           <a:xfrm>
-            <a:off x="6682740" y="2105501"/>
-            <a:ext cx="5143500" cy="3429000"/>
+            <a:off x="6359525" y="0"/>
+            <a:ext cx="5832475" cy="6858000"/>
           </a:xfrm>
           <a:prstGeom prst="rect">
             <a:avLst/>
           </a:prstGeom>
         </p:spPr>
       </p:pic>
-      <p:sp>
-        <p:nvSpPr>
-          <p:cNvPr id="6" name="Google Shape;57;p13">
-            <a:extLst>
-              <a:ext uri="{FF2B5EF4-FFF2-40B4-BE49-F238E27FC236}">
-                <a16:creationId xmlns:a16="http://schemas.microsoft.com/office/drawing/2014/main" id="{FF7D8300-5D3E-4C52-82A0-8F05FBB41F93}"/>
-              </a:ext>
-            </a:extLst>
-          </p:cNvPr>
-          <p:cNvSpPr/>
-          <p:nvPr/>
-        </p:nvSpPr>
-        <p:spPr>
-          <a:xfrm>
-            <a:off x="4695902" y="1132628"/>
-            <a:ext cx="2622625" cy="105225"/>
-          </a:xfrm>
-          <a:custGeom>
-            <a:avLst/>
-            <a:gdLst/>
-            <a:ahLst/>
-            <a:cxnLst/>
-            <a:rect l="l" t="t" r="r" b="b"/>
-            <a:pathLst>
-              <a:path w="104905" h="4209" extrusionOk="0">
-                <a:moveTo>
-                  <a:pt x="0" y="2010"/>
-                </a:moveTo>
-                <a:cubicBezTo>
-                  <a:pt x="34411" y="-4246"/>
-                  <a:pt x="71725" y="11060"/>
-                  <a:pt x="104905" y="0"/>
-                </a:cubicBezTo>
-              </a:path>
-            </a:pathLst>
-          </a:custGeom>
-          <a:noFill/>
-          <a:ln w="19050" cap="flat" cmpd="sng">
-            <a:solidFill>
-              <a:srgbClr val="4C1130"/>
-            </a:solidFill>
-            <a:prstDash val="solid"/>
-            <a:round/>
-            <a:headEnd type="none" w="med" len="med"/>
-            <a:tailEnd type="none" w="med" len="med"/>
-          </a:ln>
-          <a:effectLst>
-            <a:outerShdw blurRad="57150" dist="19050" dir="5400000" algn="bl" rotWithShape="0">
-              <a:srgbClr val="000000">
-                <a:alpha val="50000"/>
-              </a:srgbClr>
-            </a:outerShdw>
-          </a:effectLst>
-        </p:spPr>
-        <p:txBody>
-          <a:bodyPr/>
-          <a:lstStyle/>
-          <a:p>
-            <a:endParaRPr lang="en-GB"/>
-          </a:p>
-        </p:txBody>
-      </p:sp>
     </p:spTree>
     <p:extLst>
       <p:ext uri="{BB962C8B-B14F-4D97-AF65-F5344CB8AC3E}">
-        <p14:creationId xmlns:p14="http://schemas.microsoft.com/office/powerpoint/2010/main" val="1083624651"/>
+        <p14:creationId xmlns:p14="http://schemas.microsoft.com/office/powerpoint/2010/main" val="665967086"/>
       </p:ext>
     </p:extLst>
   </p:cSld>
@@ -10946,7 +11091,7 @@
                             </p:stCondLst>
                             <p:childTnLst>
                               <p:par>
-                                <p:cTn id="5" presetID="1" presetClass="entr" presetSubtype="0" fill="hold" grpId="0" nodeType="clickEffect">
+                                <p:cTn id="5" presetID="10" presetClass="entr" presetSubtype="0" fill="hold" grpId="0" nodeType="clickEffect">
                                   <p:stCondLst>
                                     <p:cond delay="0"/>
                                   </p:stCondLst>
@@ -10973,6 +11118,18 @@
                                         <p:strVal val="visible"/>
                                       </p:to>
                                     </p:set>
+                                    <p:animEffect transition="in" filter="fade">
+                                      <p:cBhvr>
+                                        <p:cTn id="7" dur="500"/>
+                                        <p:tgtEl>
+                                          <p:spTgt spid="3">
+                                            <p:txEl>
+                                              <p:pRg st="0" end="0"/>
+                                            </p:txEl>
+                                          </p:spTgt>
+                                        </p:tgtEl>
+                                      </p:cBhvr>
+                                    </p:animEffect>
                                   </p:childTnLst>
                                 </p:cTn>
                               </p:par>
@@ -10983,26 +11140,26 @@
                     </p:cTn>
                   </p:par>
                   <p:par>
-                    <p:cTn id="7" fill="hold">
+                    <p:cTn id="8" fill="hold">
                       <p:stCondLst>
                         <p:cond delay="indefinite"/>
                       </p:stCondLst>
                       <p:childTnLst>
                         <p:par>
-                          <p:cTn id="8" fill="hold">
+                          <p:cTn id="9" fill="hold">
                             <p:stCondLst>
                               <p:cond delay="0"/>
                             </p:stCondLst>
                             <p:childTnLst>
                               <p:par>
-                                <p:cTn id="9" presetID="1" presetClass="entr" presetSubtype="0" fill="hold" grpId="0" nodeType="clickEffect">
+                                <p:cTn id="10" presetID="10" presetClass="entr" presetSubtype="0" fill="hold" grpId="0" nodeType="clickEffect">
                                   <p:stCondLst>
                                     <p:cond delay="0"/>
                                   </p:stCondLst>
                                   <p:childTnLst>
                                     <p:set>
                                       <p:cBhvr>
-                                        <p:cTn id="10" dur="1" fill="hold">
+                                        <p:cTn id="11" dur="1" fill="hold">
                                           <p:stCondLst>
                                             <p:cond delay="0"/>
                                           </p:stCondLst>
@@ -11022,18 +11179,30 @@
                                         <p:strVal val="visible"/>
                                       </p:to>
                                     </p:set>
+                                    <p:animEffect transition="in" filter="fade">
+                                      <p:cBhvr>
+                                        <p:cTn id="12" dur="500"/>
+                                        <p:tgtEl>
+                                          <p:spTgt spid="3">
+                                            <p:txEl>
+                                              <p:pRg st="1" end="1"/>
+                                            </p:txEl>
+                                          </p:spTgt>
+                                        </p:tgtEl>
+                                      </p:cBhvr>
+                                    </p:animEffect>
                                   </p:childTnLst>
                                 </p:cTn>
                               </p:par>
                               <p:par>
-                                <p:cTn id="11" presetID="1" presetClass="entr" presetSubtype="0" fill="hold" grpId="0" nodeType="withEffect">
+                                <p:cTn id="13" presetID="10" presetClass="entr" presetSubtype="0" fill="hold" grpId="0" nodeType="withEffect">
                                   <p:stCondLst>
                                     <p:cond delay="0"/>
                                   </p:stCondLst>
                                   <p:childTnLst>
                                     <p:set>
                                       <p:cBhvr>
-                                        <p:cTn id="12" dur="1" fill="hold">
+                                        <p:cTn id="14" dur="1" fill="hold">
                                           <p:stCondLst>
                                             <p:cond delay="0"/>
                                           </p:stCondLst>
@@ -11053,6 +11222,18 @@
                                         <p:strVal val="visible"/>
                                       </p:to>
                                     </p:set>
+                                    <p:animEffect transition="in" filter="fade">
+                                      <p:cBhvr>
+                                        <p:cTn id="15" dur="500"/>
+                                        <p:tgtEl>
+                                          <p:spTgt spid="3">
+                                            <p:txEl>
+                                              <p:pRg st="2" end="2"/>
+                                            </p:txEl>
+                                          </p:spTgt>
+                                        </p:tgtEl>
+                                      </p:cBhvr>
+                                    </p:animEffect>
                                   </p:childTnLst>
                                 </p:cTn>
                               </p:par>
@@ -11063,26 +11244,26 @@
                     </p:cTn>
                   </p:par>
                   <p:par>
-                    <p:cTn id="13" fill="hold">
+                    <p:cTn id="16" fill="hold">
                       <p:stCondLst>
                         <p:cond delay="indefinite"/>
                       </p:stCondLst>
                       <p:childTnLst>
                         <p:par>
-                          <p:cTn id="14" fill="hold">
+                          <p:cTn id="17" fill="hold">
                             <p:stCondLst>
                               <p:cond delay="0"/>
                             </p:stCondLst>
                             <p:childTnLst>
                               <p:par>
-                                <p:cTn id="15" presetID="1" presetClass="entr" presetSubtype="0" fill="hold" grpId="0" nodeType="clickEffect">
+                                <p:cTn id="18" presetID="10" presetClass="entr" presetSubtype="0" fill="hold" grpId="0" nodeType="clickEffect">
                                   <p:stCondLst>
                                     <p:cond delay="0"/>
                                   </p:stCondLst>
                                   <p:childTnLst>
                                     <p:set>
                                       <p:cBhvr>
-                                        <p:cTn id="16" dur="1" fill="hold">
+                                        <p:cTn id="19" dur="1" fill="hold">
                                           <p:stCondLst>
                                             <p:cond delay="0"/>
                                           </p:stCondLst>
@@ -11102,6 +11283,18 @@
                                         <p:strVal val="visible"/>
                                       </p:to>
                                     </p:set>
+                                    <p:animEffect transition="in" filter="fade">
+                                      <p:cBhvr>
+                                        <p:cTn id="20" dur="500"/>
+                                        <p:tgtEl>
+                                          <p:spTgt spid="3">
+                                            <p:txEl>
+                                              <p:pRg st="3" end="3"/>
+                                            </p:txEl>
+                                          </p:spTgt>
+                                        </p:tgtEl>
+                                      </p:cBhvr>
+                                    </p:animEffect>
                                   </p:childTnLst>
                                 </p:cTn>
                               </p:par>
@@ -11112,26 +11305,26 @@
                     </p:cTn>
                   </p:par>
                   <p:par>
-                    <p:cTn id="17" fill="hold">
+                    <p:cTn id="21" fill="hold">
                       <p:stCondLst>
                         <p:cond delay="indefinite"/>
                       </p:stCondLst>
                       <p:childTnLst>
                         <p:par>
-                          <p:cTn id="18" fill="hold">
+                          <p:cTn id="22" fill="hold">
                             <p:stCondLst>
                               <p:cond delay="0"/>
                             </p:stCondLst>
                             <p:childTnLst>
                               <p:par>
-                                <p:cTn id="19" presetID="1" presetClass="entr" presetSubtype="0" fill="hold" grpId="0" nodeType="clickEffect">
+                                <p:cTn id="23" presetID="10" presetClass="entr" presetSubtype="0" fill="hold" grpId="0" nodeType="clickEffect">
                                   <p:stCondLst>
                                     <p:cond delay="0"/>
                                   </p:stCondLst>
                                   <p:childTnLst>
                                     <p:set>
                                       <p:cBhvr>
-                                        <p:cTn id="20" dur="1" fill="hold">
+                                        <p:cTn id="24" dur="1" fill="hold">
                                           <p:stCondLst>
                                             <p:cond delay="0"/>
                                           </p:stCondLst>
@@ -11151,18 +11344,30 @@
                                         <p:strVal val="visible"/>
                                       </p:to>
                                     </p:set>
+                                    <p:animEffect transition="in" filter="fade">
+                                      <p:cBhvr>
+                                        <p:cTn id="25" dur="500"/>
+                                        <p:tgtEl>
+                                          <p:spTgt spid="3">
+                                            <p:txEl>
+                                              <p:pRg st="4" end="4"/>
+                                            </p:txEl>
+                                          </p:spTgt>
+                                        </p:tgtEl>
+                                      </p:cBhvr>
+                                    </p:animEffect>
                                   </p:childTnLst>
                                 </p:cTn>
                               </p:par>
                               <p:par>
-                                <p:cTn id="21" presetID="1" presetClass="entr" presetSubtype="0" fill="hold" grpId="0" nodeType="withEffect">
+                                <p:cTn id="26" presetID="10" presetClass="entr" presetSubtype="0" fill="hold" grpId="0" nodeType="withEffect">
                                   <p:stCondLst>
                                     <p:cond delay="0"/>
                                   </p:stCondLst>
                                   <p:childTnLst>
                                     <p:set>
                                       <p:cBhvr>
-                                        <p:cTn id="22" dur="1" fill="hold">
+                                        <p:cTn id="27" dur="1" fill="hold">
                                           <p:stCondLst>
                                             <p:cond delay="0"/>
                                           </p:stCondLst>
@@ -11182,6 +11387,18 @@
                                         <p:strVal val="visible"/>
                                       </p:to>
                                     </p:set>
+                                    <p:animEffect transition="in" filter="fade">
+                                      <p:cBhvr>
+                                        <p:cTn id="28" dur="500"/>
+                                        <p:tgtEl>
+                                          <p:spTgt spid="3">
+                                            <p:txEl>
+                                              <p:pRg st="5" end="5"/>
+                                            </p:txEl>
+                                          </p:spTgt>
+                                        </p:tgtEl>
+                                      </p:cBhvr>
+                                    </p:animEffect>
                                   </p:childTnLst>
                                 </p:cTn>
                               </p:par>
@@ -11192,26 +11409,26 @@
                     </p:cTn>
                   </p:par>
                   <p:par>
-                    <p:cTn id="23" fill="hold">
+                    <p:cTn id="29" fill="hold">
                       <p:stCondLst>
                         <p:cond delay="indefinite"/>
                       </p:stCondLst>
                       <p:childTnLst>
                         <p:par>
-                          <p:cTn id="24" fill="hold">
+                          <p:cTn id="30" fill="hold">
                             <p:stCondLst>
                               <p:cond delay="0"/>
                             </p:stCondLst>
                             <p:childTnLst>
                               <p:par>
-                                <p:cTn id="25" presetID="1" presetClass="entr" presetSubtype="0" fill="hold" grpId="0" nodeType="clickEffect">
+                                <p:cTn id="31" presetID="10" presetClass="entr" presetSubtype="0" fill="hold" grpId="0" nodeType="clickEffect">
                                   <p:stCondLst>
                                     <p:cond delay="0"/>
                                   </p:stCondLst>
                                   <p:childTnLst>
                                     <p:set>
                                       <p:cBhvr>
-                                        <p:cTn id="26" dur="1" fill="hold">
+                                        <p:cTn id="32" dur="1" fill="hold">
                                           <p:stCondLst>
                                             <p:cond delay="0"/>
                                           </p:stCondLst>
@@ -11231,18 +11448,30 @@
                                         <p:strVal val="visible"/>
                                       </p:to>
                                     </p:set>
+                                    <p:animEffect transition="in" filter="fade">
+                                      <p:cBhvr>
+                                        <p:cTn id="33" dur="500"/>
+                                        <p:tgtEl>
+                                          <p:spTgt spid="3">
+                                            <p:txEl>
+                                              <p:pRg st="6" end="6"/>
+                                            </p:txEl>
+                                          </p:spTgt>
+                                        </p:tgtEl>
+                                      </p:cBhvr>
+                                    </p:animEffect>
                                   </p:childTnLst>
                                 </p:cTn>
                               </p:par>
                               <p:par>
-                                <p:cTn id="27" presetID="1" presetClass="entr" presetSubtype="0" fill="hold" grpId="0" nodeType="withEffect">
+                                <p:cTn id="34" presetID="10" presetClass="entr" presetSubtype="0" fill="hold" grpId="0" nodeType="withEffect">
                                   <p:stCondLst>
                                     <p:cond delay="0"/>
                                   </p:stCondLst>
                                   <p:childTnLst>
                                     <p:set>
                                       <p:cBhvr>
-                                        <p:cTn id="28" dur="1" fill="hold">
+                                        <p:cTn id="35" dur="1" fill="hold">
                                           <p:stCondLst>
                                             <p:cond delay="0"/>
                                           </p:stCondLst>
@@ -11262,6 +11491,18 @@
                                         <p:strVal val="visible"/>
                                       </p:to>
                                     </p:set>
+                                    <p:animEffect transition="in" filter="fade">
+                                      <p:cBhvr>
+                                        <p:cTn id="36" dur="500"/>
+                                        <p:tgtEl>
+                                          <p:spTgt spid="3">
+                                            <p:txEl>
+                                              <p:pRg st="7" end="7"/>
+                                            </p:txEl>
+                                          </p:spTgt>
+                                        </p:tgtEl>
+                                      </p:cBhvr>
+                                    </p:animEffect>
                                   </p:childTnLst>
                                 </p:cTn>
                               </p:par>
@@ -11515,7 +11756,7 @@
                             </p:stCondLst>
                             <p:childTnLst>
                               <p:par>
-                                <p:cTn id="5" presetID="1" presetClass="entr" presetSubtype="0" fill="hold" nodeType="clickEffect">
+                                <p:cTn id="5" presetID="10" presetClass="entr" presetSubtype="0" fill="hold" grpId="0" nodeType="clickEffect">
                                   <p:stCondLst>
                                     <p:cond delay="0"/>
                                   </p:stCondLst>
@@ -11528,7 +11769,11 @@
                                           </p:stCondLst>
                                         </p:cTn>
                                         <p:tgtEl>
-                                          <p:spTgt spid="6"/>
+                                          <p:spTgt spid="3">
+                                            <p:txEl>
+                                              <p:pRg st="0" end="0"/>
+                                            </p:txEl>
+                                          </p:spTgt>
                                         </p:tgtEl>
                                         <p:attrNameLst>
                                           <p:attrName>style.visibility</p:attrName>
@@ -11538,6 +11783,421 @@
                                         <p:strVal val="visible"/>
                                       </p:to>
                                     </p:set>
+                                    <p:animEffect transition="in" filter="fade">
+                                      <p:cBhvr>
+                                        <p:cTn id="7" dur="500"/>
+                                        <p:tgtEl>
+                                          <p:spTgt spid="3">
+                                            <p:txEl>
+                                              <p:pRg st="0" end="0"/>
+                                            </p:txEl>
+                                          </p:spTgt>
+                                        </p:tgtEl>
+                                      </p:cBhvr>
+                                    </p:animEffect>
+                                  </p:childTnLst>
+                                </p:cTn>
+                              </p:par>
+                            </p:childTnLst>
+                          </p:cTn>
+                        </p:par>
+                      </p:childTnLst>
+                    </p:cTn>
+                  </p:par>
+                  <p:par>
+                    <p:cTn id="8" fill="hold">
+                      <p:stCondLst>
+                        <p:cond delay="indefinite"/>
+                      </p:stCondLst>
+                      <p:childTnLst>
+                        <p:par>
+                          <p:cTn id="9" fill="hold">
+                            <p:stCondLst>
+                              <p:cond delay="0"/>
+                            </p:stCondLst>
+                            <p:childTnLst>
+                              <p:par>
+                                <p:cTn id="10" presetID="10" presetClass="entr" presetSubtype="0" fill="hold" grpId="0" nodeType="clickEffect">
+                                  <p:stCondLst>
+                                    <p:cond delay="0"/>
+                                  </p:stCondLst>
+                                  <p:childTnLst>
+                                    <p:set>
+                                      <p:cBhvr>
+                                        <p:cTn id="11" dur="1" fill="hold">
+                                          <p:stCondLst>
+                                            <p:cond delay="0"/>
+                                          </p:stCondLst>
+                                        </p:cTn>
+                                        <p:tgtEl>
+                                          <p:spTgt spid="3">
+                                            <p:txEl>
+                                              <p:pRg st="1" end="1"/>
+                                            </p:txEl>
+                                          </p:spTgt>
+                                        </p:tgtEl>
+                                        <p:attrNameLst>
+                                          <p:attrName>style.visibility</p:attrName>
+                                        </p:attrNameLst>
+                                      </p:cBhvr>
+                                      <p:to>
+                                        <p:strVal val="visible"/>
+                                      </p:to>
+                                    </p:set>
+                                    <p:animEffect transition="in" filter="fade">
+                                      <p:cBhvr>
+                                        <p:cTn id="12" dur="500"/>
+                                        <p:tgtEl>
+                                          <p:spTgt spid="3">
+                                            <p:txEl>
+                                              <p:pRg st="1" end="1"/>
+                                            </p:txEl>
+                                          </p:spTgt>
+                                        </p:tgtEl>
+                                      </p:cBhvr>
+                                    </p:animEffect>
+                                  </p:childTnLst>
+                                </p:cTn>
+                              </p:par>
+                            </p:childTnLst>
+                          </p:cTn>
+                        </p:par>
+                      </p:childTnLst>
+                    </p:cTn>
+                  </p:par>
+                  <p:par>
+                    <p:cTn id="13" fill="hold">
+                      <p:stCondLst>
+                        <p:cond delay="indefinite"/>
+                      </p:stCondLst>
+                      <p:childTnLst>
+                        <p:par>
+                          <p:cTn id="14" fill="hold">
+                            <p:stCondLst>
+                              <p:cond delay="0"/>
+                            </p:stCondLst>
+                            <p:childTnLst>
+                              <p:par>
+                                <p:cTn id="15" presetID="10" presetClass="entr" presetSubtype="0" fill="hold" grpId="0" nodeType="clickEffect">
+                                  <p:stCondLst>
+                                    <p:cond delay="0"/>
+                                  </p:stCondLst>
+                                  <p:childTnLst>
+                                    <p:set>
+                                      <p:cBhvr>
+                                        <p:cTn id="16" dur="1" fill="hold">
+                                          <p:stCondLst>
+                                            <p:cond delay="0"/>
+                                          </p:stCondLst>
+                                        </p:cTn>
+                                        <p:tgtEl>
+                                          <p:spTgt spid="3">
+                                            <p:txEl>
+                                              <p:pRg st="2" end="2"/>
+                                            </p:txEl>
+                                          </p:spTgt>
+                                        </p:tgtEl>
+                                        <p:attrNameLst>
+                                          <p:attrName>style.visibility</p:attrName>
+                                        </p:attrNameLst>
+                                      </p:cBhvr>
+                                      <p:to>
+                                        <p:strVal val="visible"/>
+                                      </p:to>
+                                    </p:set>
+                                    <p:animEffect transition="in" filter="fade">
+                                      <p:cBhvr>
+                                        <p:cTn id="17" dur="500"/>
+                                        <p:tgtEl>
+                                          <p:spTgt spid="3">
+                                            <p:txEl>
+                                              <p:pRg st="2" end="2"/>
+                                            </p:txEl>
+                                          </p:spTgt>
+                                        </p:tgtEl>
+                                      </p:cBhvr>
+                                    </p:animEffect>
+                                  </p:childTnLst>
+                                </p:cTn>
+                              </p:par>
+                            </p:childTnLst>
+                          </p:cTn>
+                        </p:par>
+                      </p:childTnLst>
+                    </p:cTn>
+                  </p:par>
+                  <p:par>
+                    <p:cTn id="18" fill="hold">
+                      <p:stCondLst>
+                        <p:cond delay="indefinite"/>
+                      </p:stCondLst>
+                      <p:childTnLst>
+                        <p:par>
+                          <p:cTn id="19" fill="hold">
+                            <p:stCondLst>
+                              <p:cond delay="0"/>
+                            </p:stCondLst>
+                            <p:childTnLst>
+                              <p:par>
+                                <p:cTn id="20" presetID="10" presetClass="entr" presetSubtype="0" fill="hold" grpId="0" nodeType="clickEffect">
+                                  <p:stCondLst>
+                                    <p:cond delay="0"/>
+                                  </p:stCondLst>
+                                  <p:childTnLst>
+                                    <p:set>
+                                      <p:cBhvr>
+                                        <p:cTn id="21" dur="1" fill="hold">
+                                          <p:stCondLst>
+                                            <p:cond delay="0"/>
+                                          </p:stCondLst>
+                                        </p:cTn>
+                                        <p:tgtEl>
+                                          <p:spTgt spid="3">
+                                            <p:txEl>
+                                              <p:pRg st="3" end="3"/>
+                                            </p:txEl>
+                                          </p:spTgt>
+                                        </p:tgtEl>
+                                        <p:attrNameLst>
+                                          <p:attrName>style.visibility</p:attrName>
+                                        </p:attrNameLst>
+                                      </p:cBhvr>
+                                      <p:to>
+                                        <p:strVal val="visible"/>
+                                      </p:to>
+                                    </p:set>
+                                    <p:animEffect transition="in" filter="fade">
+                                      <p:cBhvr>
+                                        <p:cTn id="22" dur="500"/>
+                                        <p:tgtEl>
+                                          <p:spTgt spid="3">
+                                            <p:txEl>
+                                              <p:pRg st="3" end="3"/>
+                                            </p:txEl>
+                                          </p:spTgt>
+                                        </p:tgtEl>
+                                      </p:cBhvr>
+                                    </p:animEffect>
+                                  </p:childTnLst>
+                                </p:cTn>
+                              </p:par>
+                            </p:childTnLst>
+                          </p:cTn>
+                        </p:par>
+                      </p:childTnLst>
+                    </p:cTn>
+                  </p:par>
+                  <p:par>
+                    <p:cTn id="23" fill="hold">
+                      <p:stCondLst>
+                        <p:cond delay="indefinite"/>
+                      </p:stCondLst>
+                      <p:childTnLst>
+                        <p:par>
+                          <p:cTn id="24" fill="hold">
+                            <p:stCondLst>
+                              <p:cond delay="0"/>
+                            </p:stCondLst>
+                            <p:childTnLst>
+                              <p:par>
+                                <p:cTn id="25" presetID="10" presetClass="entr" presetSubtype="0" fill="hold" grpId="0" nodeType="clickEffect">
+                                  <p:stCondLst>
+                                    <p:cond delay="0"/>
+                                  </p:stCondLst>
+                                  <p:childTnLst>
+                                    <p:set>
+                                      <p:cBhvr>
+                                        <p:cTn id="26" dur="1" fill="hold">
+                                          <p:stCondLst>
+                                            <p:cond delay="0"/>
+                                          </p:stCondLst>
+                                        </p:cTn>
+                                        <p:tgtEl>
+                                          <p:spTgt spid="3">
+                                            <p:txEl>
+                                              <p:pRg st="4" end="4"/>
+                                            </p:txEl>
+                                          </p:spTgt>
+                                        </p:tgtEl>
+                                        <p:attrNameLst>
+                                          <p:attrName>style.visibility</p:attrName>
+                                        </p:attrNameLst>
+                                      </p:cBhvr>
+                                      <p:to>
+                                        <p:strVal val="visible"/>
+                                      </p:to>
+                                    </p:set>
+                                    <p:animEffect transition="in" filter="fade">
+                                      <p:cBhvr>
+                                        <p:cTn id="27" dur="500"/>
+                                        <p:tgtEl>
+                                          <p:spTgt spid="3">
+                                            <p:txEl>
+                                              <p:pRg st="4" end="4"/>
+                                            </p:txEl>
+                                          </p:spTgt>
+                                        </p:tgtEl>
+                                      </p:cBhvr>
+                                    </p:animEffect>
+                                  </p:childTnLst>
+                                </p:cTn>
+                              </p:par>
+                            </p:childTnLst>
+                          </p:cTn>
+                        </p:par>
+                      </p:childTnLst>
+                    </p:cTn>
+                  </p:par>
+                  <p:par>
+                    <p:cTn id="28" fill="hold">
+                      <p:stCondLst>
+                        <p:cond delay="indefinite"/>
+                      </p:stCondLst>
+                      <p:childTnLst>
+                        <p:par>
+                          <p:cTn id="29" fill="hold">
+                            <p:stCondLst>
+                              <p:cond delay="0"/>
+                            </p:stCondLst>
+                            <p:childTnLst>
+                              <p:par>
+                                <p:cTn id="30" presetID="1" presetClass="entr" presetSubtype="0" fill="hold" nodeType="clickEffect">
+                                  <p:stCondLst>
+                                    <p:cond delay="0"/>
+                                  </p:stCondLst>
+                                  <p:childTnLst>
+                                    <p:set>
+                                      <p:cBhvr>
+                                        <p:cTn id="31" dur="1" fill="hold">
+                                          <p:stCondLst>
+                                            <p:cond delay="0"/>
+                                          </p:stCondLst>
+                                        </p:cTn>
+                                        <p:tgtEl>
+                                          <p:spTgt spid="6"/>
+                                        </p:tgtEl>
+                                        <p:attrNameLst>
+                                          <p:attrName>style.visibility</p:attrName>
+                                        </p:attrNameLst>
+                                      </p:cBhvr>
+                                      <p:to>
+                                        <p:strVal val="visible"/>
+                                      </p:to>
+                                    </p:set>
+                                  </p:childTnLst>
+                                </p:cTn>
+                              </p:par>
+                            </p:childTnLst>
+                          </p:cTn>
+                        </p:par>
+                      </p:childTnLst>
+                    </p:cTn>
+                  </p:par>
+                  <p:par>
+                    <p:cTn id="32" fill="hold">
+                      <p:stCondLst>
+                        <p:cond delay="indefinite"/>
+                      </p:stCondLst>
+                      <p:childTnLst>
+                        <p:par>
+                          <p:cTn id="33" fill="hold">
+                            <p:stCondLst>
+                              <p:cond delay="0"/>
+                            </p:stCondLst>
+                            <p:childTnLst>
+                              <p:par>
+                                <p:cTn id="34" presetID="10" presetClass="entr" presetSubtype="0" fill="hold" grpId="0" nodeType="clickEffect">
+                                  <p:stCondLst>
+                                    <p:cond delay="0"/>
+                                  </p:stCondLst>
+                                  <p:childTnLst>
+                                    <p:set>
+                                      <p:cBhvr>
+                                        <p:cTn id="35" dur="1" fill="hold">
+                                          <p:stCondLst>
+                                            <p:cond delay="0"/>
+                                          </p:stCondLst>
+                                        </p:cTn>
+                                        <p:tgtEl>
+                                          <p:spTgt spid="3">
+                                            <p:txEl>
+                                              <p:pRg st="6" end="6"/>
+                                            </p:txEl>
+                                          </p:spTgt>
+                                        </p:tgtEl>
+                                        <p:attrNameLst>
+                                          <p:attrName>style.visibility</p:attrName>
+                                        </p:attrNameLst>
+                                      </p:cBhvr>
+                                      <p:to>
+                                        <p:strVal val="visible"/>
+                                      </p:to>
+                                    </p:set>
+                                    <p:animEffect transition="in" filter="fade">
+                                      <p:cBhvr>
+                                        <p:cTn id="36" dur="500"/>
+                                        <p:tgtEl>
+                                          <p:spTgt spid="3">
+                                            <p:txEl>
+                                              <p:pRg st="6" end="6"/>
+                                            </p:txEl>
+                                          </p:spTgt>
+                                        </p:tgtEl>
+                                      </p:cBhvr>
+                                    </p:animEffect>
+                                  </p:childTnLst>
+                                </p:cTn>
+                              </p:par>
+                            </p:childTnLst>
+                          </p:cTn>
+                        </p:par>
+                      </p:childTnLst>
+                    </p:cTn>
+                  </p:par>
+                  <p:par>
+                    <p:cTn id="37" fill="hold">
+                      <p:stCondLst>
+                        <p:cond delay="indefinite"/>
+                      </p:stCondLst>
+                      <p:childTnLst>
+                        <p:par>
+                          <p:cTn id="38" fill="hold">
+                            <p:stCondLst>
+                              <p:cond delay="0"/>
+                            </p:stCondLst>
+                            <p:childTnLst>
+                              <p:par>
+                                <p:cTn id="39" presetID="10" presetClass="entr" presetSubtype="0" fill="hold" nodeType="clickEffect">
+                                  <p:stCondLst>
+                                    <p:cond delay="0"/>
+                                  </p:stCondLst>
+                                  <p:childTnLst>
+                                    <p:set>
+                                      <p:cBhvr>
+                                        <p:cTn id="40" dur="1" fill="hold">
+                                          <p:stCondLst>
+                                            <p:cond delay="0"/>
+                                          </p:stCondLst>
+                                        </p:cTn>
+                                        <p:tgtEl>
+                                          <p:spTgt spid="7"/>
+                                        </p:tgtEl>
+                                        <p:attrNameLst>
+                                          <p:attrName>style.visibility</p:attrName>
+                                        </p:attrNameLst>
+                                      </p:cBhvr>
+                                      <p:to>
+                                        <p:strVal val="visible"/>
+                                      </p:to>
+                                    </p:set>
+                                    <p:animEffect transition="in" filter="fade">
+                                      <p:cBhvr>
+                                        <p:cTn id="41" dur="500"/>
+                                        <p:tgtEl>
+                                          <p:spTgt spid="7"/>
+                                        </p:tgtEl>
+                                      </p:cBhvr>
+                                    </p:animEffect>
                                   </p:childTnLst>
                                 </p:cTn>
                               </p:par>
@@ -11568,6 +12228,9 @@
         </p:cTn>
       </p:par>
     </p:tnLst>
+    <p:bldLst>
+      <p:bldP spid="3" grpId="0" uiExpand="1" build="p"/>
+    </p:bldLst>
   </p:timing>
 </p:sld>
 </file>
@@ -11594,7 +12257,7 @@
           <p:cNvPr id="2" name="Title 1">
             <a:extLst>
               <a:ext uri="{FF2B5EF4-FFF2-40B4-BE49-F238E27FC236}">
-                <a16:creationId xmlns:a16="http://schemas.microsoft.com/office/drawing/2014/main" id="{69407FB2-B860-8514-6C52-C922A1C6D0B0}"/>
+                <a16:creationId xmlns:a16="http://schemas.microsoft.com/office/drawing/2014/main" id="{757DE6F9-B7D9-4945-A127-3D3DFE50E02C}"/>
               </a:ext>
             </a:extLst>
           </p:cNvPr>
@@ -11605,14 +12268,20 @@
             <p:ph type="title"/>
           </p:nvPr>
         </p:nvSpPr>
-        <p:spPr/>
+        <p:spPr>
+          <a:xfrm>
+            <a:off x="0" y="18255"/>
+            <a:ext cx="12192000" cy="1325563"/>
+          </a:xfrm>
+        </p:spPr>
         <p:txBody>
           <a:bodyPr/>
           <a:lstStyle/>
           <a:p>
+            <a:pPr algn="ctr"/>
             <a:r>
               <a:rPr lang="en-GB" dirty="0"/>
-              <a:t>Getting more functions into R</a:t>
+              <a:t>To install a package;</a:t>
             </a:r>
           </a:p>
         </p:txBody>
@@ -11622,7 +12291,7 @@
           <p:cNvPr id="3" name="Content Placeholder 2">
             <a:extLst>
               <a:ext uri="{FF2B5EF4-FFF2-40B4-BE49-F238E27FC236}">
-                <a16:creationId xmlns:a16="http://schemas.microsoft.com/office/drawing/2014/main" id="{E6D35D15-75CB-3CDD-5625-621C42F5521E}"/>
+                <a16:creationId xmlns:a16="http://schemas.microsoft.com/office/drawing/2014/main" id="{2671C647-210B-4030-A001-5BD86FE868AF}"/>
               </a:ext>
             </a:extLst>
           </p:cNvPr>
@@ -11636,105 +12305,145 @@
         <p:spPr/>
         <p:txBody>
           <a:bodyPr>
-            <a:normAutofit fontScale="92500" lnSpcReduction="20000"/>
+            <a:normAutofit fontScale="92500" lnSpcReduction="10000"/>
           </a:bodyPr>
           <a:lstStyle/>
           <a:p>
             <a:r>
               <a:rPr lang="en-GB" dirty="0"/>
-              <a:t>The base version of R has many functions</a:t>
-            </a:r>
-          </a:p>
-          <a:p>
+              <a:t>Relatively simple process;</a:t>
+            </a:r>
+          </a:p>
+          <a:p>
+            <a:pPr marL="514350" indent="-514350">
+              <a:buFont typeface="+mj-lt"/>
+              <a:buAutoNum type="arabicPeriod"/>
+            </a:pPr>
             <a:r>
               <a:rPr lang="en-GB" dirty="0"/>
-              <a:t>But these are general purpose functions</a:t>
-            </a:r>
-          </a:p>
-          <a:p>
-            <a:pPr lvl="1"/>
+              <a:t>Write the code to download the package (in R)</a:t>
+            </a:r>
+          </a:p>
+          <a:p>
+            <a:pPr marL="971550" lvl="1" indent="-514350">
+              <a:buFont typeface="+mj-lt"/>
+              <a:buAutoNum type="arabicPeriod"/>
+            </a:pPr>
+            <a:r>
+              <a:rPr lang="en-GB" sz="2000" dirty="0" err="1">
+                <a:latin typeface="Courier New" panose="02070309020205020404" pitchFamily="49" charset="0"/>
+                <a:cs typeface="Courier New" panose="02070309020205020404" pitchFamily="49" charset="0"/>
+              </a:rPr>
+              <a:t>install.package</a:t>
+            </a:r>
+            <a:r>
+              <a:rPr lang="en-GB" sz="2000" dirty="0">
+                <a:latin typeface="Courier New" panose="02070309020205020404" pitchFamily="49" charset="0"/>
+                <a:cs typeface="Courier New" panose="02070309020205020404" pitchFamily="49" charset="0"/>
+              </a:rPr>
+              <a:t>(“ggplot2”)</a:t>
+            </a:r>
+          </a:p>
+          <a:p>
+            <a:pPr marL="971550" lvl="1" indent="-514350">
+              <a:buFont typeface="+mj-lt"/>
+              <a:buAutoNum type="arabicPeriod"/>
+            </a:pPr>
             <a:r>
               <a:rPr lang="en-GB" dirty="0"/>
-              <a:t>E.g. mean()</a:t>
-            </a:r>
-          </a:p>
-          <a:p>
+              <a:t>We use quotes to help R find the correct package </a:t>
+            </a:r>
+          </a:p>
+          <a:p>
+            <a:pPr marL="1428750" lvl="2" indent="-514350">
+              <a:buFont typeface="+mj-lt"/>
+              <a:buAutoNum type="arabicPeriod"/>
+            </a:pPr>
             <a:r>
               <a:rPr lang="en-GB" dirty="0"/>
-              <a:t>In many cases we want to do some niche/specialised analysis, requiring specialised functions</a:t>
-            </a:r>
-          </a:p>
-          <a:p>
+              <a:t>(searches for a string)</a:t>
+            </a:r>
+          </a:p>
+          <a:p>
+            <a:pPr marL="514350" indent="-514350">
+              <a:buFont typeface="+mj-lt"/>
+              <a:buAutoNum type="arabicPeriod"/>
+            </a:pPr>
             <a:r>
               <a:rPr lang="en-GB" dirty="0"/>
-              <a:t>This is the big benefit of R</a:t>
-            </a:r>
-          </a:p>
-          <a:p>
-            <a:pPr lvl="1"/>
+              <a:t>Once installed, it is on your computer</a:t>
+            </a:r>
+          </a:p>
+          <a:p>
+            <a:pPr marL="514350" indent="-514350">
+              <a:buFont typeface="+mj-lt"/>
+              <a:buAutoNum type="arabicPeriod"/>
+            </a:pPr>
             <a:r>
               <a:rPr lang="en-GB" dirty="0"/>
-              <a:t>Open source, so lots of people contribute to the software</a:t>
-            </a:r>
-          </a:p>
-          <a:p>
+              <a:t>To actually use it, we need to load it in R</a:t>
+            </a:r>
+          </a:p>
+          <a:p>
+            <a:pPr marL="971550" lvl="1" indent="-514350">
+              <a:buFont typeface="+mj-lt"/>
+              <a:buAutoNum type="arabicPeriod"/>
+            </a:pPr>
+            <a:r>
+              <a:rPr lang="en-GB" sz="2000" dirty="0">
+                <a:latin typeface="Courier New" panose="02070309020205020404" pitchFamily="49" charset="0"/>
+                <a:cs typeface="Courier New" panose="02070309020205020404" pitchFamily="49" charset="0"/>
+              </a:rPr>
+              <a:t>library(ggplot2)</a:t>
+            </a:r>
+          </a:p>
+          <a:p>
+            <a:pPr marL="971550" lvl="1" indent="-514350">
+              <a:buFont typeface="+mj-lt"/>
+              <a:buAutoNum type="arabicPeriod"/>
+            </a:pPr>
             <a:r>
               <a:rPr lang="en-GB" dirty="0"/>
-              <a:t>To get additional functions, we need to install a “package”</a:t>
-            </a:r>
-          </a:p>
-          <a:p>
-            <a:pPr lvl="1"/>
+              <a:t>We do not need quotes any more because R knows what it is</a:t>
+            </a:r>
+          </a:p>
+          <a:p>
+            <a:pPr marL="971550" lvl="1" indent="-514350">
+              <a:buFont typeface="+mj-lt"/>
+              <a:buAutoNum type="arabicPeriod"/>
+            </a:pPr>
             <a:r>
               <a:rPr lang="en-GB" dirty="0"/>
-              <a:t>“Package” because it is a package of functions</a:t>
+              <a:t>The function is called </a:t>
+            </a:r>
+            <a:r>
+              <a:rPr lang="en-GB" sz="2000" dirty="0">
+                <a:latin typeface="Courier New" panose="02070309020205020404" pitchFamily="49" charset="0"/>
+                <a:cs typeface="Courier New" panose="02070309020205020404" pitchFamily="49" charset="0"/>
+              </a:rPr>
+              <a:t>library</a:t>
+            </a:r>
+            <a:r>
+              <a:rPr lang="en-GB" dirty="0"/>
+              <a:t>, because we have a “library of packages”</a:t>
+            </a:r>
+          </a:p>
+          <a:p>
+            <a:pPr marL="514350" indent="-514350">
+              <a:buFont typeface="+mj-lt"/>
+              <a:buAutoNum type="arabicPeriod"/>
+            </a:pPr>
+            <a:r>
+              <a:rPr lang="en-GB" dirty="0"/>
+              <a:t>Each time we open R, we will need to reload the package</a:t>
             </a:r>
           </a:p>
         </p:txBody>
       </p:sp>
-      <p:pic>
-        <p:nvPicPr>
-          <p:cNvPr id="5" name="Picture Placeholder 4" descr="A group of cardboard boxes&#10;&#10;Description automatically generated with low confidence">
-            <a:extLst>
-              <a:ext uri="{FF2B5EF4-FFF2-40B4-BE49-F238E27FC236}">
-                <a16:creationId xmlns:a16="http://schemas.microsoft.com/office/drawing/2014/main" id="{E5D3055E-3031-D798-C56B-916C6F670F72}"/>
-              </a:ext>
-            </a:extLst>
-          </p:cNvPr>
-          <p:cNvPicPr>
-            <a:picLocks noGrp="1" noChangeAspect="1"/>
-          </p:cNvPicPr>
-          <p:nvPr>
-            <p:ph type="pic" sz="quarter" idx="10"/>
-          </p:nvPr>
-        </p:nvPicPr>
-        <p:blipFill>
-          <a:blip r:embed="rId2">
-            <a:extLst>
-              <a:ext uri="{28A0092B-C50C-407E-A947-70E740481C1C}">
-                <a14:useLocalDpi xmlns:a14="http://schemas.microsoft.com/office/drawing/2010/main" val="0"/>
-              </a:ext>
-            </a:extLst>
-          </a:blip>
-          <a:srcRect l="21651" r="21651"/>
-          <a:stretch>
-            <a:fillRect/>
-          </a:stretch>
-        </p:blipFill>
-        <p:spPr>
-          <a:xfrm>
-            <a:off x="6359525" y="0"/>
-            <a:ext cx="5832475" cy="6858000"/>
-          </a:xfrm>
-          <a:prstGeom prst="rect">
-            <a:avLst/>
-          </a:prstGeom>
-        </p:spPr>
-      </p:pic>
     </p:spTree>
     <p:extLst>
       <p:ext uri="{BB962C8B-B14F-4D97-AF65-F5344CB8AC3E}">
-        <p14:creationId xmlns:p14="http://schemas.microsoft.com/office/powerpoint/2010/main" val="665967086"/>
+        <p14:creationId xmlns:p14="http://schemas.microsoft.com/office/powerpoint/2010/main" val="933565352"/>
       </p:ext>
     </p:extLst>
   </p:cSld>
@@ -11762,7 +12471,7 @@
                             </p:stCondLst>
                             <p:childTnLst>
                               <p:par>
-                                <p:cTn id="5" presetID="10" presetClass="entr" presetSubtype="0" fill="hold" grpId="0" nodeType="clickEffect">
+                                <p:cTn id="5" presetID="1" presetClass="entr" presetSubtype="0" fill="hold" grpId="0" nodeType="clickEffect">
                                   <p:stCondLst>
                                     <p:cond delay="0"/>
                                   </p:stCondLst>
@@ -11789,18 +12498,6 @@
                                         <p:strVal val="visible"/>
                                       </p:to>
                                     </p:set>
-                                    <p:animEffect transition="in" filter="fade">
-                                      <p:cBhvr>
-                                        <p:cTn id="7" dur="500"/>
-                                        <p:tgtEl>
-                                          <p:spTgt spid="3">
-                                            <p:txEl>
-                                              <p:pRg st="0" end="0"/>
-                                            </p:txEl>
-                                          </p:spTgt>
-                                        </p:tgtEl>
-                                      </p:cBhvr>
-                                    </p:animEffect>
                                   </p:childTnLst>
                                 </p:cTn>
                               </p:par>
@@ -11811,26 +12508,26 @@
                     </p:cTn>
                   </p:par>
                   <p:par>
-                    <p:cTn id="8" fill="hold">
+                    <p:cTn id="7" fill="hold">
                       <p:stCondLst>
                         <p:cond delay="indefinite"/>
                       </p:stCondLst>
                       <p:childTnLst>
                         <p:par>
-                          <p:cTn id="9" fill="hold">
+                          <p:cTn id="8" fill="hold">
                             <p:stCondLst>
                               <p:cond delay="0"/>
                             </p:stCondLst>
                             <p:childTnLst>
                               <p:par>
-                                <p:cTn id="10" presetID="10" presetClass="entr" presetSubtype="0" fill="hold" grpId="0" nodeType="clickEffect">
+                                <p:cTn id="9" presetID="1" presetClass="entr" presetSubtype="0" fill="hold" grpId="0" nodeType="clickEffect">
                                   <p:stCondLst>
                                     <p:cond delay="0"/>
                                   </p:stCondLst>
                                   <p:childTnLst>
                                     <p:set>
                                       <p:cBhvr>
-                                        <p:cTn id="11" dur="1" fill="hold">
+                                        <p:cTn id="10" dur="1" fill="hold">
                                           <p:stCondLst>
                                             <p:cond delay="0"/>
                                           </p:stCondLst>
@@ -11850,29 +12547,48 @@
                                         <p:strVal val="visible"/>
                                       </p:to>
                                     </p:set>
-                                    <p:animEffect transition="in" filter="fade">
-                                      <p:cBhvr>
-                                        <p:cTn id="12" dur="500"/>
-                                        <p:tgtEl>
-                                          <p:spTgt spid="3">
-                                            <p:txEl>
-                                              <p:pRg st="1" end="1"/>
-                                            </p:txEl>
-                                          </p:spTgt>
-                                        </p:tgtEl>
-                                      </p:cBhvr>
-                                    </p:animEffect>
                                   </p:childTnLst>
                                 </p:cTn>
                               </p:par>
                               <p:par>
-                                <p:cTn id="13" presetID="10" presetClass="entr" presetSubtype="0" fill="hold" grpId="0" nodeType="withEffect">
+                                <p:cTn id="11" presetID="1" presetClass="entr" presetSubtype="0" fill="hold" grpId="0" nodeType="withEffect">
                                   <p:stCondLst>
                                     <p:cond delay="0"/>
                                   </p:stCondLst>
                                   <p:childTnLst>
                                     <p:set>
                                       <p:cBhvr>
+                                        <p:cTn id="12" dur="1" fill="hold">
+                                          <p:stCondLst>
+                                            <p:cond delay="0"/>
+                                          </p:stCondLst>
+                                        </p:cTn>
+                                        <p:tgtEl>
+                                          <p:spTgt spid="3">
+                                            <p:txEl>
+                                              <p:pRg st="2" end="2"/>
+                                            </p:txEl>
+                                          </p:spTgt>
+                                        </p:tgtEl>
+                                        <p:attrNameLst>
+                                          <p:attrName>style.visibility</p:attrName>
+                                        </p:attrNameLst>
+                                      </p:cBhvr>
+                                      <p:to>
+                                        <p:strVal val="visible"/>
+                                      </p:to>
+                                    </p:set>
+                                  </p:childTnLst>
+                                </p:cTn>
+                              </p:par>
+                              <p:par>
+                                <p:cTn id="13" presetID="1" presetClass="entr" presetSubtype="0" fill="hold" grpId="0" nodeType="withEffect">
+                                  <p:stCondLst>
+                                    <p:cond delay="0"/>
+                                  </p:stCondLst>
+                                  <p:childTnLst>
+                                    <p:set>
+                                      <p:cBhvr>
                                         <p:cTn id="14" dur="1" fill="hold">
                                           <p:stCondLst>
                                             <p:cond delay="0"/>
@@ -11881,7 +12597,7 @@
                                         <p:tgtEl>
                                           <p:spTgt spid="3">
                                             <p:txEl>
-                                              <p:pRg st="2" end="2"/>
+                                              <p:pRg st="3" end="3"/>
                                             </p:txEl>
                                           </p:spTgt>
                                         </p:tgtEl>
@@ -11893,18 +12609,37 @@
                                         <p:strVal val="visible"/>
                                       </p:to>
                                     </p:set>
-                                    <p:animEffect transition="in" filter="fade">
-                                      <p:cBhvr>
-                                        <p:cTn id="15" dur="500"/>
+                                  </p:childTnLst>
+                                </p:cTn>
+                              </p:par>
+                              <p:par>
+                                <p:cTn id="15" presetID="1" presetClass="entr" presetSubtype="0" fill="hold" grpId="0" nodeType="withEffect">
+                                  <p:stCondLst>
+                                    <p:cond delay="0"/>
+                                  </p:stCondLst>
+                                  <p:childTnLst>
+                                    <p:set>
+                                      <p:cBhvr>
+                                        <p:cTn id="16" dur="1" fill="hold">
+                                          <p:stCondLst>
+                                            <p:cond delay="0"/>
+                                          </p:stCondLst>
+                                        </p:cTn>
                                         <p:tgtEl>
                                           <p:spTgt spid="3">
                                             <p:txEl>
-                                              <p:pRg st="2" end="2"/>
+                                              <p:pRg st="4" end="4"/>
                                             </p:txEl>
                                           </p:spTgt>
                                         </p:tgtEl>
-                                      </p:cBhvr>
-                                    </p:animEffect>
+                                        <p:attrNameLst>
+                                          <p:attrName>style.visibility</p:attrName>
+                                        </p:attrNameLst>
+                                      </p:cBhvr>
+                                      <p:to>
+                                        <p:strVal val="visible"/>
+                                      </p:to>
+                                    </p:set>
                                   </p:childTnLst>
                                 </p:cTn>
                               </p:par>
@@ -11915,26 +12650,26 @@
                     </p:cTn>
                   </p:par>
                   <p:par>
-                    <p:cTn id="16" fill="hold">
+                    <p:cTn id="17" fill="hold">
                       <p:stCondLst>
                         <p:cond delay="indefinite"/>
                       </p:stCondLst>
                       <p:childTnLst>
                         <p:par>
-                          <p:cTn id="17" fill="hold">
+                          <p:cTn id="18" fill="hold">
                             <p:stCondLst>
                               <p:cond delay="0"/>
                             </p:stCondLst>
                             <p:childTnLst>
                               <p:par>
-                                <p:cTn id="18" presetID="10" presetClass="entr" presetSubtype="0" fill="hold" grpId="0" nodeType="clickEffect">
+                                <p:cTn id="19" presetID="1" presetClass="entr" presetSubtype="0" fill="hold" grpId="0" nodeType="clickEffect">
                                   <p:stCondLst>
                                     <p:cond delay="0"/>
                                   </p:stCondLst>
                                   <p:childTnLst>
                                     <p:set>
                                       <p:cBhvr>
-                                        <p:cTn id="19" dur="1" fill="hold">
+                                        <p:cTn id="20" dur="1" fill="hold">
                                           <p:stCondLst>
                                             <p:cond delay="0"/>
                                           </p:stCondLst>
@@ -11942,7 +12677,7 @@
                                         <p:tgtEl>
                                           <p:spTgt spid="3">
                                             <p:txEl>
-                                              <p:pRg st="3" end="3"/>
+                                              <p:pRg st="5" end="5"/>
                                             </p:txEl>
                                           </p:spTgt>
                                         </p:tgtEl>
@@ -11954,18 +12689,6 @@
                                         <p:strVal val="visible"/>
                                       </p:to>
                                     </p:set>
-                                    <p:animEffect transition="in" filter="fade">
-                                      <p:cBhvr>
-                                        <p:cTn id="20" dur="500"/>
-                                        <p:tgtEl>
-                                          <p:spTgt spid="3">
-                                            <p:txEl>
-                                              <p:pRg st="3" end="3"/>
-                                            </p:txEl>
-                                          </p:spTgt>
-                                        </p:tgtEl>
-                                      </p:cBhvr>
-                                    </p:animEffect>
                                   </p:childTnLst>
                                 </p:cTn>
                               </p:par>
@@ -11988,7 +12711,7 @@
                             </p:stCondLst>
                             <p:childTnLst>
                               <p:par>
-                                <p:cTn id="23" presetID="10" presetClass="entr" presetSubtype="0" fill="hold" grpId="0" nodeType="clickEffect">
+                                <p:cTn id="23" presetID="1" presetClass="entr" presetSubtype="0" fill="hold" grpId="0" nodeType="clickEffect">
                                   <p:stCondLst>
                                     <p:cond delay="0"/>
                                   </p:stCondLst>
@@ -12003,7 +12726,7 @@
                                         <p:tgtEl>
                                           <p:spTgt spid="3">
                                             <p:txEl>
-                                              <p:pRg st="4" end="4"/>
+                                              <p:pRg st="6" end="6"/>
                                             </p:txEl>
                                           </p:spTgt>
                                         </p:tgtEl>
@@ -12015,30 +12738,18 @@
                                         <p:strVal val="visible"/>
                                       </p:to>
                                     </p:set>
-                                    <p:animEffect transition="in" filter="fade">
-                                      <p:cBhvr>
-                                        <p:cTn id="25" dur="500"/>
-                                        <p:tgtEl>
-                                          <p:spTgt spid="3">
-                                            <p:txEl>
-                                              <p:pRg st="4" end="4"/>
-                                            </p:txEl>
-                                          </p:spTgt>
-                                        </p:tgtEl>
-                                      </p:cBhvr>
-                                    </p:animEffect>
                                   </p:childTnLst>
                                 </p:cTn>
                               </p:par>
                               <p:par>
-                                <p:cTn id="26" presetID="10" presetClass="entr" presetSubtype="0" fill="hold" grpId="0" nodeType="withEffect">
+                                <p:cTn id="25" presetID="1" presetClass="entr" presetSubtype="0" fill="hold" grpId="0" nodeType="withEffect">
                                   <p:stCondLst>
                                     <p:cond delay="0"/>
                                   </p:stCondLst>
                                   <p:childTnLst>
                                     <p:set>
                                       <p:cBhvr>
-                                        <p:cTn id="27" dur="1" fill="hold">
+                                        <p:cTn id="26" dur="1" fill="hold">
                                           <p:stCondLst>
                                             <p:cond delay="0"/>
                                           </p:stCondLst>
@@ -12046,7 +12757,7 @@
                                         <p:tgtEl>
                                           <p:spTgt spid="3">
                                             <p:txEl>
-                                              <p:pRg st="5" end="5"/>
+                                              <p:pRg st="7" end="7"/>
                                             </p:txEl>
                                           </p:spTgt>
                                         </p:tgtEl>
@@ -12058,18 +12769,68 @@
                                         <p:strVal val="visible"/>
                                       </p:to>
                                     </p:set>
-                                    <p:animEffect transition="in" filter="fade">
-                                      <p:cBhvr>
-                                        <p:cTn id="28" dur="500"/>
+                                  </p:childTnLst>
+                                </p:cTn>
+                              </p:par>
+                              <p:par>
+                                <p:cTn id="27" presetID="1" presetClass="entr" presetSubtype="0" fill="hold" grpId="0" nodeType="withEffect">
+                                  <p:stCondLst>
+                                    <p:cond delay="0"/>
+                                  </p:stCondLst>
+                                  <p:childTnLst>
+                                    <p:set>
+                                      <p:cBhvr>
+                                        <p:cTn id="28" dur="1" fill="hold">
+                                          <p:stCondLst>
+                                            <p:cond delay="0"/>
+                                          </p:stCondLst>
+                                        </p:cTn>
                                         <p:tgtEl>
                                           <p:spTgt spid="3">
                                             <p:txEl>
-                                              <p:pRg st="5" end="5"/>
+                                              <p:pRg st="8" end="8"/>
                                             </p:txEl>
                                           </p:spTgt>
                                         </p:tgtEl>
-                                      </p:cBhvr>
-                                    </p:animEffect>
+                                        <p:attrNameLst>
+                                          <p:attrName>style.visibility</p:attrName>
+                                        </p:attrNameLst>
+                                      </p:cBhvr>
+                                      <p:to>
+                                        <p:strVal val="visible"/>
+                                      </p:to>
+                                    </p:set>
+                                  </p:childTnLst>
+                                </p:cTn>
+                              </p:par>
+                              <p:par>
+                                <p:cTn id="29" presetID="1" presetClass="entr" presetSubtype="0" fill="hold" grpId="0" nodeType="withEffect">
+                                  <p:stCondLst>
+                                    <p:cond delay="0"/>
+                                  </p:stCondLst>
+                                  <p:childTnLst>
+                                    <p:set>
+                                      <p:cBhvr>
+                                        <p:cTn id="30" dur="1" fill="hold">
+                                          <p:stCondLst>
+                                            <p:cond delay="0"/>
+                                          </p:stCondLst>
+                                        </p:cTn>
+                                        <p:tgtEl>
+                                          <p:spTgt spid="3">
+                                            <p:txEl>
+                                              <p:pRg st="9" end="9"/>
+                                            </p:txEl>
+                                          </p:spTgt>
+                                        </p:tgtEl>
+                                        <p:attrNameLst>
+                                          <p:attrName>style.visibility</p:attrName>
+                                        </p:attrNameLst>
+                                      </p:cBhvr>
+                                      <p:to>
+                                        <p:strVal val="visible"/>
+                                      </p:to>
+                                    </p:set>
                                   </p:childTnLst>
                                 </p:cTn>
                               </p:par>
@@ -12080,26 +12841,26 @@
                     </p:cTn>
                   </p:par>
                   <p:par>
-                    <p:cTn id="29" fill="hold">
+                    <p:cTn id="31" fill="hold">
                       <p:stCondLst>
                         <p:cond delay="indefinite"/>
                       </p:stCondLst>
                       <p:childTnLst>
                         <p:par>
-                          <p:cTn id="30" fill="hold">
+                          <p:cTn id="32" fill="hold">
                             <p:stCondLst>
                               <p:cond delay="0"/>
                             </p:stCondLst>
                             <p:childTnLst>
                               <p:par>
-                                <p:cTn id="31" presetID="10" presetClass="entr" presetSubtype="0" fill="hold" grpId="0" nodeType="clickEffect">
+                                <p:cTn id="33" presetID="1" presetClass="entr" presetSubtype="0" fill="hold" grpId="0" nodeType="clickEffect">
                                   <p:stCondLst>
                                     <p:cond delay="0"/>
                                   </p:stCondLst>
                                   <p:childTnLst>
                                     <p:set>
                                       <p:cBhvr>
-                                        <p:cTn id="32" dur="1" fill="hold">
+                                        <p:cTn id="34" dur="1" fill="hold">
                                           <p:stCondLst>
                                             <p:cond delay="0"/>
                                           </p:stCondLst>
@@ -12107,7 +12868,7 @@
                                         <p:tgtEl>
                                           <p:spTgt spid="3">
                                             <p:txEl>
-                                              <p:pRg st="6" end="6"/>
+                                              <p:pRg st="10" end="10"/>
                                             </p:txEl>
                                           </p:spTgt>
                                         </p:tgtEl>
@@ -12119,61 +12880,6 @@
                                         <p:strVal val="visible"/>
                                       </p:to>
                                     </p:set>
-                                    <p:animEffect transition="in" filter="fade">
-                                      <p:cBhvr>
-                                        <p:cTn id="33" dur="500"/>
-                                        <p:tgtEl>
-                                          <p:spTgt spid="3">
-                                            <p:txEl>
-                                              <p:pRg st="6" end="6"/>
-                                            </p:txEl>
-                                          </p:spTgt>
-                                        </p:tgtEl>
-                                      </p:cBhvr>
-                                    </p:animEffect>
-                                  </p:childTnLst>
-                                </p:cTn>
-                              </p:par>
-                              <p:par>
-                                <p:cTn id="34" presetID="10" presetClass="entr" presetSubtype="0" fill="hold" grpId="0" nodeType="withEffect">
-                                  <p:stCondLst>
-                                    <p:cond delay="0"/>
-                                  </p:stCondLst>
-                                  <p:childTnLst>
-                                    <p:set>
-                                      <p:cBhvr>
-                                        <p:cTn id="35" dur="1" fill="hold">
-                                          <p:stCondLst>
-                                            <p:cond delay="0"/>
-                                          </p:stCondLst>
-                                        </p:cTn>
-                                        <p:tgtEl>
-                                          <p:spTgt spid="3">
-                                            <p:txEl>
-                                              <p:pRg st="7" end="7"/>
-                                            </p:txEl>
-                                          </p:spTgt>
-                                        </p:tgtEl>
-                                        <p:attrNameLst>
-                                          <p:attrName>style.visibility</p:attrName>
-                                        </p:attrNameLst>
-                                      </p:cBhvr>
-                                      <p:to>
-                                        <p:strVal val="visible"/>
-                                      </p:to>
-                                    </p:set>
-                                    <p:animEffect transition="in" filter="fade">
-                                      <p:cBhvr>
-                                        <p:cTn id="36" dur="500"/>
-                                        <p:tgtEl>
-                                          <p:spTgt spid="3">
-                                            <p:txEl>
-                                              <p:pRg st="7" end="7"/>
-                                            </p:txEl>
-                                          </p:spTgt>
-                                        </p:tgtEl>
-                                      </p:cBhvr>
-                                    </p:animEffect>
                                   </p:childTnLst>
                                 </p:cTn>
                               </p:par>
@@ -12233,7 +12939,7 @@
           <p:cNvPr id="2" name="Title 1">
             <a:extLst>
               <a:ext uri="{FF2B5EF4-FFF2-40B4-BE49-F238E27FC236}">
-                <a16:creationId xmlns:a16="http://schemas.microsoft.com/office/drawing/2014/main" id="{0DBC3893-3F47-4FC0-BECC-2D62B666AF8D}"/>
+                <a16:creationId xmlns:a16="http://schemas.microsoft.com/office/drawing/2014/main" id="{415C03C2-793A-194F-C5B5-AB90DFC1EEC2}"/>
               </a:ext>
             </a:extLst>
           </p:cNvPr>
@@ -12244,1164 +12950,32 @@
             <p:ph type="title"/>
           </p:nvPr>
         </p:nvSpPr>
-        <p:spPr>
-          <a:xfrm>
-            <a:off x="0" y="18255"/>
-            <a:ext cx="12192000" cy="1325563"/>
-          </a:xfrm>
-        </p:spPr>
+        <p:spPr/>
         <p:txBody>
           <a:bodyPr/>
           <a:lstStyle/>
           <a:p>
-            <a:pPr algn="ctr"/>
             <a:r>
               <a:rPr lang="en-GB" dirty="0"/>
-              <a:t>What is a package?</a:t>
+              <a:t>ggplot2</a:t>
             </a:r>
           </a:p>
         </p:txBody>
       </p:sp>
-      <p:sp>
-        <p:nvSpPr>
-          <p:cNvPr id="3" name="Content Placeholder 2">
-            <a:extLst>
-              <a:ext uri="{FF2B5EF4-FFF2-40B4-BE49-F238E27FC236}">
-                <a16:creationId xmlns:a16="http://schemas.microsoft.com/office/drawing/2014/main" id="{638CA4F5-E287-461B-8E3B-FF03E00E5E92}"/>
-              </a:ext>
-            </a:extLst>
-          </p:cNvPr>
-          <p:cNvSpPr>
-            <a:spLocks noGrp="1"/>
-          </p:cNvSpPr>
-          <p:nvPr>
-            <p:ph idx="1"/>
-          </p:nvPr>
-        </p:nvSpPr>
-        <p:spPr>
-          <a:xfrm>
-            <a:off x="838200" y="1825625"/>
-            <a:ext cx="4638040" cy="4351338"/>
-          </a:xfrm>
-        </p:spPr>
-        <p:txBody>
-          <a:bodyPr>
-            <a:normAutofit fontScale="85000" lnSpcReduction="10000"/>
-          </a:bodyPr>
-          <a:lstStyle/>
-          <a:p>
-            <a:r>
-              <a:rPr lang="en-GB" dirty="0"/>
-              <a:t>A package is a collection of code, and resulting functions, which you can freely download whenever you please</a:t>
-            </a:r>
-          </a:p>
-          <a:p>
-            <a:r>
-              <a:rPr lang="en-GB" dirty="0"/>
-              <a:t>Stored in an online repository called “CRAN”</a:t>
-            </a:r>
-          </a:p>
-          <a:p>
-            <a:r>
-              <a:rPr lang="en-GB" dirty="0"/>
-              <a:t>Packages are often described in published papers</a:t>
-            </a:r>
-          </a:p>
-          <a:p>
-            <a:pPr lvl="1"/>
-            <a:r>
-              <a:rPr lang="en-GB" dirty="0"/>
-              <a:t>Especially true for packages which are used for statistical analysis</a:t>
-            </a:r>
-          </a:p>
-          <a:p>
-            <a:pPr lvl="1"/>
-            <a:r>
-              <a:rPr lang="en-GB" dirty="0"/>
-              <a:t>A major benefit over, e.g., </a:t>
-            </a:r>
-            <a:r>
-              <a:rPr lang="en-GB" sz="2000" dirty="0">
-                <a:latin typeface="Courier New" panose="02070309020205020404" pitchFamily="49" charset="0"/>
-                <a:cs typeface="Courier New" panose="02070309020205020404" pitchFamily="49" charset="0"/>
-              </a:rPr>
-              <a:t>Python</a:t>
-            </a:r>
-            <a:endParaRPr lang="en-GB" dirty="0">
-              <a:latin typeface="Courier New" panose="02070309020205020404" pitchFamily="49" charset="0"/>
-              <a:cs typeface="Courier New" panose="02070309020205020404" pitchFamily="49" charset="0"/>
-            </a:endParaRPr>
-          </a:p>
-        </p:txBody>
-      </p:sp>
-      <p:pic>
-        <p:nvPicPr>
-          <p:cNvPr id="7" name="Picture 6">
-            <a:extLst>
-              <a:ext uri="{FF2B5EF4-FFF2-40B4-BE49-F238E27FC236}">
-                <a16:creationId xmlns:a16="http://schemas.microsoft.com/office/drawing/2014/main" id="{E13206D3-4956-4CB3-A11B-ED8B5306A53D}"/>
-              </a:ext>
-            </a:extLst>
-          </p:cNvPr>
-          <p:cNvPicPr>
-            <a:picLocks noChangeAspect="1"/>
-          </p:cNvPicPr>
-          <p:nvPr/>
-        </p:nvPicPr>
-        <p:blipFill rotWithShape="1">
-          <a:blip r:embed="rId2"/>
-          <a:srcRect l="15667" t="23412" r="39167" b="42480"/>
-          <a:stretch/>
-        </p:blipFill>
-        <p:spPr>
-          <a:xfrm>
-            <a:off x="5695822" y="2726055"/>
-            <a:ext cx="6283448" cy="2550477"/>
-          </a:xfrm>
-          <a:prstGeom prst="rect">
-            <a:avLst/>
-          </a:prstGeom>
-        </p:spPr>
-      </p:pic>
-      <p:pic>
-        <p:nvPicPr>
-          <p:cNvPr id="5" name="Picture 4">
-            <a:extLst>
-              <a:ext uri="{FF2B5EF4-FFF2-40B4-BE49-F238E27FC236}">
-                <a16:creationId xmlns:a16="http://schemas.microsoft.com/office/drawing/2014/main" id="{79FB74B7-FF10-4FD1-9B6A-0B45023CF53E}"/>
-              </a:ext>
-            </a:extLst>
-          </p:cNvPr>
-          <p:cNvPicPr>
-            <a:picLocks noChangeAspect="1"/>
-          </p:cNvPicPr>
-          <p:nvPr/>
-        </p:nvPicPr>
-        <p:blipFill rotWithShape="1">
-          <a:blip r:embed="rId3"/>
-          <a:srcRect t="8088" r="55296"/>
-          <a:stretch/>
-        </p:blipFill>
-        <p:spPr>
-          <a:xfrm>
-            <a:off x="6715762" y="1581468"/>
-            <a:ext cx="4490718" cy="4962720"/>
-          </a:xfrm>
-          <a:prstGeom prst="rect">
-            <a:avLst/>
-          </a:prstGeom>
-        </p:spPr>
-      </p:pic>
     </p:spTree>
     <p:extLst>
       <p:ext uri="{BB962C8B-B14F-4D97-AF65-F5344CB8AC3E}">
-        <p14:creationId xmlns:p14="http://schemas.microsoft.com/office/powerpoint/2010/main" val="3624028523"/>
+        <p14:creationId xmlns:p14="http://schemas.microsoft.com/office/powerpoint/2010/main" val="1444354666"/>
       </p:ext>
     </p:extLst>
   </p:cSld>
   <p:clrMapOvr>
     <a:masterClrMapping/>
   </p:clrMapOvr>
-  <p:timing>
-    <p:tnLst>
-      <p:par>
-        <p:cTn id="1" dur="indefinite" restart="never" nodeType="tmRoot">
-          <p:childTnLst>
-            <p:seq concurrent="1" nextAc="seek">
-              <p:cTn id="2" dur="indefinite" nodeType="mainSeq">
-                <p:childTnLst>
-                  <p:par>
-                    <p:cTn id="3" fill="hold">
-                      <p:stCondLst>
-                        <p:cond delay="indefinite"/>
-                      </p:stCondLst>
-                      <p:childTnLst>
-                        <p:par>
-                          <p:cTn id="4" fill="hold">
-                            <p:stCondLst>
-                              <p:cond delay="0"/>
-                            </p:stCondLst>
-                            <p:childTnLst>
-                              <p:par>
-                                <p:cTn id="5" presetID="1" presetClass="entr" presetSubtype="0" fill="hold" grpId="0" nodeType="clickEffect">
-                                  <p:stCondLst>
-                                    <p:cond delay="0"/>
-                                  </p:stCondLst>
-                                  <p:childTnLst>
-                                    <p:set>
-                                      <p:cBhvr>
-                                        <p:cTn id="6" dur="1" fill="hold">
-                                          <p:stCondLst>
-                                            <p:cond delay="0"/>
-                                          </p:stCondLst>
-                                        </p:cTn>
-                                        <p:tgtEl>
-                                          <p:spTgt spid="3">
-                                            <p:txEl>
-                                              <p:pRg st="0" end="0"/>
-                                            </p:txEl>
-                                          </p:spTgt>
-                                        </p:tgtEl>
-                                        <p:attrNameLst>
-                                          <p:attrName>style.visibility</p:attrName>
-                                        </p:attrNameLst>
-                                      </p:cBhvr>
-                                      <p:to>
-                                        <p:strVal val="visible"/>
-                                      </p:to>
-                                    </p:set>
-                                  </p:childTnLst>
-                                </p:cTn>
-                              </p:par>
-                            </p:childTnLst>
-                          </p:cTn>
-                        </p:par>
-                      </p:childTnLst>
-                    </p:cTn>
-                  </p:par>
-                  <p:par>
-                    <p:cTn id="7" fill="hold">
-                      <p:stCondLst>
-                        <p:cond delay="indefinite"/>
-                      </p:stCondLst>
-                      <p:childTnLst>
-                        <p:par>
-                          <p:cTn id="8" fill="hold">
-                            <p:stCondLst>
-                              <p:cond delay="0"/>
-                            </p:stCondLst>
-                            <p:childTnLst>
-                              <p:par>
-                                <p:cTn id="9" presetID="1" presetClass="entr" presetSubtype="0" fill="hold" grpId="0" nodeType="clickEffect">
-                                  <p:stCondLst>
-                                    <p:cond delay="0"/>
-                                  </p:stCondLst>
-                                  <p:childTnLst>
-                                    <p:set>
-                                      <p:cBhvr>
-                                        <p:cTn id="10" dur="1" fill="hold">
-                                          <p:stCondLst>
-                                            <p:cond delay="0"/>
-                                          </p:stCondLst>
-                                        </p:cTn>
-                                        <p:tgtEl>
-                                          <p:spTgt spid="3">
-                                            <p:txEl>
-                                              <p:pRg st="1" end="1"/>
-                                            </p:txEl>
-                                          </p:spTgt>
-                                        </p:tgtEl>
-                                        <p:attrNameLst>
-                                          <p:attrName>style.visibility</p:attrName>
-                                        </p:attrNameLst>
-                                      </p:cBhvr>
-                                      <p:to>
-                                        <p:strVal val="visible"/>
-                                      </p:to>
-                                    </p:set>
-                                  </p:childTnLst>
-                                </p:cTn>
-                              </p:par>
-                            </p:childTnLst>
-                          </p:cTn>
-                        </p:par>
-                      </p:childTnLst>
-                    </p:cTn>
-                  </p:par>
-                  <p:par>
-                    <p:cTn id="11" fill="hold">
-                      <p:stCondLst>
-                        <p:cond delay="indefinite"/>
-                      </p:stCondLst>
-                      <p:childTnLst>
-                        <p:par>
-                          <p:cTn id="12" fill="hold">
-                            <p:stCondLst>
-                              <p:cond delay="0"/>
-                            </p:stCondLst>
-                            <p:childTnLst>
-                              <p:par>
-                                <p:cTn id="13" presetID="1" presetClass="entr" presetSubtype="0" fill="hold" grpId="0" nodeType="clickEffect">
-                                  <p:stCondLst>
-                                    <p:cond delay="0"/>
-                                  </p:stCondLst>
-                                  <p:childTnLst>
-                                    <p:set>
-                                      <p:cBhvr>
-                                        <p:cTn id="14" dur="1" fill="hold">
-                                          <p:stCondLst>
-                                            <p:cond delay="0"/>
-                                          </p:stCondLst>
-                                        </p:cTn>
-                                        <p:tgtEl>
-                                          <p:spTgt spid="3">
-                                            <p:txEl>
-                                              <p:pRg st="2" end="2"/>
-                                            </p:txEl>
-                                          </p:spTgt>
-                                        </p:tgtEl>
-                                        <p:attrNameLst>
-                                          <p:attrName>style.visibility</p:attrName>
-                                        </p:attrNameLst>
-                                      </p:cBhvr>
-                                      <p:to>
-                                        <p:strVal val="visible"/>
-                                      </p:to>
-                                    </p:set>
-                                  </p:childTnLst>
-                                </p:cTn>
-                              </p:par>
-                              <p:par>
-                                <p:cTn id="15" presetID="1" presetClass="exit" presetSubtype="0" fill="hold" nodeType="withEffect">
-                                  <p:stCondLst>
-                                    <p:cond delay="0"/>
-                                  </p:stCondLst>
-                                  <p:childTnLst>
-                                    <p:set>
-                                      <p:cBhvr>
-                                        <p:cTn id="16" dur="1" fill="hold">
-                                          <p:stCondLst>
-                                            <p:cond delay="0"/>
-                                          </p:stCondLst>
-                                        </p:cTn>
-                                        <p:tgtEl>
-                                          <p:spTgt spid="5"/>
-                                        </p:tgtEl>
-                                        <p:attrNameLst>
-                                          <p:attrName>style.visibility</p:attrName>
-                                        </p:attrNameLst>
-                                      </p:cBhvr>
-                                      <p:to>
-                                        <p:strVal val="hidden"/>
-                                      </p:to>
-                                    </p:set>
-                                  </p:childTnLst>
-                                </p:cTn>
-                              </p:par>
-                              <p:par>
-                                <p:cTn id="17" presetID="1" presetClass="entr" presetSubtype="0" fill="hold" nodeType="withEffect">
-                                  <p:stCondLst>
-                                    <p:cond delay="0"/>
-                                  </p:stCondLst>
-                                  <p:childTnLst>
-                                    <p:set>
-                                      <p:cBhvr>
-                                        <p:cTn id="18" dur="1" fill="hold">
-                                          <p:stCondLst>
-                                            <p:cond delay="0"/>
-                                          </p:stCondLst>
-                                        </p:cTn>
-                                        <p:tgtEl>
-                                          <p:spTgt spid="7"/>
-                                        </p:tgtEl>
-                                        <p:attrNameLst>
-                                          <p:attrName>style.visibility</p:attrName>
-                                        </p:attrNameLst>
-                                      </p:cBhvr>
-                                      <p:to>
-                                        <p:strVal val="visible"/>
-                                      </p:to>
-                                    </p:set>
-                                  </p:childTnLst>
-                                </p:cTn>
-                              </p:par>
-                            </p:childTnLst>
-                          </p:cTn>
-                        </p:par>
-                      </p:childTnLst>
-                    </p:cTn>
-                  </p:par>
-                  <p:par>
-                    <p:cTn id="19" fill="hold">
-                      <p:stCondLst>
-                        <p:cond delay="indefinite"/>
-                      </p:stCondLst>
-                      <p:childTnLst>
-                        <p:par>
-                          <p:cTn id="20" fill="hold">
-                            <p:stCondLst>
-                              <p:cond delay="0"/>
-                            </p:stCondLst>
-                            <p:childTnLst>
-                              <p:par>
-                                <p:cTn id="21" presetID="1" presetClass="entr" presetSubtype="0" fill="hold" grpId="0" nodeType="clickEffect">
-                                  <p:stCondLst>
-                                    <p:cond delay="0"/>
-                                  </p:stCondLst>
-                                  <p:childTnLst>
-                                    <p:set>
-                                      <p:cBhvr>
-                                        <p:cTn id="22" dur="1" fill="hold">
-                                          <p:stCondLst>
-                                            <p:cond delay="0"/>
-                                          </p:stCondLst>
-                                        </p:cTn>
-                                        <p:tgtEl>
-                                          <p:spTgt spid="3">
-                                            <p:txEl>
-                                              <p:pRg st="3" end="3"/>
-                                            </p:txEl>
-                                          </p:spTgt>
-                                        </p:tgtEl>
-                                        <p:attrNameLst>
-                                          <p:attrName>style.visibility</p:attrName>
-                                        </p:attrNameLst>
-                                      </p:cBhvr>
-                                      <p:to>
-                                        <p:strVal val="visible"/>
-                                      </p:to>
-                                    </p:set>
-                                  </p:childTnLst>
-                                </p:cTn>
-                              </p:par>
-                              <p:par>
-                                <p:cTn id="23" presetID="1" presetClass="entr" presetSubtype="0" fill="hold" grpId="0" nodeType="withEffect">
-                                  <p:stCondLst>
-                                    <p:cond delay="0"/>
-                                  </p:stCondLst>
-                                  <p:childTnLst>
-                                    <p:set>
-                                      <p:cBhvr>
-                                        <p:cTn id="24" dur="1" fill="hold">
-                                          <p:stCondLst>
-                                            <p:cond delay="0"/>
-                                          </p:stCondLst>
-                                        </p:cTn>
-                                        <p:tgtEl>
-                                          <p:spTgt spid="3">
-                                            <p:txEl>
-                                              <p:pRg st="4" end="4"/>
-                                            </p:txEl>
-                                          </p:spTgt>
-                                        </p:tgtEl>
-                                        <p:attrNameLst>
-                                          <p:attrName>style.visibility</p:attrName>
-                                        </p:attrNameLst>
-                                      </p:cBhvr>
-                                      <p:to>
-                                        <p:strVal val="visible"/>
-                                      </p:to>
-                                    </p:set>
-                                  </p:childTnLst>
-                                </p:cTn>
-                              </p:par>
-                            </p:childTnLst>
-                          </p:cTn>
-                        </p:par>
-                      </p:childTnLst>
-                    </p:cTn>
-                  </p:par>
-                </p:childTnLst>
-              </p:cTn>
-              <p:prevCondLst>
-                <p:cond evt="onPrev" delay="0">
-                  <p:tgtEl>
-                    <p:sldTgt/>
-                  </p:tgtEl>
-                </p:cond>
-              </p:prevCondLst>
-              <p:nextCondLst>
-                <p:cond evt="onNext" delay="0">
-                  <p:tgtEl>
-                    <p:sldTgt/>
-                  </p:tgtEl>
-                </p:cond>
-              </p:nextCondLst>
-            </p:seq>
-          </p:childTnLst>
-        </p:cTn>
-      </p:par>
-    </p:tnLst>
-    <p:bldLst>
-      <p:bldP spid="3" grpId="0" uiExpand="1" build="p"/>
-    </p:bldLst>
-  </p:timing>
 </p:sld>
 </file>
 
 <file path=ppt/slides/slide22.xml><?xml version="1.0" encoding="utf-8"?>
-<p:sld xmlns:a="http://schemas.openxmlformats.org/drawingml/2006/main" xmlns:r="http://schemas.openxmlformats.org/officeDocument/2006/relationships" xmlns:p="http://schemas.openxmlformats.org/presentationml/2006/main">
-  <p:cSld>
-    <p:spTree>
-      <p:nvGrpSpPr>
-        <p:cNvPr id="1" name=""/>
-        <p:cNvGrpSpPr/>
-        <p:nvPr/>
-      </p:nvGrpSpPr>
-      <p:grpSpPr>
-        <a:xfrm>
-          <a:off x="0" y="0"/>
-          <a:ext cx="0" cy="0"/>
-          <a:chOff x="0" y="0"/>
-          <a:chExt cx="0" cy="0"/>
-        </a:xfrm>
-      </p:grpSpPr>
-      <p:sp>
-        <p:nvSpPr>
-          <p:cNvPr id="2" name="Title 1">
-            <a:extLst>
-              <a:ext uri="{FF2B5EF4-FFF2-40B4-BE49-F238E27FC236}">
-                <a16:creationId xmlns:a16="http://schemas.microsoft.com/office/drawing/2014/main" id="{757DE6F9-B7D9-4945-A127-3D3DFE50E02C}"/>
-              </a:ext>
-            </a:extLst>
-          </p:cNvPr>
-          <p:cNvSpPr>
-            <a:spLocks noGrp="1"/>
-          </p:cNvSpPr>
-          <p:nvPr>
-            <p:ph type="title"/>
-          </p:nvPr>
-        </p:nvSpPr>
-        <p:spPr>
-          <a:xfrm>
-            <a:off x="0" y="18255"/>
-            <a:ext cx="12192000" cy="1325563"/>
-          </a:xfrm>
-        </p:spPr>
-        <p:txBody>
-          <a:bodyPr/>
-          <a:lstStyle/>
-          <a:p>
-            <a:pPr algn="ctr"/>
-            <a:r>
-              <a:rPr lang="en-GB" dirty="0"/>
-              <a:t>To install a package;</a:t>
-            </a:r>
-          </a:p>
-        </p:txBody>
-      </p:sp>
-      <p:sp>
-        <p:nvSpPr>
-          <p:cNvPr id="3" name="Content Placeholder 2">
-            <a:extLst>
-              <a:ext uri="{FF2B5EF4-FFF2-40B4-BE49-F238E27FC236}">
-                <a16:creationId xmlns:a16="http://schemas.microsoft.com/office/drawing/2014/main" id="{2671C647-210B-4030-A001-5BD86FE868AF}"/>
-              </a:ext>
-            </a:extLst>
-          </p:cNvPr>
-          <p:cNvSpPr>
-            <a:spLocks noGrp="1"/>
-          </p:cNvSpPr>
-          <p:nvPr>
-            <p:ph idx="1"/>
-          </p:nvPr>
-        </p:nvSpPr>
-        <p:spPr/>
-        <p:txBody>
-          <a:bodyPr>
-            <a:normAutofit fontScale="92500" lnSpcReduction="10000"/>
-          </a:bodyPr>
-          <a:lstStyle/>
-          <a:p>
-            <a:r>
-              <a:rPr lang="en-GB" dirty="0"/>
-              <a:t>Relatively simple process;</a:t>
-            </a:r>
-          </a:p>
-          <a:p>
-            <a:pPr marL="514350" indent="-514350">
-              <a:buFont typeface="+mj-lt"/>
-              <a:buAutoNum type="arabicPeriod"/>
-            </a:pPr>
-            <a:r>
-              <a:rPr lang="en-GB" dirty="0"/>
-              <a:t>Write the code to download the package (in R)</a:t>
-            </a:r>
-          </a:p>
-          <a:p>
-            <a:pPr marL="971550" lvl="1" indent="-514350">
-              <a:buFont typeface="+mj-lt"/>
-              <a:buAutoNum type="arabicPeriod"/>
-            </a:pPr>
-            <a:r>
-              <a:rPr lang="en-GB" sz="2000" dirty="0" err="1">
-                <a:latin typeface="Courier New" panose="02070309020205020404" pitchFamily="49" charset="0"/>
-                <a:cs typeface="Courier New" panose="02070309020205020404" pitchFamily="49" charset="0"/>
-              </a:rPr>
-              <a:t>install.package</a:t>
-            </a:r>
-            <a:r>
-              <a:rPr lang="en-GB" sz="2000" dirty="0">
-                <a:latin typeface="Courier New" panose="02070309020205020404" pitchFamily="49" charset="0"/>
-                <a:cs typeface="Courier New" panose="02070309020205020404" pitchFamily="49" charset="0"/>
-              </a:rPr>
-              <a:t>(“ggplot2”)</a:t>
-            </a:r>
-          </a:p>
-          <a:p>
-            <a:pPr marL="971550" lvl="1" indent="-514350">
-              <a:buFont typeface="+mj-lt"/>
-              <a:buAutoNum type="arabicPeriod"/>
-            </a:pPr>
-            <a:r>
-              <a:rPr lang="en-GB" dirty="0"/>
-              <a:t>We use quotes to help R find the correct package </a:t>
-            </a:r>
-          </a:p>
-          <a:p>
-            <a:pPr marL="1428750" lvl="2" indent="-514350">
-              <a:buFont typeface="+mj-lt"/>
-              <a:buAutoNum type="arabicPeriod"/>
-            </a:pPr>
-            <a:r>
-              <a:rPr lang="en-GB" dirty="0"/>
-              <a:t>(searches for a string)</a:t>
-            </a:r>
-          </a:p>
-          <a:p>
-            <a:pPr marL="514350" indent="-514350">
-              <a:buFont typeface="+mj-lt"/>
-              <a:buAutoNum type="arabicPeriod"/>
-            </a:pPr>
-            <a:r>
-              <a:rPr lang="en-GB" dirty="0"/>
-              <a:t>Once installed, it is on your computer</a:t>
-            </a:r>
-          </a:p>
-          <a:p>
-            <a:pPr marL="514350" indent="-514350">
-              <a:buFont typeface="+mj-lt"/>
-              <a:buAutoNum type="arabicPeriod"/>
-            </a:pPr>
-            <a:r>
-              <a:rPr lang="en-GB" dirty="0"/>
-              <a:t>To actually use it, we need to load it in R</a:t>
-            </a:r>
-          </a:p>
-          <a:p>
-            <a:pPr marL="971550" lvl="1" indent="-514350">
-              <a:buFont typeface="+mj-lt"/>
-              <a:buAutoNum type="arabicPeriod"/>
-            </a:pPr>
-            <a:r>
-              <a:rPr lang="en-GB" sz="2000" dirty="0">
-                <a:latin typeface="Courier New" panose="02070309020205020404" pitchFamily="49" charset="0"/>
-                <a:cs typeface="Courier New" panose="02070309020205020404" pitchFamily="49" charset="0"/>
-              </a:rPr>
-              <a:t>library(ggplot2)</a:t>
-            </a:r>
-          </a:p>
-          <a:p>
-            <a:pPr marL="971550" lvl="1" indent="-514350">
-              <a:buFont typeface="+mj-lt"/>
-              <a:buAutoNum type="arabicPeriod"/>
-            </a:pPr>
-            <a:r>
-              <a:rPr lang="en-GB" dirty="0"/>
-              <a:t>We do not need quotes any more because R knows what it is</a:t>
-            </a:r>
-          </a:p>
-          <a:p>
-            <a:pPr marL="971550" lvl="1" indent="-514350">
-              <a:buFont typeface="+mj-lt"/>
-              <a:buAutoNum type="arabicPeriod"/>
-            </a:pPr>
-            <a:r>
-              <a:rPr lang="en-GB" dirty="0"/>
-              <a:t>The function is called </a:t>
-            </a:r>
-            <a:r>
-              <a:rPr lang="en-GB" sz="2000" dirty="0">
-                <a:latin typeface="Courier New" panose="02070309020205020404" pitchFamily="49" charset="0"/>
-                <a:cs typeface="Courier New" panose="02070309020205020404" pitchFamily="49" charset="0"/>
-              </a:rPr>
-              <a:t>library</a:t>
-            </a:r>
-            <a:r>
-              <a:rPr lang="en-GB" dirty="0"/>
-              <a:t>, because we have a “library of packages”</a:t>
-            </a:r>
-          </a:p>
-          <a:p>
-            <a:pPr marL="514350" indent="-514350">
-              <a:buFont typeface="+mj-lt"/>
-              <a:buAutoNum type="arabicPeriod"/>
-            </a:pPr>
-            <a:r>
-              <a:rPr lang="en-GB" dirty="0"/>
-              <a:t>Each time we open R, we will need to reload the package</a:t>
-            </a:r>
-          </a:p>
-        </p:txBody>
-      </p:sp>
-    </p:spTree>
-    <p:extLst>
-      <p:ext uri="{BB962C8B-B14F-4D97-AF65-F5344CB8AC3E}">
-        <p14:creationId xmlns:p14="http://schemas.microsoft.com/office/powerpoint/2010/main" val="933565352"/>
-      </p:ext>
-    </p:extLst>
-  </p:cSld>
-  <p:clrMapOvr>
-    <a:masterClrMapping/>
-  </p:clrMapOvr>
-  <p:timing>
-    <p:tnLst>
-      <p:par>
-        <p:cTn id="1" dur="indefinite" restart="never" nodeType="tmRoot">
-          <p:childTnLst>
-            <p:seq concurrent="1" nextAc="seek">
-              <p:cTn id="2" dur="indefinite" nodeType="mainSeq">
-                <p:childTnLst>
-                  <p:par>
-                    <p:cTn id="3" fill="hold">
-                      <p:stCondLst>
-                        <p:cond delay="indefinite"/>
-                      </p:stCondLst>
-                      <p:childTnLst>
-                        <p:par>
-                          <p:cTn id="4" fill="hold">
-                            <p:stCondLst>
-                              <p:cond delay="0"/>
-                            </p:stCondLst>
-                            <p:childTnLst>
-                              <p:par>
-                                <p:cTn id="5" presetID="1" presetClass="entr" presetSubtype="0" fill="hold" grpId="0" nodeType="clickEffect">
-                                  <p:stCondLst>
-                                    <p:cond delay="0"/>
-                                  </p:stCondLst>
-                                  <p:childTnLst>
-                                    <p:set>
-                                      <p:cBhvr>
-                                        <p:cTn id="6" dur="1" fill="hold">
-                                          <p:stCondLst>
-                                            <p:cond delay="0"/>
-                                          </p:stCondLst>
-                                        </p:cTn>
-                                        <p:tgtEl>
-                                          <p:spTgt spid="3">
-                                            <p:txEl>
-                                              <p:pRg st="0" end="0"/>
-                                            </p:txEl>
-                                          </p:spTgt>
-                                        </p:tgtEl>
-                                        <p:attrNameLst>
-                                          <p:attrName>style.visibility</p:attrName>
-                                        </p:attrNameLst>
-                                      </p:cBhvr>
-                                      <p:to>
-                                        <p:strVal val="visible"/>
-                                      </p:to>
-                                    </p:set>
-                                  </p:childTnLst>
-                                </p:cTn>
-                              </p:par>
-                            </p:childTnLst>
-                          </p:cTn>
-                        </p:par>
-                      </p:childTnLst>
-                    </p:cTn>
-                  </p:par>
-                  <p:par>
-                    <p:cTn id="7" fill="hold">
-                      <p:stCondLst>
-                        <p:cond delay="indefinite"/>
-                      </p:stCondLst>
-                      <p:childTnLst>
-                        <p:par>
-                          <p:cTn id="8" fill="hold">
-                            <p:stCondLst>
-                              <p:cond delay="0"/>
-                            </p:stCondLst>
-                            <p:childTnLst>
-                              <p:par>
-                                <p:cTn id="9" presetID="1" presetClass="entr" presetSubtype="0" fill="hold" grpId="0" nodeType="clickEffect">
-                                  <p:stCondLst>
-                                    <p:cond delay="0"/>
-                                  </p:stCondLst>
-                                  <p:childTnLst>
-                                    <p:set>
-                                      <p:cBhvr>
-                                        <p:cTn id="10" dur="1" fill="hold">
-                                          <p:stCondLst>
-                                            <p:cond delay="0"/>
-                                          </p:stCondLst>
-                                        </p:cTn>
-                                        <p:tgtEl>
-                                          <p:spTgt spid="3">
-                                            <p:txEl>
-                                              <p:pRg st="1" end="1"/>
-                                            </p:txEl>
-                                          </p:spTgt>
-                                        </p:tgtEl>
-                                        <p:attrNameLst>
-                                          <p:attrName>style.visibility</p:attrName>
-                                        </p:attrNameLst>
-                                      </p:cBhvr>
-                                      <p:to>
-                                        <p:strVal val="visible"/>
-                                      </p:to>
-                                    </p:set>
-                                  </p:childTnLst>
-                                </p:cTn>
-                              </p:par>
-                              <p:par>
-                                <p:cTn id="11" presetID="1" presetClass="entr" presetSubtype="0" fill="hold" grpId="0" nodeType="withEffect">
-                                  <p:stCondLst>
-                                    <p:cond delay="0"/>
-                                  </p:stCondLst>
-                                  <p:childTnLst>
-                                    <p:set>
-                                      <p:cBhvr>
-                                        <p:cTn id="12" dur="1" fill="hold">
-                                          <p:stCondLst>
-                                            <p:cond delay="0"/>
-                                          </p:stCondLst>
-                                        </p:cTn>
-                                        <p:tgtEl>
-                                          <p:spTgt spid="3">
-                                            <p:txEl>
-                                              <p:pRg st="2" end="2"/>
-                                            </p:txEl>
-                                          </p:spTgt>
-                                        </p:tgtEl>
-                                        <p:attrNameLst>
-                                          <p:attrName>style.visibility</p:attrName>
-                                        </p:attrNameLst>
-                                      </p:cBhvr>
-                                      <p:to>
-                                        <p:strVal val="visible"/>
-                                      </p:to>
-                                    </p:set>
-                                  </p:childTnLst>
-                                </p:cTn>
-                              </p:par>
-                              <p:par>
-                                <p:cTn id="13" presetID="1" presetClass="entr" presetSubtype="0" fill="hold" grpId="0" nodeType="withEffect">
-                                  <p:stCondLst>
-                                    <p:cond delay="0"/>
-                                  </p:stCondLst>
-                                  <p:childTnLst>
-                                    <p:set>
-                                      <p:cBhvr>
-                                        <p:cTn id="14" dur="1" fill="hold">
-                                          <p:stCondLst>
-                                            <p:cond delay="0"/>
-                                          </p:stCondLst>
-                                        </p:cTn>
-                                        <p:tgtEl>
-                                          <p:spTgt spid="3">
-                                            <p:txEl>
-                                              <p:pRg st="3" end="3"/>
-                                            </p:txEl>
-                                          </p:spTgt>
-                                        </p:tgtEl>
-                                        <p:attrNameLst>
-                                          <p:attrName>style.visibility</p:attrName>
-                                        </p:attrNameLst>
-                                      </p:cBhvr>
-                                      <p:to>
-                                        <p:strVal val="visible"/>
-                                      </p:to>
-                                    </p:set>
-                                  </p:childTnLst>
-                                </p:cTn>
-                              </p:par>
-                              <p:par>
-                                <p:cTn id="15" presetID="1" presetClass="entr" presetSubtype="0" fill="hold" grpId="0" nodeType="withEffect">
-                                  <p:stCondLst>
-                                    <p:cond delay="0"/>
-                                  </p:stCondLst>
-                                  <p:childTnLst>
-                                    <p:set>
-                                      <p:cBhvr>
-                                        <p:cTn id="16" dur="1" fill="hold">
-                                          <p:stCondLst>
-                                            <p:cond delay="0"/>
-                                          </p:stCondLst>
-                                        </p:cTn>
-                                        <p:tgtEl>
-                                          <p:spTgt spid="3">
-                                            <p:txEl>
-                                              <p:pRg st="4" end="4"/>
-                                            </p:txEl>
-                                          </p:spTgt>
-                                        </p:tgtEl>
-                                        <p:attrNameLst>
-                                          <p:attrName>style.visibility</p:attrName>
-                                        </p:attrNameLst>
-                                      </p:cBhvr>
-                                      <p:to>
-                                        <p:strVal val="visible"/>
-                                      </p:to>
-                                    </p:set>
-                                  </p:childTnLst>
-                                </p:cTn>
-                              </p:par>
-                            </p:childTnLst>
-                          </p:cTn>
-                        </p:par>
-                      </p:childTnLst>
-                    </p:cTn>
-                  </p:par>
-                  <p:par>
-                    <p:cTn id="17" fill="hold">
-                      <p:stCondLst>
-                        <p:cond delay="indefinite"/>
-                      </p:stCondLst>
-                      <p:childTnLst>
-                        <p:par>
-                          <p:cTn id="18" fill="hold">
-                            <p:stCondLst>
-                              <p:cond delay="0"/>
-                            </p:stCondLst>
-                            <p:childTnLst>
-                              <p:par>
-                                <p:cTn id="19" presetID="1" presetClass="entr" presetSubtype="0" fill="hold" grpId="0" nodeType="clickEffect">
-                                  <p:stCondLst>
-                                    <p:cond delay="0"/>
-                                  </p:stCondLst>
-                                  <p:childTnLst>
-                                    <p:set>
-                                      <p:cBhvr>
-                                        <p:cTn id="20" dur="1" fill="hold">
-                                          <p:stCondLst>
-                                            <p:cond delay="0"/>
-                                          </p:stCondLst>
-                                        </p:cTn>
-                                        <p:tgtEl>
-                                          <p:spTgt spid="3">
-                                            <p:txEl>
-                                              <p:pRg st="5" end="5"/>
-                                            </p:txEl>
-                                          </p:spTgt>
-                                        </p:tgtEl>
-                                        <p:attrNameLst>
-                                          <p:attrName>style.visibility</p:attrName>
-                                        </p:attrNameLst>
-                                      </p:cBhvr>
-                                      <p:to>
-                                        <p:strVal val="visible"/>
-                                      </p:to>
-                                    </p:set>
-                                  </p:childTnLst>
-                                </p:cTn>
-                              </p:par>
-                            </p:childTnLst>
-                          </p:cTn>
-                        </p:par>
-                      </p:childTnLst>
-                    </p:cTn>
-                  </p:par>
-                  <p:par>
-                    <p:cTn id="21" fill="hold">
-                      <p:stCondLst>
-                        <p:cond delay="indefinite"/>
-                      </p:stCondLst>
-                      <p:childTnLst>
-                        <p:par>
-                          <p:cTn id="22" fill="hold">
-                            <p:stCondLst>
-                              <p:cond delay="0"/>
-                            </p:stCondLst>
-                            <p:childTnLst>
-                              <p:par>
-                                <p:cTn id="23" presetID="1" presetClass="entr" presetSubtype="0" fill="hold" grpId="0" nodeType="clickEffect">
-                                  <p:stCondLst>
-                                    <p:cond delay="0"/>
-                                  </p:stCondLst>
-                                  <p:childTnLst>
-                                    <p:set>
-                                      <p:cBhvr>
-                                        <p:cTn id="24" dur="1" fill="hold">
-                                          <p:stCondLst>
-                                            <p:cond delay="0"/>
-                                          </p:stCondLst>
-                                        </p:cTn>
-                                        <p:tgtEl>
-                                          <p:spTgt spid="3">
-                                            <p:txEl>
-                                              <p:pRg st="6" end="6"/>
-                                            </p:txEl>
-                                          </p:spTgt>
-                                        </p:tgtEl>
-                                        <p:attrNameLst>
-                                          <p:attrName>style.visibility</p:attrName>
-                                        </p:attrNameLst>
-                                      </p:cBhvr>
-                                      <p:to>
-                                        <p:strVal val="visible"/>
-                                      </p:to>
-                                    </p:set>
-                                  </p:childTnLst>
-                                </p:cTn>
-                              </p:par>
-                              <p:par>
-                                <p:cTn id="25" presetID="1" presetClass="entr" presetSubtype="0" fill="hold" grpId="0" nodeType="withEffect">
-                                  <p:stCondLst>
-                                    <p:cond delay="0"/>
-                                  </p:stCondLst>
-                                  <p:childTnLst>
-                                    <p:set>
-                                      <p:cBhvr>
-                                        <p:cTn id="26" dur="1" fill="hold">
-                                          <p:stCondLst>
-                                            <p:cond delay="0"/>
-                                          </p:stCondLst>
-                                        </p:cTn>
-                                        <p:tgtEl>
-                                          <p:spTgt spid="3">
-                                            <p:txEl>
-                                              <p:pRg st="7" end="7"/>
-                                            </p:txEl>
-                                          </p:spTgt>
-                                        </p:tgtEl>
-                                        <p:attrNameLst>
-                                          <p:attrName>style.visibility</p:attrName>
-                                        </p:attrNameLst>
-                                      </p:cBhvr>
-                                      <p:to>
-                                        <p:strVal val="visible"/>
-                                      </p:to>
-                                    </p:set>
-                                  </p:childTnLst>
-                                </p:cTn>
-                              </p:par>
-                              <p:par>
-                                <p:cTn id="27" presetID="1" presetClass="entr" presetSubtype="0" fill="hold" grpId="0" nodeType="withEffect">
-                                  <p:stCondLst>
-                                    <p:cond delay="0"/>
-                                  </p:stCondLst>
-                                  <p:childTnLst>
-                                    <p:set>
-                                      <p:cBhvr>
-                                        <p:cTn id="28" dur="1" fill="hold">
-                                          <p:stCondLst>
-                                            <p:cond delay="0"/>
-                                          </p:stCondLst>
-                                        </p:cTn>
-                                        <p:tgtEl>
-                                          <p:spTgt spid="3">
-                                            <p:txEl>
-                                              <p:pRg st="8" end="8"/>
-                                            </p:txEl>
-                                          </p:spTgt>
-                                        </p:tgtEl>
-                                        <p:attrNameLst>
-                                          <p:attrName>style.visibility</p:attrName>
-                                        </p:attrNameLst>
-                                      </p:cBhvr>
-                                      <p:to>
-                                        <p:strVal val="visible"/>
-                                      </p:to>
-                                    </p:set>
-                                  </p:childTnLst>
-                                </p:cTn>
-                              </p:par>
-                              <p:par>
-                                <p:cTn id="29" presetID="1" presetClass="entr" presetSubtype="0" fill="hold" grpId="0" nodeType="withEffect">
-                                  <p:stCondLst>
-                                    <p:cond delay="0"/>
-                                  </p:stCondLst>
-                                  <p:childTnLst>
-                                    <p:set>
-                                      <p:cBhvr>
-                                        <p:cTn id="30" dur="1" fill="hold">
-                                          <p:stCondLst>
-                                            <p:cond delay="0"/>
-                                          </p:stCondLst>
-                                        </p:cTn>
-                                        <p:tgtEl>
-                                          <p:spTgt spid="3">
-                                            <p:txEl>
-                                              <p:pRg st="9" end="9"/>
-                                            </p:txEl>
-                                          </p:spTgt>
-                                        </p:tgtEl>
-                                        <p:attrNameLst>
-                                          <p:attrName>style.visibility</p:attrName>
-                                        </p:attrNameLst>
-                                      </p:cBhvr>
-                                      <p:to>
-                                        <p:strVal val="visible"/>
-                                      </p:to>
-                                    </p:set>
-                                  </p:childTnLst>
-                                </p:cTn>
-                              </p:par>
-                            </p:childTnLst>
-                          </p:cTn>
-                        </p:par>
-                      </p:childTnLst>
-                    </p:cTn>
-                  </p:par>
-                  <p:par>
-                    <p:cTn id="31" fill="hold">
-                      <p:stCondLst>
-                        <p:cond delay="indefinite"/>
-                      </p:stCondLst>
-                      <p:childTnLst>
-                        <p:par>
-                          <p:cTn id="32" fill="hold">
-                            <p:stCondLst>
-                              <p:cond delay="0"/>
-                            </p:stCondLst>
-                            <p:childTnLst>
-                              <p:par>
-                                <p:cTn id="33" presetID="1" presetClass="entr" presetSubtype="0" fill="hold" grpId="0" nodeType="clickEffect">
-                                  <p:stCondLst>
-                                    <p:cond delay="0"/>
-                                  </p:stCondLst>
-                                  <p:childTnLst>
-                                    <p:set>
-                                      <p:cBhvr>
-                                        <p:cTn id="34" dur="1" fill="hold">
-                                          <p:stCondLst>
-                                            <p:cond delay="0"/>
-                                          </p:stCondLst>
-                                        </p:cTn>
-                                        <p:tgtEl>
-                                          <p:spTgt spid="3">
-                                            <p:txEl>
-                                              <p:pRg st="10" end="10"/>
-                                            </p:txEl>
-                                          </p:spTgt>
-                                        </p:tgtEl>
-                                        <p:attrNameLst>
-                                          <p:attrName>style.visibility</p:attrName>
-                                        </p:attrNameLst>
-                                      </p:cBhvr>
-                                      <p:to>
-                                        <p:strVal val="visible"/>
-                                      </p:to>
-                                    </p:set>
-                                  </p:childTnLst>
-                                </p:cTn>
-                              </p:par>
-                            </p:childTnLst>
-                          </p:cTn>
-                        </p:par>
-                      </p:childTnLst>
-                    </p:cTn>
-                  </p:par>
-                </p:childTnLst>
-              </p:cTn>
-              <p:prevCondLst>
-                <p:cond evt="onPrev" delay="0">
-                  <p:tgtEl>
-                    <p:sldTgt/>
-                  </p:tgtEl>
-                </p:cond>
-              </p:prevCondLst>
-              <p:nextCondLst>
-                <p:cond evt="onNext" delay="0">
-                  <p:tgtEl>
-                    <p:sldTgt/>
-                  </p:tgtEl>
-                </p:cond>
-              </p:nextCondLst>
-            </p:seq>
-          </p:childTnLst>
-        </p:cTn>
-      </p:par>
-    </p:tnLst>
-    <p:bldLst>
-      <p:bldP spid="3" grpId="0" build="p"/>
-    </p:bldLst>
-  </p:timing>
-</p:sld>
-</file>
-
-<file path=ppt/slides/slide23.xml><?xml version="1.0" encoding="utf-8"?>
 <p:sld xmlns:a="http://schemas.openxmlformats.org/drawingml/2006/main" xmlns:r="http://schemas.openxmlformats.org/officeDocument/2006/relationships" xmlns:p="http://schemas.openxmlformats.org/presentationml/2006/main">
   <p:cSld>
     <p:spTree>
@@ -14119,7 +13693,7 @@
 </p:sld>
 </file>
 
-<file path=ppt/slides/slide24.xml><?xml version="1.0" encoding="utf-8"?>
+<file path=ppt/slides/slide23.xml><?xml version="1.0" encoding="utf-8"?>
 <p:sld xmlns:a="http://schemas.openxmlformats.org/drawingml/2006/main" xmlns:r="http://schemas.openxmlformats.org/officeDocument/2006/relationships" xmlns:p="http://schemas.openxmlformats.org/presentationml/2006/main">
   <p:cSld>
     <p:spTree>
@@ -14539,7 +14113,7 @@
 </p:sld>
 </file>
 
-<file path=ppt/slides/slide25.xml><?xml version="1.0" encoding="utf-8"?>
+<file path=ppt/slides/slide24.xml><?xml version="1.0" encoding="utf-8"?>
 <p:sld xmlns:a="http://schemas.openxmlformats.org/drawingml/2006/main" xmlns:r="http://schemas.openxmlformats.org/officeDocument/2006/relationships" xmlns:p="http://schemas.openxmlformats.org/presentationml/2006/main">
   <p:cSld>
     <p:spTree>
@@ -15343,7 +14917,7 @@
 </p:sld>
 </file>
 
-<file path=ppt/slides/slide26.xml><?xml version="1.0" encoding="utf-8"?>
+<file path=ppt/slides/slide25.xml><?xml version="1.0" encoding="utf-8"?>
 <p:sld xmlns:a="http://schemas.openxmlformats.org/drawingml/2006/main" xmlns:r="http://schemas.openxmlformats.org/officeDocument/2006/relationships" xmlns:p="http://schemas.openxmlformats.org/presentationml/2006/main">
   <p:cSld>
     <p:spTree>
@@ -15822,7 +15396,7 @@
 </p:sld>
 </file>
 
-<file path=ppt/slides/slide27.xml><?xml version="1.0" encoding="utf-8"?>
+<file path=ppt/slides/slide26.xml><?xml version="1.0" encoding="utf-8"?>
 <p:sld xmlns:a="http://schemas.openxmlformats.org/drawingml/2006/main" xmlns:r="http://schemas.openxmlformats.org/officeDocument/2006/relationships" xmlns:p="http://schemas.openxmlformats.org/presentationml/2006/main">
   <p:cSld>
     <p:spTree>
@@ -16955,7 +16529,7 @@
 </p:sld>
 </file>
 
-<file path=ppt/slides/slide28.xml><?xml version="1.0" encoding="utf-8"?>
+<file path=ppt/slides/slide27.xml><?xml version="1.0" encoding="utf-8"?>
 <p:sld xmlns:a="http://schemas.openxmlformats.org/drawingml/2006/main" xmlns:r="http://schemas.openxmlformats.org/officeDocument/2006/relationships" xmlns:p="http://schemas.openxmlformats.org/presentationml/2006/main">
   <p:cSld>
     <p:spTree>
@@ -17665,7 +17239,7 @@
 </p:sld>
 </file>
 
-<file path=ppt/slides/slide29.xml><?xml version="1.0" encoding="utf-8"?>
+<file path=ppt/slides/slide28.xml><?xml version="1.0" encoding="utf-8"?>
 <p:sld xmlns:a="http://schemas.openxmlformats.org/drawingml/2006/main" xmlns:r="http://schemas.openxmlformats.org/officeDocument/2006/relationships" xmlns:p="http://schemas.openxmlformats.org/presentationml/2006/main">
   <p:cSld>
     <p:spTree>
@@ -18722,461 +18296,7 @@
 </p:sld>
 </file>
 
-<file path=ppt/slides/slide3.xml><?xml version="1.0" encoding="utf-8"?>
-<p:sld xmlns:a="http://schemas.openxmlformats.org/drawingml/2006/main" xmlns:r="http://schemas.openxmlformats.org/officeDocument/2006/relationships" xmlns:p="http://schemas.openxmlformats.org/presentationml/2006/main">
-  <p:cSld>
-    <p:spTree>
-      <p:nvGrpSpPr>
-        <p:cNvPr id="1" name=""/>
-        <p:cNvGrpSpPr/>
-        <p:nvPr/>
-      </p:nvGrpSpPr>
-      <p:grpSpPr>
-        <a:xfrm>
-          <a:off x="0" y="0"/>
-          <a:ext cx="0" cy="0"/>
-          <a:chOff x="0" y="0"/>
-          <a:chExt cx="0" cy="0"/>
-        </a:xfrm>
-      </p:grpSpPr>
-      <p:sp>
-        <p:nvSpPr>
-          <p:cNvPr id="2" name="Title 1">
-            <a:extLst>
-              <a:ext uri="{FF2B5EF4-FFF2-40B4-BE49-F238E27FC236}">
-                <a16:creationId xmlns:a16="http://schemas.microsoft.com/office/drawing/2014/main" id="{4E787D5D-75F2-4FC0-AA87-F36C2EC863F6}"/>
-              </a:ext>
-            </a:extLst>
-          </p:cNvPr>
-          <p:cNvSpPr>
-            <a:spLocks noGrp="1"/>
-          </p:cNvSpPr>
-          <p:nvPr>
-            <p:ph type="title"/>
-          </p:nvPr>
-        </p:nvSpPr>
-        <p:spPr>
-          <a:xfrm>
-            <a:off x="0" y="18255"/>
-            <a:ext cx="12192000" cy="1325563"/>
-          </a:xfrm>
-        </p:spPr>
-        <p:txBody>
-          <a:bodyPr/>
-          <a:lstStyle/>
-          <a:p>
-            <a:pPr algn="ctr"/>
-            <a:r>
-              <a:rPr lang="en-GB" dirty="0"/>
-              <a:t>Knowing how to program does not mean you understand the statistics</a:t>
-            </a:r>
-          </a:p>
-        </p:txBody>
-      </p:sp>
-      <p:sp>
-        <p:nvSpPr>
-          <p:cNvPr id="3" name="Content Placeholder 2">
-            <a:extLst>
-              <a:ext uri="{FF2B5EF4-FFF2-40B4-BE49-F238E27FC236}">
-                <a16:creationId xmlns:a16="http://schemas.microsoft.com/office/drawing/2014/main" id="{34B27C68-3C24-4047-9B09-27C771D22D66}"/>
-              </a:ext>
-            </a:extLst>
-          </p:cNvPr>
-          <p:cNvSpPr>
-            <a:spLocks noGrp="1"/>
-          </p:cNvSpPr>
-          <p:nvPr>
-            <p:ph idx="1"/>
-          </p:nvPr>
-        </p:nvSpPr>
-        <p:spPr>
-          <a:xfrm>
-            <a:off x="838200" y="1825625"/>
-            <a:ext cx="5420360" cy="4351338"/>
-          </a:xfrm>
-        </p:spPr>
-        <p:txBody>
-          <a:bodyPr>
-            <a:normAutofit fontScale="92500" lnSpcReduction="10000"/>
-          </a:bodyPr>
-          <a:lstStyle/>
-          <a:p>
-            <a:r>
-              <a:rPr lang="en-GB" dirty="0"/>
-              <a:t>A common misconception is;</a:t>
-            </a:r>
-          </a:p>
-          <a:p>
-            <a:pPr lvl="1"/>
-            <a:r>
-              <a:rPr lang="en-GB" dirty="0"/>
-              <a:t>“I can code a model in R, therefore I understand the stats”</a:t>
-            </a:r>
-          </a:p>
-          <a:p>
-            <a:r>
-              <a:rPr lang="en-GB" dirty="0"/>
-              <a:t>Can you copy and paste this code?</a:t>
-            </a:r>
-          </a:p>
-          <a:p>
-            <a:r>
-              <a:rPr lang="en-GB" dirty="0"/>
-              <a:t>Congratulations, you’ve just run a generalised additive model, with growth explained by a function of day of year, allowing a maximum of 100 knots, but effectively using 49.72, for the cubic regression spline basis.</a:t>
-            </a:r>
-          </a:p>
-        </p:txBody>
-      </p:sp>
-      <p:pic>
-        <p:nvPicPr>
-          <p:cNvPr id="8" name="Picture 7">
-            <a:extLst>
-              <a:ext uri="{FF2B5EF4-FFF2-40B4-BE49-F238E27FC236}">
-                <a16:creationId xmlns:a16="http://schemas.microsoft.com/office/drawing/2014/main" id="{9DB8306F-5D96-4E10-9CB1-F5BCE6B6A845}"/>
-              </a:ext>
-            </a:extLst>
-          </p:cNvPr>
-          <p:cNvPicPr>
-            <a:picLocks noChangeAspect="1"/>
-          </p:cNvPicPr>
-          <p:nvPr/>
-        </p:nvPicPr>
-        <p:blipFill rotWithShape="1">
-          <a:blip r:embed="rId2"/>
-          <a:srcRect l="3750" t="44186" r="76417" b="50000"/>
-          <a:stretch/>
-        </p:blipFill>
-        <p:spPr>
-          <a:xfrm>
-            <a:off x="6258559" y="1825624"/>
-            <a:ext cx="5405589" cy="851721"/>
-          </a:xfrm>
-          <a:prstGeom prst="rect">
-            <a:avLst/>
-          </a:prstGeom>
-        </p:spPr>
-      </p:pic>
-      <p:pic>
-        <p:nvPicPr>
-          <p:cNvPr id="10" name="Picture 9">
-            <a:extLst>
-              <a:ext uri="{FF2B5EF4-FFF2-40B4-BE49-F238E27FC236}">
-                <a16:creationId xmlns:a16="http://schemas.microsoft.com/office/drawing/2014/main" id="{821B8249-C8C3-42C3-8FD4-BDD329D2B9E7}"/>
-              </a:ext>
-            </a:extLst>
-          </p:cNvPr>
-          <p:cNvPicPr>
-            <a:picLocks noChangeAspect="1"/>
-          </p:cNvPicPr>
-          <p:nvPr/>
-        </p:nvPicPr>
-        <p:blipFill>
-          <a:blip r:embed="rId3"/>
-          <a:stretch>
-            <a:fillRect/>
-          </a:stretch>
-        </p:blipFill>
-        <p:spPr>
-          <a:xfrm>
-            <a:off x="6934199" y="2781961"/>
-            <a:ext cx="4054308" cy="3842237"/>
-          </a:xfrm>
-          <a:prstGeom prst="rect">
-            <a:avLst/>
-          </a:prstGeom>
-        </p:spPr>
-      </p:pic>
-    </p:spTree>
-    <p:extLst>
-      <p:ext uri="{BB962C8B-B14F-4D97-AF65-F5344CB8AC3E}">
-        <p14:creationId xmlns:p14="http://schemas.microsoft.com/office/powerpoint/2010/main" val="3518839457"/>
-      </p:ext>
-    </p:extLst>
-  </p:cSld>
-  <p:clrMapOvr>
-    <a:masterClrMapping/>
-  </p:clrMapOvr>
-  <mc:AlternateContent xmlns:mc="http://schemas.openxmlformats.org/markup-compatibility/2006" xmlns:p14="http://schemas.microsoft.com/office/powerpoint/2010/main">
-    <mc:Choice Requires="p14">
-      <p:transition spd="med" p14:dur="700">
-        <p:fade/>
-      </p:transition>
-    </mc:Choice>
-    <mc:Fallback xmlns="">
-      <p:transition spd="med">
-        <p:fade/>
-      </p:transition>
-    </mc:Fallback>
-  </mc:AlternateContent>
-  <p:timing>
-    <p:tnLst>
-      <p:par>
-        <p:cTn id="1" dur="indefinite" restart="never" nodeType="tmRoot">
-          <p:childTnLst>
-            <p:seq concurrent="1" nextAc="seek">
-              <p:cTn id="2" dur="indefinite" nodeType="mainSeq">
-                <p:childTnLst>
-                  <p:par>
-                    <p:cTn id="3" fill="hold">
-                      <p:stCondLst>
-                        <p:cond delay="indefinite"/>
-                      </p:stCondLst>
-                      <p:childTnLst>
-                        <p:par>
-                          <p:cTn id="4" fill="hold">
-                            <p:stCondLst>
-                              <p:cond delay="0"/>
-                            </p:stCondLst>
-                            <p:childTnLst>
-                              <p:par>
-                                <p:cTn id="5" presetID="1" presetClass="entr" presetSubtype="0" fill="hold" grpId="0" nodeType="clickEffect">
-                                  <p:stCondLst>
-                                    <p:cond delay="0"/>
-                                  </p:stCondLst>
-                                  <p:childTnLst>
-                                    <p:set>
-                                      <p:cBhvr>
-                                        <p:cTn id="6" dur="1" fill="hold">
-                                          <p:stCondLst>
-                                            <p:cond delay="0"/>
-                                          </p:stCondLst>
-                                        </p:cTn>
-                                        <p:tgtEl>
-                                          <p:spTgt spid="3">
-                                            <p:txEl>
-                                              <p:pRg st="0" end="0"/>
-                                            </p:txEl>
-                                          </p:spTgt>
-                                        </p:tgtEl>
-                                        <p:attrNameLst>
-                                          <p:attrName>style.visibility</p:attrName>
-                                        </p:attrNameLst>
-                                      </p:cBhvr>
-                                      <p:to>
-                                        <p:strVal val="visible"/>
-                                      </p:to>
-                                    </p:set>
-                                  </p:childTnLst>
-                                </p:cTn>
-                              </p:par>
-                              <p:par>
-                                <p:cTn id="7" presetID="1" presetClass="entr" presetSubtype="0" fill="hold" grpId="0" nodeType="withEffect">
-                                  <p:stCondLst>
-                                    <p:cond delay="0"/>
-                                  </p:stCondLst>
-                                  <p:childTnLst>
-                                    <p:set>
-                                      <p:cBhvr>
-                                        <p:cTn id="8" dur="1" fill="hold">
-                                          <p:stCondLst>
-                                            <p:cond delay="0"/>
-                                          </p:stCondLst>
-                                        </p:cTn>
-                                        <p:tgtEl>
-                                          <p:spTgt spid="3">
-                                            <p:txEl>
-                                              <p:pRg st="1" end="1"/>
-                                            </p:txEl>
-                                          </p:spTgt>
-                                        </p:tgtEl>
-                                        <p:attrNameLst>
-                                          <p:attrName>style.visibility</p:attrName>
-                                        </p:attrNameLst>
-                                      </p:cBhvr>
-                                      <p:to>
-                                        <p:strVal val="visible"/>
-                                      </p:to>
-                                    </p:set>
-                                  </p:childTnLst>
-                                </p:cTn>
-                              </p:par>
-                            </p:childTnLst>
-                          </p:cTn>
-                        </p:par>
-                      </p:childTnLst>
-                    </p:cTn>
-                  </p:par>
-                  <p:par>
-                    <p:cTn id="9" fill="hold">
-                      <p:stCondLst>
-                        <p:cond delay="indefinite"/>
-                      </p:stCondLst>
-                      <p:childTnLst>
-                        <p:par>
-                          <p:cTn id="10" fill="hold">
-                            <p:stCondLst>
-                              <p:cond delay="0"/>
-                            </p:stCondLst>
-                            <p:childTnLst>
-                              <p:par>
-                                <p:cTn id="11" presetID="1" presetClass="entr" presetSubtype="0" fill="hold" grpId="0" nodeType="clickEffect">
-                                  <p:stCondLst>
-                                    <p:cond delay="0"/>
-                                  </p:stCondLst>
-                                  <p:childTnLst>
-                                    <p:set>
-                                      <p:cBhvr>
-                                        <p:cTn id="12" dur="1" fill="hold">
-                                          <p:stCondLst>
-                                            <p:cond delay="0"/>
-                                          </p:stCondLst>
-                                        </p:cTn>
-                                        <p:tgtEl>
-                                          <p:spTgt spid="3">
-                                            <p:txEl>
-                                              <p:pRg st="2" end="2"/>
-                                            </p:txEl>
-                                          </p:spTgt>
-                                        </p:tgtEl>
-                                        <p:attrNameLst>
-                                          <p:attrName>style.visibility</p:attrName>
-                                        </p:attrNameLst>
-                                      </p:cBhvr>
-                                      <p:to>
-                                        <p:strVal val="visible"/>
-                                      </p:to>
-                                    </p:set>
-                                  </p:childTnLst>
-                                </p:cTn>
-                              </p:par>
-                              <p:par>
-                                <p:cTn id="13" presetID="1" presetClass="entr" presetSubtype="0" fill="hold" nodeType="withEffect">
-                                  <p:stCondLst>
-                                    <p:cond delay="0"/>
-                                  </p:stCondLst>
-                                  <p:childTnLst>
-                                    <p:set>
-                                      <p:cBhvr>
-                                        <p:cTn id="14" dur="1" fill="hold">
-                                          <p:stCondLst>
-                                            <p:cond delay="0"/>
-                                          </p:stCondLst>
-                                        </p:cTn>
-                                        <p:tgtEl>
-                                          <p:spTgt spid="8"/>
-                                        </p:tgtEl>
-                                        <p:attrNameLst>
-                                          <p:attrName>style.visibility</p:attrName>
-                                        </p:attrNameLst>
-                                      </p:cBhvr>
-                                      <p:to>
-                                        <p:strVal val="visible"/>
-                                      </p:to>
-                                    </p:set>
-                                  </p:childTnLst>
-                                </p:cTn>
-                              </p:par>
-                            </p:childTnLst>
-                          </p:cTn>
-                        </p:par>
-                      </p:childTnLst>
-                    </p:cTn>
-                  </p:par>
-                  <p:par>
-                    <p:cTn id="15" fill="hold">
-                      <p:stCondLst>
-                        <p:cond delay="indefinite"/>
-                      </p:stCondLst>
-                      <p:childTnLst>
-                        <p:par>
-                          <p:cTn id="16" fill="hold">
-                            <p:stCondLst>
-                              <p:cond delay="0"/>
-                            </p:stCondLst>
-                            <p:childTnLst>
-                              <p:par>
-                                <p:cTn id="17" presetID="1" presetClass="entr" presetSubtype="0" fill="hold" grpId="0" nodeType="clickEffect">
-                                  <p:stCondLst>
-                                    <p:cond delay="0"/>
-                                  </p:stCondLst>
-                                  <p:childTnLst>
-                                    <p:set>
-                                      <p:cBhvr>
-                                        <p:cTn id="18" dur="1" fill="hold">
-                                          <p:stCondLst>
-                                            <p:cond delay="0"/>
-                                          </p:stCondLst>
-                                        </p:cTn>
-                                        <p:tgtEl>
-                                          <p:spTgt spid="3">
-                                            <p:txEl>
-                                              <p:pRg st="3" end="3"/>
-                                            </p:txEl>
-                                          </p:spTgt>
-                                        </p:tgtEl>
-                                        <p:attrNameLst>
-                                          <p:attrName>style.visibility</p:attrName>
-                                        </p:attrNameLst>
-                                      </p:cBhvr>
-                                      <p:to>
-                                        <p:strVal val="visible"/>
-                                      </p:to>
-                                    </p:set>
-                                  </p:childTnLst>
-                                </p:cTn>
-                              </p:par>
-                              <p:par>
-                                <p:cTn id="19" presetID="1" presetClass="entr" presetSubtype="0" fill="hold" nodeType="withEffect">
-                                  <p:stCondLst>
-                                    <p:cond delay="0"/>
-                                  </p:stCondLst>
-                                  <p:childTnLst>
-                                    <p:set>
-                                      <p:cBhvr>
-                                        <p:cTn id="20" dur="1" fill="hold">
-                                          <p:stCondLst>
-                                            <p:cond delay="0"/>
-                                          </p:stCondLst>
-                                        </p:cTn>
-                                        <p:tgtEl>
-                                          <p:spTgt spid="10"/>
-                                        </p:tgtEl>
-                                        <p:attrNameLst>
-                                          <p:attrName>style.visibility</p:attrName>
-                                        </p:attrNameLst>
-                                      </p:cBhvr>
-                                      <p:to>
-                                        <p:strVal val="visible"/>
-                                      </p:to>
-                                    </p:set>
-                                  </p:childTnLst>
-                                </p:cTn>
-                              </p:par>
-                            </p:childTnLst>
-                          </p:cTn>
-                        </p:par>
-                      </p:childTnLst>
-                    </p:cTn>
-                  </p:par>
-                </p:childTnLst>
-              </p:cTn>
-              <p:prevCondLst>
-                <p:cond evt="onPrev" delay="0">
-                  <p:tgtEl>
-                    <p:sldTgt/>
-                  </p:tgtEl>
-                </p:cond>
-              </p:prevCondLst>
-              <p:nextCondLst>
-                <p:cond evt="onNext" delay="0">
-                  <p:tgtEl>
-                    <p:sldTgt/>
-                  </p:tgtEl>
-                </p:cond>
-              </p:nextCondLst>
-            </p:seq>
-          </p:childTnLst>
-        </p:cTn>
-      </p:par>
-    </p:tnLst>
-    <p:bldLst>
-      <p:bldP spid="3" grpId="0" uiExpand="1" build="p"/>
-    </p:bldLst>
-  </p:timing>
-</p:sld>
-</file>
-
-<file path=ppt/slides/slide30.xml><?xml version="1.0" encoding="utf-8"?>
+<file path=ppt/slides/slide29.xml><?xml version="1.0" encoding="utf-8"?>
 <p:sld xmlns:a="http://schemas.openxmlformats.org/drawingml/2006/main" xmlns:r="http://schemas.openxmlformats.org/officeDocument/2006/relationships" xmlns:p="http://schemas.openxmlformats.org/presentationml/2006/main">
   <p:cSld>
     <p:spTree>
@@ -20064,7 +19184,588 @@
 </p:sld>
 </file>
 
-<file path=ppt/slides/slide31.xml><?xml version="1.0" encoding="utf-8"?>
+<file path=ppt/slides/slide3.xml><?xml version="1.0" encoding="utf-8"?>
+<p:sld xmlns:a="http://schemas.openxmlformats.org/drawingml/2006/main" xmlns:r="http://schemas.openxmlformats.org/officeDocument/2006/relationships" xmlns:p="http://schemas.openxmlformats.org/presentationml/2006/main">
+  <p:cSld>
+    <p:spTree>
+      <p:nvGrpSpPr>
+        <p:cNvPr id="1" name=""/>
+        <p:cNvGrpSpPr/>
+        <p:nvPr/>
+      </p:nvGrpSpPr>
+      <p:grpSpPr>
+        <a:xfrm>
+          <a:off x="0" y="0"/>
+          <a:ext cx="0" cy="0"/>
+          <a:chOff x="0" y="0"/>
+          <a:chExt cx="0" cy="0"/>
+        </a:xfrm>
+      </p:grpSpPr>
+      <mc:AlternateContent xmlns:mc="http://schemas.openxmlformats.org/markup-compatibility/2006" xmlns:a14="http://schemas.microsoft.com/office/drawing/2010/main">
+        <mc:Choice Requires="a14">
+          <p:sp>
+            <p:nvSpPr>
+              <p:cNvPr id="2" name="Title 1">
+                <a:extLst>
+                  <a:ext uri="{FF2B5EF4-FFF2-40B4-BE49-F238E27FC236}">
+                    <a16:creationId xmlns:a16="http://schemas.microsoft.com/office/drawing/2014/main" id="{C99BE1FB-BF70-0172-BD92-97BF01D6626E}"/>
+                  </a:ext>
+                </a:extLst>
+              </p:cNvPr>
+              <p:cNvSpPr>
+                <a:spLocks noGrp="1"/>
+              </p:cNvSpPr>
+              <p:nvPr>
+                <p:ph type="title"/>
+              </p:nvPr>
+            </p:nvSpPr>
+            <p:spPr/>
+            <p:txBody>
+              <a:bodyPr>
+                <a:normAutofit/>
+              </a:bodyPr>
+              <a:lstStyle/>
+              <a:p>
+                <a:r>
+                  <a:rPr lang="en-GB" dirty="0"/>
+                  <a:t>Implementing </a:t>
+                </a:r>
+                <a14:m>
+                  <m:oMath xmlns:m="http://schemas.openxmlformats.org/officeDocument/2006/math">
+                    <m:r>
+                      <a:rPr lang="en-GB" b="0" i="1" smtClean="0">
+                        <a:latin typeface="Cambria Math" panose="02040503050406030204" pitchFamily="18" charset="0"/>
+                      </a:rPr>
+                      <m:t>≠</m:t>
+                    </m:r>
+                  </m:oMath>
+                </a14:m>
+                <a:r>
+                  <a:rPr lang="en-GB" dirty="0"/>
+                  <a:t> understanding</a:t>
+                </a:r>
+              </a:p>
+            </p:txBody>
+          </p:sp>
+        </mc:Choice>
+        <mc:Fallback xmlns="">
+          <p:sp>
+            <p:nvSpPr>
+              <p:cNvPr id="2" name="Title 1">
+                <a:extLst>
+                  <a:ext uri="{FF2B5EF4-FFF2-40B4-BE49-F238E27FC236}">
+                    <a16:creationId xmlns:a16="http://schemas.microsoft.com/office/drawing/2014/main" id="{C99BE1FB-BF70-0172-BD92-97BF01D6626E}"/>
+                  </a:ext>
+                </a:extLst>
+              </p:cNvPr>
+              <p:cNvSpPr>
+                <a:spLocks noGrp="1" noRot="1" noChangeAspect="1" noMove="1" noResize="1" noEditPoints="1" noAdjustHandles="1" noChangeArrowheads="1" noChangeShapeType="1" noTextEdit="1"/>
+              </p:cNvSpPr>
+              <p:nvPr>
+                <p:ph type="title"/>
+              </p:nvPr>
+            </p:nvSpPr>
+            <p:spPr>
+              <a:blipFill>
+                <a:blip r:embed="rId2"/>
+                <a:stretch>
+                  <a:fillRect t="-14286" b="-20737"/>
+                </a:stretch>
+              </a:blipFill>
+            </p:spPr>
+            <p:txBody>
+              <a:bodyPr/>
+              <a:lstStyle/>
+              <a:p>
+                <a:r>
+                  <a:rPr lang="en-GB">
+                    <a:noFill/>
+                  </a:rPr>
+                  <a:t> </a:t>
+                </a:r>
+              </a:p>
+            </p:txBody>
+          </p:sp>
+        </mc:Fallback>
+      </mc:AlternateContent>
+      <p:sp>
+        <p:nvSpPr>
+          <p:cNvPr id="3" name="Content Placeholder 2">
+            <a:extLst>
+              <a:ext uri="{FF2B5EF4-FFF2-40B4-BE49-F238E27FC236}">
+                <a16:creationId xmlns:a16="http://schemas.microsoft.com/office/drawing/2014/main" id="{E346D777-B744-7515-8CAD-2C3CADC6A52D}"/>
+              </a:ext>
+            </a:extLst>
+          </p:cNvPr>
+          <p:cNvSpPr>
+            <a:spLocks noGrp="1"/>
+          </p:cNvSpPr>
+          <p:nvPr>
+            <p:ph idx="1"/>
+          </p:nvPr>
+        </p:nvSpPr>
+        <p:spPr/>
+        <p:txBody>
+          <a:bodyPr/>
+          <a:lstStyle/>
+          <a:p>
+            <a:r>
+              <a:rPr lang="en-US" dirty="0"/>
+              <a:t>A common misconception is;</a:t>
+            </a:r>
+          </a:p>
+          <a:p>
+            <a:pPr lvl="1"/>
+            <a:r>
+              <a:rPr lang="en-US" dirty="0"/>
+              <a:t>“I can code a model in R, therefore I understand the stats”</a:t>
+            </a:r>
+          </a:p>
+          <a:p>
+            <a:r>
+              <a:rPr lang="en-US" dirty="0"/>
+              <a:t>Can you copy and paste this code?</a:t>
+            </a:r>
+          </a:p>
+          <a:p>
+            <a:pPr lvl="1"/>
+            <a:r>
+              <a:rPr lang="en-US" sz="1800" dirty="0">
+                <a:latin typeface="Courier New" panose="02070309020205020404" pitchFamily="49" charset="0"/>
+                <a:cs typeface="Courier New" panose="02070309020205020404" pitchFamily="49" charset="0"/>
+              </a:rPr>
+              <a:t>gam(y ~ s(x2, k = 50), data = </a:t>
+            </a:r>
+            <a:r>
+              <a:rPr lang="en-US" sz="1800" dirty="0" err="1">
+                <a:latin typeface="Courier New" panose="02070309020205020404" pitchFamily="49" charset="0"/>
+                <a:cs typeface="Courier New" panose="02070309020205020404" pitchFamily="49" charset="0"/>
+              </a:rPr>
+              <a:t>df</a:t>
+            </a:r>
+            <a:r>
+              <a:rPr lang="en-US" sz="1800" dirty="0">
+                <a:latin typeface="Courier New" panose="02070309020205020404" pitchFamily="49" charset="0"/>
+                <a:cs typeface="Courier New" panose="02070309020205020404" pitchFamily="49" charset="0"/>
+              </a:rPr>
+              <a:t>, method = "REML")</a:t>
+            </a:r>
+          </a:p>
+          <a:p>
+            <a:pPr lvl="1"/>
+            <a:r>
+              <a:rPr lang="en-US" dirty="0"/>
+              <a:t>Congratulations, you’ve just run a </a:t>
+            </a:r>
+            <a:r>
+              <a:rPr lang="en-US" dirty="0" err="1"/>
+              <a:t>generalised</a:t>
+            </a:r>
+            <a:r>
+              <a:rPr lang="en-US" dirty="0"/>
+              <a:t> additive model, with the growth explained by scaled temperature, allowing a maximum of 50 knots, effectively using 9.59, for the thin plate regression spline basis.</a:t>
+            </a:r>
+          </a:p>
+          <a:p>
+            <a:endParaRPr lang="en-GB" dirty="0"/>
+          </a:p>
+        </p:txBody>
+      </p:sp>
+      <p:pic>
+        <p:nvPicPr>
+          <p:cNvPr id="14" name="Picture Placeholder 13" descr="A graph of growth rate&#10;&#10;Description automatically generated">
+            <a:extLst>
+              <a:ext uri="{FF2B5EF4-FFF2-40B4-BE49-F238E27FC236}">
+                <a16:creationId xmlns:a16="http://schemas.microsoft.com/office/drawing/2014/main" id="{EDC3D520-D686-37BC-D9D7-A725C2907E1D}"/>
+              </a:ext>
+            </a:extLst>
+          </p:cNvPr>
+          <p:cNvPicPr>
+            <a:picLocks noGrp="1" noChangeAspect="1"/>
+          </p:cNvPicPr>
+          <p:nvPr>
+            <p:ph type="pic" sz="quarter" idx="10"/>
+          </p:nvPr>
+        </p:nvPicPr>
+        <p:blipFill>
+          <a:blip r:embed="rId3">
+            <a:extLst>
+              <a:ext uri="{28A0092B-C50C-407E-A947-70E740481C1C}">
+                <a14:useLocalDpi xmlns:a14="http://schemas.microsoft.com/office/drawing/2010/main" val="0"/>
+              </a:ext>
+            </a:extLst>
+          </a:blip>
+          <a:srcRect t="691" b="691"/>
+          <a:stretch>
+            <a:fillRect/>
+          </a:stretch>
+        </p:blipFill>
+        <p:spPr/>
+      </p:pic>
+    </p:spTree>
+    <p:extLst>
+      <p:ext uri="{BB962C8B-B14F-4D97-AF65-F5344CB8AC3E}">
+        <p14:creationId xmlns:p14="http://schemas.microsoft.com/office/powerpoint/2010/main" val="3766193543"/>
+      </p:ext>
+    </p:extLst>
+  </p:cSld>
+  <p:clrMapOvr>
+    <a:masterClrMapping/>
+  </p:clrMapOvr>
+  <mc:AlternateContent xmlns:mc="http://schemas.openxmlformats.org/markup-compatibility/2006" xmlns:p14="http://schemas.microsoft.com/office/powerpoint/2010/main">
+    <mc:Choice Requires="p14">
+      <p:transition spd="med" p14:dur="700">
+        <p:fade/>
+      </p:transition>
+    </mc:Choice>
+    <mc:Fallback xmlns="">
+      <p:transition spd="med">
+        <p:fade/>
+      </p:transition>
+    </mc:Fallback>
+  </mc:AlternateContent>
+  <p:timing>
+    <p:tnLst>
+      <p:par>
+        <p:cTn id="1" dur="indefinite" restart="never" nodeType="tmRoot">
+          <p:childTnLst>
+            <p:seq concurrent="1" nextAc="seek">
+              <p:cTn id="2" dur="indefinite" nodeType="mainSeq">
+                <p:childTnLst>
+                  <p:par>
+                    <p:cTn id="3" fill="hold">
+                      <p:stCondLst>
+                        <p:cond delay="indefinite"/>
+                      </p:stCondLst>
+                      <p:childTnLst>
+                        <p:par>
+                          <p:cTn id="4" fill="hold">
+                            <p:stCondLst>
+                              <p:cond delay="0"/>
+                            </p:stCondLst>
+                            <p:childTnLst>
+                              <p:par>
+                                <p:cTn id="5" presetID="10" presetClass="entr" presetSubtype="0" fill="hold" grpId="0" nodeType="clickEffect">
+                                  <p:stCondLst>
+                                    <p:cond delay="0"/>
+                                  </p:stCondLst>
+                                  <p:childTnLst>
+                                    <p:set>
+                                      <p:cBhvr>
+                                        <p:cTn id="6" dur="1" fill="hold">
+                                          <p:stCondLst>
+                                            <p:cond delay="0"/>
+                                          </p:stCondLst>
+                                        </p:cTn>
+                                        <p:tgtEl>
+                                          <p:spTgt spid="3">
+                                            <p:txEl>
+                                              <p:pRg st="0" end="0"/>
+                                            </p:txEl>
+                                          </p:spTgt>
+                                        </p:tgtEl>
+                                        <p:attrNameLst>
+                                          <p:attrName>style.visibility</p:attrName>
+                                        </p:attrNameLst>
+                                      </p:cBhvr>
+                                      <p:to>
+                                        <p:strVal val="visible"/>
+                                      </p:to>
+                                    </p:set>
+                                    <p:animEffect transition="in" filter="fade">
+                                      <p:cBhvr>
+                                        <p:cTn id="7" dur="500"/>
+                                        <p:tgtEl>
+                                          <p:spTgt spid="3">
+                                            <p:txEl>
+                                              <p:pRg st="0" end="0"/>
+                                            </p:txEl>
+                                          </p:spTgt>
+                                        </p:tgtEl>
+                                      </p:cBhvr>
+                                    </p:animEffect>
+                                  </p:childTnLst>
+                                </p:cTn>
+                              </p:par>
+                            </p:childTnLst>
+                          </p:cTn>
+                        </p:par>
+                      </p:childTnLst>
+                    </p:cTn>
+                  </p:par>
+                  <p:par>
+                    <p:cTn id="8" fill="hold">
+                      <p:stCondLst>
+                        <p:cond delay="indefinite"/>
+                      </p:stCondLst>
+                      <p:childTnLst>
+                        <p:par>
+                          <p:cTn id="9" fill="hold">
+                            <p:stCondLst>
+                              <p:cond delay="0"/>
+                            </p:stCondLst>
+                            <p:childTnLst>
+                              <p:par>
+                                <p:cTn id="10" presetID="10" presetClass="entr" presetSubtype="0" fill="hold" grpId="0" nodeType="clickEffect">
+                                  <p:stCondLst>
+                                    <p:cond delay="0"/>
+                                  </p:stCondLst>
+                                  <p:childTnLst>
+                                    <p:set>
+                                      <p:cBhvr>
+                                        <p:cTn id="11" dur="1" fill="hold">
+                                          <p:stCondLst>
+                                            <p:cond delay="0"/>
+                                          </p:stCondLst>
+                                        </p:cTn>
+                                        <p:tgtEl>
+                                          <p:spTgt spid="3">
+                                            <p:txEl>
+                                              <p:pRg st="1" end="1"/>
+                                            </p:txEl>
+                                          </p:spTgt>
+                                        </p:tgtEl>
+                                        <p:attrNameLst>
+                                          <p:attrName>style.visibility</p:attrName>
+                                        </p:attrNameLst>
+                                      </p:cBhvr>
+                                      <p:to>
+                                        <p:strVal val="visible"/>
+                                      </p:to>
+                                    </p:set>
+                                    <p:animEffect transition="in" filter="fade">
+                                      <p:cBhvr>
+                                        <p:cTn id="12" dur="500"/>
+                                        <p:tgtEl>
+                                          <p:spTgt spid="3">
+                                            <p:txEl>
+                                              <p:pRg st="1" end="1"/>
+                                            </p:txEl>
+                                          </p:spTgt>
+                                        </p:tgtEl>
+                                      </p:cBhvr>
+                                    </p:animEffect>
+                                  </p:childTnLst>
+                                </p:cTn>
+                              </p:par>
+                            </p:childTnLst>
+                          </p:cTn>
+                        </p:par>
+                      </p:childTnLst>
+                    </p:cTn>
+                  </p:par>
+                  <p:par>
+                    <p:cTn id="13" fill="hold">
+                      <p:stCondLst>
+                        <p:cond delay="indefinite"/>
+                      </p:stCondLst>
+                      <p:childTnLst>
+                        <p:par>
+                          <p:cTn id="14" fill="hold">
+                            <p:stCondLst>
+                              <p:cond delay="0"/>
+                            </p:stCondLst>
+                            <p:childTnLst>
+                              <p:par>
+                                <p:cTn id="15" presetID="10" presetClass="entr" presetSubtype="0" fill="hold" grpId="0" nodeType="clickEffect">
+                                  <p:stCondLst>
+                                    <p:cond delay="0"/>
+                                  </p:stCondLst>
+                                  <p:childTnLst>
+                                    <p:set>
+                                      <p:cBhvr>
+                                        <p:cTn id="16" dur="1" fill="hold">
+                                          <p:stCondLst>
+                                            <p:cond delay="0"/>
+                                          </p:stCondLst>
+                                        </p:cTn>
+                                        <p:tgtEl>
+                                          <p:spTgt spid="3">
+                                            <p:txEl>
+                                              <p:pRg st="2" end="2"/>
+                                            </p:txEl>
+                                          </p:spTgt>
+                                        </p:tgtEl>
+                                        <p:attrNameLst>
+                                          <p:attrName>style.visibility</p:attrName>
+                                        </p:attrNameLst>
+                                      </p:cBhvr>
+                                      <p:to>
+                                        <p:strVal val="visible"/>
+                                      </p:to>
+                                    </p:set>
+                                    <p:animEffect transition="in" filter="fade">
+                                      <p:cBhvr>
+                                        <p:cTn id="17" dur="500"/>
+                                        <p:tgtEl>
+                                          <p:spTgt spid="3">
+                                            <p:txEl>
+                                              <p:pRg st="2" end="2"/>
+                                            </p:txEl>
+                                          </p:spTgt>
+                                        </p:tgtEl>
+                                      </p:cBhvr>
+                                    </p:animEffect>
+                                  </p:childTnLst>
+                                </p:cTn>
+                              </p:par>
+                            </p:childTnLst>
+                          </p:cTn>
+                        </p:par>
+                      </p:childTnLst>
+                    </p:cTn>
+                  </p:par>
+                  <p:par>
+                    <p:cTn id="18" fill="hold">
+                      <p:stCondLst>
+                        <p:cond delay="indefinite"/>
+                      </p:stCondLst>
+                      <p:childTnLst>
+                        <p:par>
+                          <p:cTn id="19" fill="hold">
+                            <p:stCondLst>
+                              <p:cond delay="0"/>
+                            </p:stCondLst>
+                            <p:childTnLst>
+                              <p:par>
+                                <p:cTn id="20" presetID="10" presetClass="entr" presetSubtype="0" fill="hold" grpId="0" nodeType="clickEffect">
+                                  <p:stCondLst>
+                                    <p:cond delay="0"/>
+                                  </p:stCondLst>
+                                  <p:childTnLst>
+                                    <p:set>
+                                      <p:cBhvr>
+                                        <p:cTn id="21" dur="1" fill="hold">
+                                          <p:stCondLst>
+                                            <p:cond delay="0"/>
+                                          </p:stCondLst>
+                                        </p:cTn>
+                                        <p:tgtEl>
+                                          <p:spTgt spid="3">
+                                            <p:txEl>
+                                              <p:pRg st="3" end="3"/>
+                                            </p:txEl>
+                                          </p:spTgt>
+                                        </p:tgtEl>
+                                        <p:attrNameLst>
+                                          <p:attrName>style.visibility</p:attrName>
+                                        </p:attrNameLst>
+                                      </p:cBhvr>
+                                      <p:to>
+                                        <p:strVal val="visible"/>
+                                      </p:to>
+                                    </p:set>
+                                    <p:animEffect transition="in" filter="fade">
+                                      <p:cBhvr>
+                                        <p:cTn id="22" dur="500"/>
+                                        <p:tgtEl>
+                                          <p:spTgt spid="3">
+                                            <p:txEl>
+                                              <p:pRg st="3" end="3"/>
+                                            </p:txEl>
+                                          </p:spTgt>
+                                        </p:tgtEl>
+                                      </p:cBhvr>
+                                    </p:animEffect>
+                                  </p:childTnLst>
+                                </p:cTn>
+                              </p:par>
+                            </p:childTnLst>
+                          </p:cTn>
+                        </p:par>
+                      </p:childTnLst>
+                    </p:cTn>
+                  </p:par>
+                  <p:par>
+                    <p:cTn id="23" fill="hold">
+                      <p:stCondLst>
+                        <p:cond delay="indefinite"/>
+                      </p:stCondLst>
+                      <p:childTnLst>
+                        <p:par>
+                          <p:cTn id="24" fill="hold">
+                            <p:stCondLst>
+                              <p:cond delay="0"/>
+                            </p:stCondLst>
+                            <p:childTnLst>
+                              <p:par>
+                                <p:cTn id="25" presetID="10" presetClass="entr" presetSubtype="0" fill="hold" grpId="0" nodeType="clickEffect">
+                                  <p:stCondLst>
+                                    <p:cond delay="0"/>
+                                  </p:stCondLst>
+                                  <p:childTnLst>
+                                    <p:set>
+                                      <p:cBhvr>
+                                        <p:cTn id="26" dur="1" fill="hold">
+                                          <p:stCondLst>
+                                            <p:cond delay="0"/>
+                                          </p:stCondLst>
+                                        </p:cTn>
+                                        <p:tgtEl>
+                                          <p:spTgt spid="3">
+                                            <p:txEl>
+                                              <p:pRg st="4" end="4"/>
+                                            </p:txEl>
+                                          </p:spTgt>
+                                        </p:tgtEl>
+                                        <p:attrNameLst>
+                                          <p:attrName>style.visibility</p:attrName>
+                                        </p:attrNameLst>
+                                      </p:cBhvr>
+                                      <p:to>
+                                        <p:strVal val="visible"/>
+                                      </p:to>
+                                    </p:set>
+                                    <p:animEffect transition="in" filter="fade">
+                                      <p:cBhvr>
+                                        <p:cTn id="27" dur="500"/>
+                                        <p:tgtEl>
+                                          <p:spTgt spid="3">
+                                            <p:txEl>
+                                              <p:pRg st="4" end="4"/>
+                                            </p:txEl>
+                                          </p:spTgt>
+                                        </p:tgtEl>
+                                      </p:cBhvr>
+                                    </p:animEffect>
+                                  </p:childTnLst>
+                                </p:cTn>
+                              </p:par>
+                            </p:childTnLst>
+                          </p:cTn>
+                        </p:par>
+                      </p:childTnLst>
+                    </p:cTn>
+                  </p:par>
+                </p:childTnLst>
+              </p:cTn>
+              <p:prevCondLst>
+                <p:cond evt="onPrev" delay="0">
+                  <p:tgtEl>
+                    <p:sldTgt/>
+                  </p:tgtEl>
+                </p:cond>
+              </p:prevCondLst>
+              <p:nextCondLst>
+                <p:cond evt="onNext" delay="0">
+                  <p:tgtEl>
+                    <p:sldTgt/>
+                  </p:tgtEl>
+                </p:cond>
+              </p:nextCondLst>
+            </p:seq>
+          </p:childTnLst>
+        </p:cTn>
+      </p:par>
+    </p:tnLst>
+    <p:bldLst>
+      <p:bldP spid="3" grpId="0" uiExpand="1" build="p"/>
+    </p:bldLst>
+  </p:timing>
+</p:sld>
+</file>
+
+<file path=ppt/slides/slide30.xml><?xml version="1.0" encoding="utf-8"?>
 <p:sld xmlns:a="http://schemas.openxmlformats.org/drawingml/2006/main" xmlns:r="http://schemas.openxmlformats.org/officeDocument/2006/relationships" xmlns:p="http://schemas.openxmlformats.org/presentationml/2006/main">
   <p:cSld>
     <p:spTree>
@@ -20833,7 +20534,7 @@
 </p:sld>
 </file>
 
-<file path=ppt/slides/slide32.xml><?xml version="1.0" encoding="utf-8"?>
+<file path=ppt/slides/slide31.xml><?xml version="1.0" encoding="utf-8"?>
 <p:sld xmlns:a="http://schemas.openxmlformats.org/drawingml/2006/main" xmlns:r="http://schemas.openxmlformats.org/officeDocument/2006/relationships" xmlns:p="http://schemas.openxmlformats.org/presentationml/2006/main">
   <p:cSld>
     <p:spTree>
@@ -20969,587 +20670,6 @@
 </file>
 
 <file path=ppt/slides/slide4.xml><?xml version="1.0" encoding="utf-8"?>
-<p:sld xmlns:a="http://schemas.openxmlformats.org/drawingml/2006/main" xmlns:r="http://schemas.openxmlformats.org/officeDocument/2006/relationships" xmlns:p="http://schemas.openxmlformats.org/presentationml/2006/main">
-  <p:cSld>
-    <p:spTree>
-      <p:nvGrpSpPr>
-        <p:cNvPr id="1" name=""/>
-        <p:cNvGrpSpPr/>
-        <p:nvPr/>
-      </p:nvGrpSpPr>
-      <p:grpSpPr>
-        <a:xfrm>
-          <a:off x="0" y="0"/>
-          <a:ext cx="0" cy="0"/>
-          <a:chOff x="0" y="0"/>
-          <a:chExt cx="0" cy="0"/>
-        </a:xfrm>
-      </p:grpSpPr>
-      <mc:AlternateContent xmlns:mc="http://schemas.openxmlformats.org/markup-compatibility/2006" xmlns:a14="http://schemas.microsoft.com/office/drawing/2010/main">
-        <mc:Choice Requires="a14">
-          <p:sp>
-            <p:nvSpPr>
-              <p:cNvPr id="2" name="Title 1">
-                <a:extLst>
-                  <a:ext uri="{FF2B5EF4-FFF2-40B4-BE49-F238E27FC236}">
-                    <a16:creationId xmlns:a16="http://schemas.microsoft.com/office/drawing/2014/main" id="{C99BE1FB-BF70-0172-BD92-97BF01D6626E}"/>
-                  </a:ext>
-                </a:extLst>
-              </p:cNvPr>
-              <p:cNvSpPr>
-                <a:spLocks noGrp="1"/>
-              </p:cNvSpPr>
-              <p:nvPr>
-                <p:ph type="title"/>
-              </p:nvPr>
-            </p:nvSpPr>
-            <p:spPr/>
-            <p:txBody>
-              <a:bodyPr>
-                <a:normAutofit/>
-              </a:bodyPr>
-              <a:lstStyle/>
-              <a:p>
-                <a:r>
-                  <a:rPr lang="en-GB" dirty="0"/>
-                  <a:t>Implementing </a:t>
-                </a:r>
-                <a14:m>
-                  <m:oMath xmlns:m="http://schemas.openxmlformats.org/officeDocument/2006/math">
-                    <m:r>
-                      <a:rPr lang="en-GB" b="0" i="1" smtClean="0">
-                        <a:latin typeface="Cambria Math" panose="02040503050406030204" pitchFamily="18" charset="0"/>
-                      </a:rPr>
-                      <m:t>≠</m:t>
-                    </m:r>
-                  </m:oMath>
-                </a14:m>
-                <a:r>
-                  <a:rPr lang="en-GB" dirty="0"/>
-                  <a:t> understanding</a:t>
-                </a:r>
-              </a:p>
-            </p:txBody>
-          </p:sp>
-        </mc:Choice>
-        <mc:Fallback xmlns="">
-          <p:sp>
-            <p:nvSpPr>
-              <p:cNvPr id="2" name="Title 1">
-                <a:extLst>
-                  <a:ext uri="{FF2B5EF4-FFF2-40B4-BE49-F238E27FC236}">
-                    <a16:creationId xmlns:a16="http://schemas.microsoft.com/office/drawing/2014/main" id="{C99BE1FB-BF70-0172-BD92-97BF01D6626E}"/>
-                  </a:ext>
-                </a:extLst>
-              </p:cNvPr>
-              <p:cNvSpPr>
-                <a:spLocks noGrp="1" noRot="1" noChangeAspect="1" noMove="1" noResize="1" noEditPoints="1" noAdjustHandles="1" noChangeArrowheads="1" noChangeShapeType="1" noTextEdit="1"/>
-              </p:cNvSpPr>
-              <p:nvPr>
-                <p:ph type="title"/>
-              </p:nvPr>
-            </p:nvSpPr>
-            <p:spPr>
-              <a:blipFill>
-                <a:blip r:embed="rId2"/>
-                <a:stretch>
-                  <a:fillRect t="-14286" b="-20737"/>
-                </a:stretch>
-              </a:blipFill>
-            </p:spPr>
-            <p:txBody>
-              <a:bodyPr/>
-              <a:lstStyle/>
-              <a:p>
-                <a:r>
-                  <a:rPr lang="en-GB">
-                    <a:noFill/>
-                  </a:rPr>
-                  <a:t> </a:t>
-                </a:r>
-              </a:p>
-            </p:txBody>
-          </p:sp>
-        </mc:Fallback>
-      </mc:AlternateContent>
-      <p:sp>
-        <p:nvSpPr>
-          <p:cNvPr id="3" name="Content Placeholder 2">
-            <a:extLst>
-              <a:ext uri="{FF2B5EF4-FFF2-40B4-BE49-F238E27FC236}">
-                <a16:creationId xmlns:a16="http://schemas.microsoft.com/office/drawing/2014/main" id="{E346D777-B744-7515-8CAD-2C3CADC6A52D}"/>
-              </a:ext>
-            </a:extLst>
-          </p:cNvPr>
-          <p:cNvSpPr>
-            <a:spLocks noGrp="1"/>
-          </p:cNvSpPr>
-          <p:nvPr>
-            <p:ph idx="1"/>
-          </p:nvPr>
-        </p:nvSpPr>
-        <p:spPr/>
-        <p:txBody>
-          <a:bodyPr/>
-          <a:lstStyle/>
-          <a:p>
-            <a:r>
-              <a:rPr lang="en-US" dirty="0"/>
-              <a:t>A common misconception is;</a:t>
-            </a:r>
-          </a:p>
-          <a:p>
-            <a:pPr lvl="1"/>
-            <a:r>
-              <a:rPr lang="en-US" dirty="0"/>
-              <a:t>“I can code a model in R, therefore I understand the stats”</a:t>
-            </a:r>
-          </a:p>
-          <a:p>
-            <a:r>
-              <a:rPr lang="en-US" dirty="0"/>
-              <a:t>Can you copy and paste this code?</a:t>
-            </a:r>
-          </a:p>
-          <a:p>
-            <a:pPr lvl="1"/>
-            <a:r>
-              <a:rPr lang="en-US" sz="1800" dirty="0">
-                <a:latin typeface="Courier New" panose="02070309020205020404" pitchFamily="49" charset="0"/>
-                <a:cs typeface="Courier New" panose="02070309020205020404" pitchFamily="49" charset="0"/>
-              </a:rPr>
-              <a:t>gam(y ~ s(x2, k = 50), data = </a:t>
-            </a:r>
-            <a:r>
-              <a:rPr lang="en-US" sz="1800" dirty="0" err="1">
-                <a:latin typeface="Courier New" panose="02070309020205020404" pitchFamily="49" charset="0"/>
-                <a:cs typeface="Courier New" panose="02070309020205020404" pitchFamily="49" charset="0"/>
-              </a:rPr>
-              <a:t>df</a:t>
-            </a:r>
-            <a:r>
-              <a:rPr lang="en-US" sz="1800" dirty="0">
-                <a:latin typeface="Courier New" panose="02070309020205020404" pitchFamily="49" charset="0"/>
-                <a:cs typeface="Courier New" panose="02070309020205020404" pitchFamily="49" charset="0"/>
-              </a:rPr>
-              <a:t>, method = "REML")</a:t>
-            </a:r>
-          </a:p>
-          <a:p>
-            <a:pPr lvl="1"/>
-            <a:r>
-              <a:rPr lang="en-US" dirty="0"/>
-              <a:t>Congratulations, you’ve just run a </a:t>
-            </a:r>
-            <a:r>
-              <a:rPr lang="en-US" dirty="0" err="1"/>
-              <a:t>generalised</a:t>
-            </a:r>
-            <a:r>
-              <a:rPr lang="en-US" dirty="0"/>
-              <a:t> additive model, with the growth explained by scaled temperature, allowing a maximum of 50 knots, effectively using 9.59, for the thin plate regression spline basis.</a:t>
-            </a:r>
-          </a:p>
-          <a:p>
-            <a:endParaRPr lang="en-GB" dirty="0"/>
-          </a:p>
-        </p:txBody>
-      </p:sp>
-      <p:pic>
-        <p:nvPicPr>
-          <p:cNvPr id="14" name="Picture Placeholder 13" descr="A graph of growth rate&#10;&#10;Description automatically generated">
-            <a:extLst>
-              <a:ext uri="{FF2B5EF4-FFF2-40B4-BE49-F238E27FC236}">
-                <a16:creationId xmlns:a16="http://schemas.microsoft.com/office/drawing/2014/main" id="{EDC3D520-D686-37BC-D9D7-A725C2907E1D}"/>
-              </a:ext>
-            </a:extLst>
-          </p:cNvPr>
-          <p:cNvPicPr>
-            <a:picLocks noGrp="1" noChangeAspect="1"/>
-          </p:cNvPicPr>
-          <p:nvPr>
-            <p:ph type="pic" sz="quarter" idx="10"/>
-          </p:nvPr>
-        </p:nvPicPr>
-        <p:blipFill>
-          <a:blip r:embed="rId3">
-            <a:extLst>
-              <a:ext uri="{28A0092B-C50C-407E-A947-70E740481C1C}">
-                <a14:useLocalDpi xmlns:a14="http://schemas.microsoft.com/office/drawing/2010/main" val="0"/>
-              </a:ext>
-            </a:extLst>
-          </a:blip>
-          <a:srcRect t="691" b="691"/>
-          <a:stretch>
-            <a:fillRect/>
-          </a:stretch>
-        </p:blipFill>
-        <p:spPr/>
-      </p:pic>
-    </p:spTree>
-    <p:extLst>
-      <p:ext uri="{BB962C8B-B14F-4D97-AF65-F5344CB8AC3E}">
-        <p14:creationId xmlns:p14="http://schemas.microsoft.com/office/powerpoint/2010/main" val="3766193543"/>
-      </p:ext>
-    </p:extLst>
-  </p:cSld>
-  <p:clrMapOvr>
-    <a:masterClrMapping/>
-  </p:clrMapOvr>
-  <mc:AlternateContent xmlns:mc="http://schemas.openxmlformats.org/markup-compatibility/2006" xmlns:p14="http://schemas.microsoft.com/office/powerpoint/2010/main">
-    <mc:Choice Requires="p14">
-      <p:transition spd="med" p14:dur="700">
-        <p:fade/>
-      </p:transition>
-    </mc:Choice>
-    <mc:Fallback xmlns="">
-      <p:transition spd="med">
-        <p:fade/>
-      </p:transition>
-    </mc:Fallback>
-  </mc:AlternateContent>
-  <p:timing>
-    <p:tnLst>
-      <p:par>
-        <p:cTn id="1" dur="indefinite" restart="never" nodeType="tmRoot">
-          <p:childTnLst>
-            <p:seq concurrent="1" nextAc="seek">
-              <p:cTn id="2" dur="indefinite" nodeType="mainSeq">
-                <p:childTnLst>
-                  <p:par>
-                    <p:cTn id="3" fill="hold">
-                      <p:stCondLst>
-                        <p:cond delay="indefinite"/>
-                      </p:stCondLst>
-                      <p:childTnLst>
-                        <p:par>
-                          <p:cTn id="4" fill="hold">
-                            <p:stCondLst>
-                              <p:cond delay="0"/>
-                            </p:stCondLst>
-                            <p:childTnLst>
-                              <p:par>
-                                <p:cTn id="5" presetID="10" presetClass="entr" presetSubtype="0" fill="hold" grpId="0" nodeType="clickEffect">
-                                  <p:stCondLst>
-                                    <p:cond delay="0"/>
-                                  </p:stCondLst>
-                                  <p:childTnLst>
-                                    <p:set>
-                                      <p:cBhvr>
-                                        <p:cTn id="6" dur="1" fill="hold">
-                                          <p:stCondLst>
-                                            <p:cond delay="0"/>
-                                          </p:stCondLst>
-                                        </p:cTn>
-                                        <p:tgtEl>
-                                          <p:spTgt spid="3">
-                                            <p:txEl>
-                                              <p:pRg st="0" end="0"/>
-                                            </p:txEl>
-                                          </p:spTgt>
-                                        </p:tgtEl>
-                                        <p:attrNameLst>
-                                          <p:attrName>style.visibility</p:attrName>
-                                        </p:attrNameLst>
-                                      </p:cBhvr>
-                                      <p:to>
-                                        <p:strVal val="visible"/>
-                                      </p:to>
-                                    </p:set>
-                                    <p:animEffect transition="in" filter="fade">
-                                      <p:cBhvr>
-                                        <p:cTn id="7" dur="500"/>
-                                        <p:tgtEl>
-                                          <p:spTgt spid="3">
-                                            <p:txEl>
-                                              <p:pRg st="0" end="0"/>
-                                            </p:txEl>
-                                          </p:spTgt>
-                                        </p:tgtEl>
-                                      </p:cBhvr>
-                                    </p:animEffect>
-                                  </p:childTnLst>
-                                </p:cTn>
-                              </p:par>
-                            </p:childTnLst>
-                          </p:cTn>
-                        </p:par>
-                      </p:childTnLst>
-                    </p:cTn>
-                  </p:par>
-                  <p:par>
-                    <p:cTn id="8" fill="hold">
-                      <p:stCondLst>
-                        <p:cond delay="indefinite"/>
-                      </p:stCondLst>
-                      <p:childTnLst>
-                        <p:par>
-                          <p:cTn id="9" fill="hold">
-                            <p:stCondLst>
-                              <p:cond delay="0"/>
-                            </p:stCondLst>
-                            <p:childTnLst>
-                              <p:par>
-                                <p:cTn id="10" presetID="10" presetClass="entr" presetSubtype="0" fill="hold" grpId="0" nodeType="clickEffect">
-                                  <p:stCondLst>
-                                    <p:cond delay="0"/>
-                                  </p:stCondLst>
-                                  <p:childTnLst>
-                                    <p:set>
-                                      <p:cBhvr>
-                                        <p:cTn id="11" dur="1" fill="hold">
-                                          <p:stCondLst>
-                                            <p:cond delay="0"/>
-                                          </p:stCondLst>
-                                        </p:cTn>
-                                        <p:tgtEl>
-                                          <p:spTgt spid="3">
-                                            <p:txEl>
-                                              <p:pRg st="1" end="1"/>
-                                            </p:txEl>
-                                          </p:spTgt>
-                                        </p:tgtEl>
-                                        <p:attrNameLst>
-                                          <p:attrName>style.visibility</p:attrName>
-                                        </p:attrNameLst>
-                                      </p:cBhvr>
-                                      <p:to>
-                                        <p:strVal val="visible"/>
-                                      </p:to>
-                                    </p:set>
-                                    <p:animEffect transition="in" filter="fade">
-                                      <p:cBhvr>
-                                        <p:cTn id="12" dur="500"/>
-                                        <p:tgtEl>
-                                          <p:spTgt spid="3">
-                                            <p:txEl>
-                                              <p:pRg st="1" end="1"/>
-                                            </p:txEl>
-                                          </p:spTgt>
-                                        </p:tgtEl>
-                                      </p:cBhvr>
-                                    </p:animEffect>
-                                  </p:childTnLst>
-                                </p:cTn>
-                              </p:par>
-                            </p:childTnLst>
-                          </p:cTn>
-                        </p:par>
-                      </p:childTnLst>
-                    </p:cTn>
-                  </p:par>
-                  <p:par>
-                    <p:cTn id="13" fill="hold">
-                      <p:stCondLst>
-                        <p:cond delay="indefinite"/>
-                      </p:stCondLst>
-                      <p:childTnLst>
-                        <p:par>
-                          <p:cTn id="14" fill="hold">
-                            <p:stCondLst>
-                              <p:cond delay="0"/>
-                            </p:stCondLst>
-                            <p:childTnLst>
-                              <p:par>
-                                <p:cTn id="15" presetID="10" presetClass="entr" presetSubtype="0" fill="hold" grpId="0" nodeType="clickEffect">
-                                  <p:stCondLst>
-                                    <p:cond delay="0"/>
-                                  </p:stCondLst>
-                                  <p:childTnLst>
-                                    <p:set>
-                                      <p:cBhvr>
-                                        <p:cTn id="16" dur="1" fill="hold">
-                                          <p:stCondLst>
-                                            <p:cond delay="0"/>
-                                          </p:stCondLst>
-                                        </p:cTn>
-                                        <p:tgtEl>
-                                          <p:spTgt spid="3">
-                                            <p:txEl>
-                                              <p:pRg st="2" end="2"/>
-                                            </p:txEl>
-                                          </p:spTgt>
-                                        </p:tgtEl>
-                                        <p:attrNameLst>
-                                          <p:attrName>style.visibility</p:attrName>
-                                        </p:attrNameLst>
-                                      </p:cBhvr>
-                                      <p:to>
-                                        <p:strVal val="visible"/>
-                                      </p:to>
-                                    </p:set>
-                                    <p:animEffect transition="in" filter="fade">
-                                      <p:cBhvr>
-                                        <p:cTn id="17" dur="500"/>
-                                        <p:tgtEl>
-                                          <p:spTgt spid="3">
-                                            <p:txEl>
-                                              <p:pRg st="2" end="2"/>
-                                            </p:txEl>
-                                          </p:spTgt>
-                                        </p:tgtEl>
-                                      </p:cBhvr>
-                                    </p:animEffect>
-                                  </p:childTnLst>
-                                </p:cTn>
-                              </p:par>
-                            </p:childTnLst>
-                          </p:cTn>
-                        </p:par>
-                      </p:childTnLst>
-                    </p:cTn>
-                  </p:par>
-                  <p:par>
-                    <p:cTn id="18" fill="hold">
-                      <p:stCondLst>
-                        <p:cond delay="indefinite"/>
-                      </p:stCondLst>
-                      <p:childTnLst>
-                        <p:par>
-                          <p:cTn id="19" fill="hold">
-                            <p:stCondLst>
-                              <p:cond delay="0"/>
-                            </p:stCondLst>
-                            <p:childTnLst>
-                              <p:par>
-                                <p:cTn id="20" presetID="10" presetClass="entr" presetSubtype="0" fill="hold" grpId="0" nodeType="clickEffect">
-                                  <p:stCondLst>
-                                    <p:cond delay="0"/>
-                                  </p:stCondLst>
-                                  <p:childTnLst>
-                                    <p:set>
-                                      <p:cBhvr>
-                                        <p:cTn id="21" dur="1" fill="hold">
-                                          <p:stCondLst>
-                                            <p:cond delay="0"/>
-                                          </p:stCondLst>
-                                        </p:cTn>
-                                        <p:tgtEl>
-                                          <p:spTgt spid="3">
-                                            <p:txEl>
-                                              <p:pRg st="3" end="3"/>
-                                            </p:txEl>
-                                          </p:spTgt>
-                                        </p:tgtEl>
-                                        <p:attrNameLst>
-                                          <p:attrName>style.visibility</p:attrName>
-                                        </p:attrNameLst>
-                                      </p:cBhvr>
-                                      <p:to>
-                                        <p:strVal val="visible"/>
-                                      </p:to>
-                                    </p:set>
-                                    <p:animEffect transition="in" filter="fade">
-                                      <p:cBhvr>
-                                        <p:cTn id="22" dur="500"/>
-                                        <p:tgtEl>
-                                          <p:spTgt spid="3">
-                                            <p:txEl>
-                                              <p:pRg st="3" end="3"/>
-                                            </p:txEl>
-                                          </p:spTgt>
-                                        </p:tgtEl>
-                                      </p:cBhvr>
-                                    </p:animEffect>
-                                  </p:childTnLst>
-                                </p:cTn>
-                              </p:par>
-                            </p:childTnLst>
-                          </p:cTn>
-                        </p:par>
-                      </p:childTnLst>
-                    </p:cTn>
-                  </p:par>
-                  <p:par>
-                    <p:cTn id="23" fill="hold">
-                      <p:stCondLst>
-                        <p:cond delay="indefinite"/>
-                      </p:stCondLst>
-                      <p:childTnLst>
-                        <p:par>
-                          <p:cTn id="24" fill="hold">
-                            <p:stCondLst>
-                              <p:cond delay="0"/>
-                            </p:stCondLst>
-                            <p:childTnLst>
-                              <p:par>
-                                <p:cTn id="25" presetID="10" presetClass="entr" presetSubtype="0" fill="hold" grpId="0" nodeType="clickEffect">
-                                  <p:stCondLst>
-                                    <p:cond delay="0"/>
-                                  </p:stCondLst>
-                                  <p:childTnLst>
-                                    <p:set>
-                                      <p:cBhvr>
-                                        <p:cTn id="26" dur="1" fill="hold">
-                                          <p:stCondLst>
-                                            <p:cond delay="0"/>
-                                          </p:stCondLst>
-                                        </p:cTn>
-                                        <p:tgtEl>
-                                          <p:spTgt spid="3">
-                                            <p:txEl>
-                                              <p:pRg st="4" end="4"/>
-                                            </p:txEl>
-                                          </p:spTgt>
-                                        </p:tgtEl>
-                                        <p:attrNameLst>
-                                          <p:attrName>style.visibility</p:attrName>
-                                        </p:attrNameLst>
-                                      </p:cBhvr>
-                                      <p:to>
-                                        <p:strVal val="visible"/>
-                                      </p:to>
-                                    </p:set>
-                                    <p:animEffect transition="in" filter="fade">
-                                      <p:cBhvr>
-                                        <p:cTn id="27" dur="500"/>
-                                        <p:tgtEl>
-                                          <p:spTgt spid="3">
-                                            <p:txEl>
-                                              <p:pRg st="4" end="4"/>
-                                            </p:txEl>
-                                          </p:spTgt>
-                                        </p:tgtEl>
-                                      </p:cBhvr>
-                                    </p:animEffect>
-                                  </p:childTnLst>
-                                </p:cTn>
-                              </p:par>
-                            </p:childTnLst>
-                          </p:cTn>
-                        </p:par>
-                      </p:childTnLst>
-                    </p:cTn>
-                  </p:par>
-                </p:childTnLst>
-              </p:cTn>
-              <p:prevCondLst>
-                <p:cond evt="onPrev" delay="0">
-                  <p:tgtEl>
-                    <p:sldTgt/>
-                  </p:tgtEl>
-                </p:cond>
-              </p:prevCondLst>
-              <p:nextCondLst>
-                <p:cond evt="onNext" delay="0">
-                  <p:tgtEl>
-                    <p:sldTgt/>
-                  </p:tgtEl>
-                </p:cond>
-              </p:nextCondLst>
-            </p:seq>
-          </p:childTnLst>
-        </p:cTn>
-      </p:par>
-    </p:tnLst>
-    <p:bldLst>
-      <p:bldP spid="3" grpId="0" uiExpand="1" build="p"/>
-    </p:bldLst>
-  </p:timing>
-</p:sld>
-</file>
-
-<file path=ppt/slides/slide5.xml><?xml version="1.0" encoding="utf-8"?>
 <p:sld xmlns:a="http://schemas.openxmlformats.org/drawingml/2006/main" xmlns:r="http://schemas.openxmlformats.org/officeDocument/2006/relationships" xmlns:p="http://schemas.openxmlformats.org/presentationml/2006/main">
   <p:cSld>
     <p:spTree>
@@ -22599,7 +21719,7 @@
 </p:sld>
 </file>
 
-<file path=ppt/slides/slide6.xml><?xml version="1.0" encoding="utf-8"?>
+<file path=ppt/slides/slide5.xml><?xml version="1.0" encoding="utf-8"?>
 <p:sld xmlns:a="http://schemas.openxmlformats.org/drawingml/2006/main" xmlns:r="http://schemas.openxmlformats.org/officeDocument/2006/relationships" xmlns:p="http://schemas.openxmlformats.org/presentationml/2006/main">
   <p:cSld>
     <p:spTree>
@@ -23354,7 +22474,7 @@
 </p:sld>
 </file>
 
-<file path=ppt/slides/slide7.xml><?xml version="1.0" encoding="utf-8"?>
+<file path=ppt/slides/slide6.xml><?xml version="1.0" encoding="utf-8"?>
 <p:sld xmlns:a="http://schemas.openxmlformats.org/drawingml/2006/main" xmlns:r="http://schemas.openxmlformats.org/officeDocument/2006/relationships" xmlns:p="http://schemas.openxmlformats.org/presentationml/2006/main">
   <p:cSld>
     <p:spTree>
@@ -24705,6 +23825,64 @@
       <p:bldP spid="13" grpId="1" animBg="1"/>
     </p:bldLst>
   </p:timing>
+</p:sld>
+</file>
+
+<file path=ppt/slides/slide7.xml><?xml version="1.0" encoding="utf-8"?>
+<p:sld xmlns:a="http://schemas.openxmlformats.org/drawingml/2006/main" xmlns:r="http://schemas.openxmlformats.org/officeDocument/2006/relationships" xmlns:p="http://schemas.openxmlformats.org/presentationml/2006/main">
+  <p:cSld>
+    <p:spTree>
+      <p:nvGrpSpPr>
+        <p:cNvPr id="1" name=""/>
+        <p:cNvGrpSpPr/>
+        <p:nvPr/>
+      </p:nvGrpSpPr>
+      <p:grpSpPr>
+        <a:xfrm>
+          <a:off x="0" y="0"/>
+          <a:ext cx="0" cy="0"/>
+          <a:chOff x="0" y="0"/>
+          <a:chExt cx="0" cy="0"/>
+        </a:xfrm>
+      </p:grpSpPr>
+      <p:sp>
+        <p:nvSpPr>
+          <p:cNvPr id="2" name="Title 1">
+            <a:extLst>
+              <a:ext uri="{FF2B5EF4-FFF2-40B4-BE49-F238E27FC236}">
+                <a16:creationId xmlns:a16="http://schemas.microsoft.com/office/drawing/2014/main" id="{17FAA588-4B7B-EBDF-72F5-76AB35256C42}"/>
+              </a:ext>
+            </a:extLst>
+          </p:cNvPr>
+          <p:cNvSpPr>
+            <a:spLocks noGrp="1"/>
+          </p:cNvSpPr>
+          <p:nvPr>
+            <p:ph type="title"/>
+          </p:nvPr>
+        </p:nvSpPr>
+        <p:spPr/>
+        <p:txBody>
+          <a:bodyPr/>
+          <a:lstStyle/>
+          <a:p>
+            <a:r>
+              <a:rPr lang="en-GB" dirty="0"/>
+              <a:t>R is a fancy calculator</a:t>
+            </a:r>
+          </a:p>
+        </p:txBody>
+      </p:sp>
+    </p:spTree>
+    <p:extLst>
+      <p:ext uri="{BB962C8B-B14F-4D97-AF65-F5344CB8AC3E}">
+        <p14:creationId xmlns:p14="http://schemas.microsoft.com/office/powerpoint/2010/main" val="128393412"/>
+      </p:ext>
+    </p:extLst>
+  </p:cSld>
+  <p:clrMapOvr>
+    <a:masterClrMapping/>
+  </p:clrMapOvr>
 </p:sld>
 </file>
 
@@ -25986,6 +25164,498 @@
       </p:transition>
     </mc:Fallback>
   </mc:AlternateContent>
+  <p:timing>
+    <p:tnLst>
+      <p:par>
+        <p:cTn id="1" dur="indefinite" restart="never" nodeType="tmRoot">
+          <p:childTnLst>
+            <p:seq concurrent="1" nextAc="seek">
+              <p:cTn id="2" dur="indefinite" nodeType="mainSeq">
+                <p:childTnLst>
+                  <p:par>
+                    <p:cTn id="3" fill="hold">
+                      <p:stCondLst>
+                        <p:cond delay="indefinite"/>
+                      </p:stCondLst>
+                      <p:childTnLst>
+                        <p:par>
+                          <p:cTn id="4" fill="hold">
+                            <p:stCondLst>
+                              <p:cond delay="0"/>
+                            </p:stCondLst>
+                            <p:childTnLst>
+                              <p:par>
+                                <p:cTn id="5" presetID="10" presetClass="entr" presetSubtype="0" fill="hold" grpId="0" nodeType="clickEffect">
+                                  <p:stCondLst>
+                                    <p:cond delay="0"/>
+                                  </p:stCondLst>
+                                  <p:childTnLst>
+                                    <p:set>
+                                      <p:cBhvr>
+                                        <p:cTn id="6" dur="1" fill="hold">
+                                          <p:stCondLst>
+                                            <p:cond delay="0"/>
+                                          </p:stCondLst>
+                                        </p:cTn>
+                                        <p:tgtEl>
+                                          <p:spTgt spid="3">
+                                            <p:txEl>
+                                              <p:pRg st="0" end="0"/>
+                                            </p:txEl>
+                                          </p:spTgt>
+                                        </p:tgtEl>
+                                        <p:attrNameLst>
+                                          <p:attrName>style.visibility</p:attrName>
+                                        </p:attrNameLst>
+                                      </p:cBhvr>
+                                      <p:to>
+                                        <p:strVal val="visible"/>
+                                      </p:to>
+                                    </p:set>
+                                    <p:animEffect transition="in" filter="fade">
+                                      <p:cBhvr>
+                                        <p:cTn id="7" dur="500"/>
+                                        <p:tgtEl>
+                                          <p:spTgt spid="3">
+                                            <p:txEl>
+                                              <p:pRg st="0" end="0"/>
+                                            </p:txEl>
+                                          </p:spTgt>
+                                        </p:tgtEl>
+                                      </p:cBhvr>
+                                    </p:animEffect>
+                                  </p:childTnLst>
+                                </p:cTn>
+                              </p:par>
+                            </p:childTnLst>
+                          </p:cTn>
+                        </p:par>
+                      </p:childTnLst>
+                    </p:cTn>
+                  </p:par>
+                  <p:par>
+                    <p:cTn id="8" fill="hold">
+                      <p:stCondLst>
+                        <p:cond delay="indefinite"/>
+                      </p:stCondLst>
+                      <p:childTnLst>
+                        <p:par>
+                          <p:cTn id="9" fill="hold">
+                            <p:stCondLst>
+                              <p:cond delay="0"/>
+                            </p:stCondLst>
+                            <p:childTnLst>
+                              <p:par>
+                                <p:cTn id="10" presetID="10" presetClass="entr" presetSubtype="0" fill="hold" grpId="0" nodeType="clickEffect">
+                                  <p:stCondLst>
+                                    <p:cond delay="0"/>
+                                  </p:stCondLst>
+                                  <p:childTnLst>
+                                    <p:set>
+                                      <p:cBhvr>
+                                        <p:cTn id="11" dur="1" fill="hold">
+                                          <p:stCondLst>
+                                            <p:cond delay="0"/>
+                                          </p:stCondLst>
+                                        </p:cTn>
+                                        <p:tgtEl>
+                                          <p:spTgt spid="3">
+                                            <p:txEl>
+                                              <p:pRg st="1" end="1"/>
+                                            </p:txEl>
+                                          </p:spTgt>
+                                        </p:tgtEl>
+                                        <p:attrNameLst>
+                                          <p:attrName>style.visibility</p:attrName>
+                                        </p:attrNameLst>
+                                      </p:cBhvr>
+                                      <p:to>
+                                        <p:strVal val="visible"/>
+                                      </p:to>
+                                    </p:set>
+                                    <p:animEffect transition="in" filter="fade">
+                                      <p:cBhvr>
+                                        <p:cTn id="12" dur="500"/>
+                                        <p:tgtEl>
+                                          <p:spTgt spid="3">
+                                            <p:txEl>
+                                              <p:pRg st="1" end="1"/>
+                                            </p:txEl>
+                                          </p:spTgt>
+                                        </p:tgtEl>
+                                      </p:cBhvr>
+                                    </p:animEffect>
+                                  </p:childTnLst>
+                                </p:cTn>
+                              </p:par>
+                            </p:childTnLst>
+                          </p:cTn>
+                        </p:par>
+                      </p:childTnLst>
+                    </p:cTn>
+                  </p:par>
+                  <p:par>
+                    <p:cTn id="13" fill="hold">
+                      <p:stCondLst>
+                        <p:cond delay="indefinite"/>
+                      </p:stCondLst>
+                      <p:childTnLst>
+                        <p:par>
+                          <p:cTn id="14" fill="hold">
+                            <p:stCondLst>
+                              <p:cond delay="0"/>
+                            </p:stCondLst>
+                            <p:childTnLst>
+                              <p:par>
+                                <p:cTn id="15" presetID="10" presetClass="entr" presetSubtype="0" fill="hold" grpId="0" nodeType="clickEffect">
+                                  <p:stCondLst>
+                                    <p:cond delay="0"/>
+                                  </p:stCondLst>
+                                  <p:childTnLst>
+                                    <p:set>
+                                      <p:cBhvr>
+                                        <p:cTn id="16" dur="1" fill="hold">
+                                          <p:stCondLst>
+                                            <p:cond delay="0"/>
+                                          </p:stCondLst>
+                                        </p:cTn>
+                                        <p:tgtEl>
+                                          <p:spTgt spid="3">
+                                            <p:txEl>
+                                              <p:pRg st="2" end="2"/>
+                                            </p:txEl>
+                                          </p:spTgt>
+                                        </p:tgtEl>
+                                        <p:attrNameLst>
+                                          <p:attrName>style.visibility</p:attrName>
+                                        </p:attrNameLst>
+                                      </p:cBhvr>
+                                      <p:to>
+                                        <p:strVal val="visible"/>
+                                      </p:to>
+                                    </p:set>
+                                    <p:animEffect transition="in" filter="fade">
+                                      <p:cBhvr>
+                                        <p:cTn id="17" dur="500"/>
+                                        <p:tgtEl>
+                                          <p:spTgt spid="3">
+                                            <p:txEl>
+                                              <p:pRg st="2" end="2"/>
+                                            </p:txEl>
+                                          </p:spTgt>
+                                        </p:tgtEl>
+                                      </p:cBhvr>
+                                    </p:animEffect>
+                                  </p:childTnLst>
+                                </p:cTn>
+                              </p:par>
+                              <p:par>
+                                <p:cTn id="18" presetID="10" presetClass="entr" presetSubtype="0" fill="hold" grpId="0" nodeType="withEffect">
+                                  <p:stCondLst>
+                                    <p:cond delay="0"/>
+                                  </p:stCondLst>
+                                  <p:childTnLst>
+                                    <p:set>
+                                      <p:cBhvr>
+                                        <p:cTn id="19" dur="1" fill="hold">
+                                          <p:stCondLst>
+                                            <p:cond delay="0"/>
+                                          </p:stCondLst>
+                                        </p:cTn>
+                                        <p:tgtEl>
+                                          <p:spTgt spid="3">
+                                            <p:txEl>
+                                              <p:pRg st="3" end="3"/>
+                                            </p:txEl>
+                                          </p:spTgt>
+                                        </p:tgtEl>
+                                        <p:attrNameLst>
+                                          <p:attrName>style.visibility</p:attrName>
+                                        </p:attrNameLst>
+                                      </p:cBhvr>
+                                      <p:to>
+                                        <p:strVal val="visible"/>
+                                      </p:to>
+                                    </p:set>
+                                    <p:animEffect transition="in" filter="fade">
+                                      <p:cBhvr>
+                                        <p:cTn id="20" dur="500"/>
+                                        <p:tgtEl>
+                                          <p:spTgt spid="3">
+                                            <p:txEl>
+                                              <p:pRg st="3" end="3"/>
+                                            </p:txEl>
+                                          </p:spTgt>
+                                        </p:tgtEl>
+                                      </p:cBhvr>
+                                    </p:animEffect>
+                                  </p:childTnLst>
+                                </p:cTn>
+                              </p:par>
+                            </p:childTnLst>
+                          </p:cTn>
+                        </p:par>
+                      </p:childTnLst>
+                    </p:cTn>
+                  </p:par>
+                  <p:par>
+                    <p:cTn id="21" fill="hold">
+                      <p:stCondLst>
+                        <p:cond delay="indefinite"/>
+                      </p:stCondLst>
+                      <p:childTnLst>
+                        <p:par>
+                          <p:cTn id="22" fill="hold">
+                            <p:stCondLst>
+                              <p:cond delay="0"/>
+                            </p:stCondLst>
+                            <p:childTnLst>
+                              <p:par>
+                                <p:cTn id="23" presetID="10" presetClass="entr" presetSubtype="0" fill="hold" grpId="0" nodeType="clickEffect">
+                                  <p:stCondLst>
+                                    <p:cond delay="0"/>
+                                  </p:stCondLst>
+                                  <p:childTnLst>
+                                    <p:set>
+                                      <p:cBhvr>
+                                        <p:cTn id="24" dur="1" fill="hold">
+                                          <p:stCondLst>
+                                            <p:cond delay="0"/>
+                                          </p:stCondLst>
+                                        </p:cTn>
+                                        <p:tgtEl>
+                                          <p:spTgt spid="3">
+                                            <p:txEl>
+                                              <p:pRg st="4" end="4"/>
+                                            </p:txEl>
+                                          </p:spTgt>
+                                        </p:tgtEl>
+                                        <p:attrNameLst>
+                                          <p:attrName>style.visibility</p:attrName>
+                                        </p:attrNameLst>
+                                      </p:cBhvr>
+                                      <p:to>
+                                        <p:strVal val="visible"/>
+                                      </p:to>
+                                    </p:set>
+                                    <p:animEffect transition="in" filter="fade">
+                                      <p:cBhvr>
+                                        <p:cTn id="25" dur="500"/>
+                                        <p:tgtEl>
+                                          <p:spTgt spid="3">
+                                            <p:txEl>
+                                              <p:pRg st="4" end="4"/>
+                                            </p:txEl>
+                                          </p:spTgt>
+                                        </p:tgtEl>
+                                      </p:cBhvr>
+                                    </p:animEffect>
+                                  </p:childTnLst>
+                                </p:cTn>
+                              </p:par>
+                              <p:par>
+                                <p:cTn id="26" presetID="10" presetClass="entr" presetSubtype="0" fill="hold" grpId="0" nodeType="withEffect">
+                                  <p:stCondLst>
+                                    <p:cond delay="0"/>
+                                  </p:stCondLst>
+                                  <p:childTnLst>
+                                    <p:set>
+                                      <p:cBhvr>
+                                        <p:cTn id="27" dur="1" fill="hold">
+                                          <p:stCondLst>
+                                            <p:cond delay="0"/>
+                                          </p:stCondLst>
+                                        </p:cTn>
+                                        <p:tgtEl>
+                                          <p:spTgt spid="3">
+                                            <p:txEl>
+                                              <p:pRg st="5" end="5"/>
+                                            </p:txEl>
+                                          </p:spTgt>
+                                        </p:tgtEl>
+                                        <p:attrNameLst>
+                                          <p:attrName>style.visibility</p:attrName>
+                                        </p:attrNameLst>
+                                      </p:cBhvr>
+                                      <p:to>
+                                        <p:strVal val="visible"/>
+                                      </p:to>
+                                    </p:set>
+                                    <p:animEffect transition="in" filter="fade">
+                                      <p:cBhvr>
+                                        <p:cTn id="28" dur="500"/>
+                                        <p:tgtEl>
+                                          <p:spTgt spid="3">
+                                            <p:txEl>
+                                              <p:pRg st="5" end="5"/>
+                                            </p:txEl>
+                                          </p:spTgt>
+                                        </p:tgtEl>
+                                      </p:cBhvr>
+                                    </p:animEffect>
+                                  </p:childTnLst>
+                                </p:cTn>
+                              </p:par>
+                              <p:par>
+                                <p:cTn id="29" presetID="10" presetClass="entr" presetSubtype="0" fill="hold" grpId="0" nodeType="withEffect">
+                                  <p:stCondLst>
+                                    <p:cond delay="0"/>
+                                  </p:stCondLst>
+                                  <p:childTnLst>
+                                    <p:set>
+                                      <p:cBhvr>
+                                        <p:cTn id="30" dur="1" fill="hold">
+                                          <p:stCondLst>
+                                            <p:cond delay="0"/>
+                                          </p:stCondLst>
+                                        </p:cTn>
+                                        <p:tgtEl>
+                                          <p:spTgt spid="3">
+                                            <p:txEl>
+                                              <p:pRg st="6" end="6"/>
+                                            </p:txEl>
+                                          </p:spTgt>
+                                        </p:tgtEl>
+                                        <p:attrNameLst>
+                                          <p:attrName>style.visibility</p:attrName>
+                                        </p:attrNameLst>
+                                      </p:cBhvr>
+                                      <p:to>
+                                        <p:strVal val="visible"/>
+                                      </p:to>
+                                    </p:set>
+                                    <p:animEffect transition="in" filter="fade">
+                                      <p:cBhvr>
+                                        <p:cTn id="31" dur="500"/>
+                                        <p:tgtEl>
+                                          <p:spTgt spid="3">
+                                            <p:txEl>
+                                              <p:pRg st="6" end="6"/>
+                                            </p:txEl>
+                                          </p:spTgt>
+                                        </p:tgtEl>
+                                      </p:cBhvr>
+                                    </p:animEffect>
+                                  </p:childTnLst>
+                                </p:cTn>
+                              </p:par>
+                              <p:par>
+                                <p:cTn id="32" presetID="10" presetClass="entr" presetSubtype="0" fill="hold" grpId="0" nodeType="withEffect">
+                                  <p:stCondLst>
+                                    <p:cond delay="0"/>
+                                  </p:stCondLst>
+                                  <p:childTnLst>
+                                    <p:set>
+                                      <p:cBhvr>
+                                        <p:cTn id="33" dur="1" fill="hold">
+                                          <p:stCondLst>
+                                            <p:cond delay="0"/>
+                                          </p:stCondLst>
+                                        </p:cTn>
+                                        <p:tgtEl>
+                                          <p:spTgt spid="3">
+                                            <p:txEl>
+                                              <p:pRg st="7" end="7"/>
+                                            </p:txEl>
+                                          </p:spTgt>
+                                        </p:tgtEl>
+                                        <p:attrNameLst>
+                                          <p:attrName>style.visibility</p:attrName>
+                                        </p:attrNameLst>
+                                      </p:cBhvr>
+                                      <p:to>
+                                        <p:strVal val="visible"/>
+                                      </p:to>
+                                    </p:set>
+                                    <p:animEffect transition="in" filter="fade">
+                                      <p:cBhvr>
+                                        <p:cTn id="34" dur="500"/>
+                                        <p:tgtEl>
+                                          <p:spTgt spid="3">
+                                            <p:txEl>
+                                              <p:pRg st="7" end="7"/>
+                                            </p:txEl>
+                                          </p:spTgt>
+                                        </p:tgtEl>
+                                      </p:cBhvr>
+                                    </p:animEffect>
+                                  </p:childTnLst>
+                                </p:cTn>
+                              </p:par>
+                              <p:par>
+                                <p:cTn id="35" presetID="10" presetClass="entr" presetSubtype="0" fill="hold" grpId="0" nodeType="withEffect">
+                                  <p:stCondLst>
+                                    <p:cond delay="0"/>
+                                  </p:stCondLst>
+                                  <p:childTnLst>
+                                    <p:set>
+                                      <p:cBhvr>
+                                        <p:cTn id="36" dur="1" fill="hold">
+                                          <p:stCondLst>
+                                            <p:cond delay="0"/>
+                                          </p:stCondLst>
+                                        </p:cTn>
+                                        <p:tgtEl>
+                                          <p:spTgt spid="3">
+                                            <p:txEl>
+                                              <p:pRg st="8" end="8"/>
+                                            </p:txEl>
+                                          </p:spTgt>
+                                        </p:tgtEl>
+                                        <p:attrNameLst>
+                                          <p:attrName>style.visibility</p:attrName>
+                                        </p:attrNameLst>
+                                      </p:cBhvr>
+                                      <p:to>
+                                        <p:strVal val="visible"/>
+                                      </p:to>
+                                    </p:set>
+                                    <p:animEffect transition="in" filter="fade">
+                                      <p:cBhvr>
+                                        <p:cTn id="37" dur="500"/>
+                                        <p:tgtEl>
+                                          <p:spTgt spid="3">
+                                            <p:txEl>
+                                              <p:pRg st="8" end="8"/>
+                                            </p:txEl>
+                                          </p:spTgt>
+                                        </p:tgtEl>
+                                      </p:cBhvr>
+                                    </p:animEffect>
+                                  </p:childTnLst>
+                                </p:cTn>
+                              </p:par>
+                            </p:childTnLst>
+                          </p:cTn>
+                        </p:par>
+                      </p:childTnLst>
+                    </p:cTn>
+                  </p:par>
+                </p:childTnLst>
+              </p:cTn>
+              <p:prevCondLst>
+                <p:cond evt="onPrev" delay="0">
+                  <p:tgtEl>
+                    <p:sldTgt/>
+                  </p:tgtEl>
+                </p:cond>
+              </p:prevCondLst>
+              <p:nextCondLst>
+                <p:cond evt="onNext" delay="0">
+                  <p:tgtEl>
+                    <p:sldTgt/>
+                  </p:tgtEl>
+                </p:cond>
+              </p:nextCondLst>
+            </p:seq>
+          </p:childTnLst>
+        </p:cTn>
+      </p:par>
+    </p:tnLst>
+    <p:bldLst>
+      <p:bldP spid="3" grpId="0" build="p"/>
+    </p:bldLst>
+  </p:timing>
 </p:sld>
 </file>
 
